--- a/Тема 2/ДВ_3_ИИ_Лекция_2.pptx
+++ b/Тема 2/ДВ_3_ИИ_Лекция_2.pptx
@@ -5,7 +5,7 @@
     <p:sldMasterId id="2147483648" r:id="rId1"/>
   </p:sldMasterIdLst>
   <p:notesMasterIdLst>
-    <p:notesMasterId r:id="rId23"/>
+    <p:notesMasterId r:id="rId22"/>
   </p:notesMasterIdLst>
   <p:sldIdLst>
     <p:sldId id="256" r:id="rId2"/>
@@ -24,11 +24,10 @@
     <p:sldId id="279" r:id="rId15"/>
     <p:sldId id="280" r:id="rId16"/>
     <p:sldId id="270" r:id="rId17"/>
-    <p:sldId id="283" r:id="rId18"/>
-    <p:sldId id="284" r:id="rId19"/>
-    <p:sldId id="281" r:id="rId20"/>
-    <p:sldId id="282" r:id="rId21"/>
-    <p:sldId id="266" r:id="rId22"/>
+    <p:sldId id="284" r:id="rId18"/>
+    <p:sldId id="281" r:id="rId19"/>
+    <p:sldId id="282" r:id="rId20"/>
+    <p:sldId id="266" r:id="rId21"/>
   </p:sldIdLst>
   <p:sldSz cx="12192000" cy="6858000"/>
   <p:notesSz cx="6858000" cy="9144000"/>
@@ -612,168 +611,6 @@
           <a:bodyPr/>
           <a:lstStyle/>
           <a:p>
-            <a:pPr algn="l"/>
-            <a:r>
-              <a:rPr lang="ru-RU" b="0" i="0" dirty="0">
-                <a:effectLst/>
-                <a:latin typeface="fkGroteskNeue"/>
-              </a:rPr>
-              <a:t>Теперь у вас есть несколько алгоритмов. Как выбрать лучший?</a:t>
-            </a:r>
-          </a:p>
-          <a:p>
-            <a:pPr algn="l"/>
-            <a:r>
-              <a:rPr lang="ru-RU" b="0" i="0" dirty="0">
-                <a:effectLst/>
-                <a:latin typeface="fkGroteskNeue"/>
-              </a:rPr>
-              <a:t>Обучили </a:t>
-            </a:r>
-            <a:r>
-              <a:rPr lang="ru-RU" b="0" i="0" dirty="0" err="1">
-                <a:effectLst/>
-                <a:latin typeface="fkGroteskNeue"/>
-              </a:rPr>
-              <a:t>Logistic</a:t>
-            </a:r>
-            <a:r>
-              <a:rPr lang="ru-RU" b="0" i="0" dirty="0">
-                <a:effectLst/>
-                <a:latin typeface="fkGroteskNeue"/>
-              </a:rPr>
-              <a:t> </a:t>
-            </a:r>
-            <a:r>
-              <a:rPr lang="ru-RU" b="0" i="0" dirty="0" err="1">
-                <a:effectLst/>
-                <a:latin typeface="fkGroteskNeue"/>
-              </a:rPr>
-              <a:t>Regression</a:t>
-            </a:r>
-            <a:r>
-              <a:rPr lang="ru-RU" b="0" i="0" dirty="0">
-                <a:effectLst/>
-                <a:latin typeface="fkGroteskNeue"/>
-              </a:rPr>
-              <a:t>, </a:t>
-            </a:r>
-            <a:r>
-              <a:rPr lang="ru-RU" b="0" i="0" dirty="0" err="1">
-                <a:effectLst/>
-                <a:latin typeface="fkGroteskNeue"/>
-              </a:rPr>
-              <a:t>Random</a:t>
-            </a:r>
-            <a:r>
-              <a:rPr lang="ru-RU" b="0" i="0" dirty="0">
-                <a:effectLst/>
-                <a:latin typeface="fkGroteskNeue"/>
-              </a:rPr>
-              <a:t> </a:t>
-            </a:r>
-            <a:r>
-              <a:rPr lang="ru-RU" b="0" i="0" dirty="0" err="1">
-                <a:effectLst/>
-                <a:latin typeface="fkGroteskNeue"/>
-              </a:rPr>
-              <a:t>Forest</a:t>
-            </a:r>
-            <a:r>
-              <a:rPr lang="ru-RU" b="0" i="0" dirty="0">
-                <a:effectLst/>
-                <a:latin typeface="fkGroteskNeue"/>
-              </a:rPr>
-              <a:t>, SVM, </a:t>
-            </a:r>
-            <a:r>
-              <a:rPr lang="ru-RU" b="0" i="0" dirty="0" err="1">
-                <a:effectLst/>
-                <a:latin typeface="fkGroteskNeue"/>
-              </a:rPr>
-              <a:t>XGBoost</a:t>
-            </a:r>
-            <a:r>
-              <a:rPr lang="ru-RU" b="0" i="0" dirty="0">
-                <a:effectLst/>
-                <a:latin typeface="fkGroteskNeue"/>
-              </a:rPr>
-              <a:t> на одном </a:t>
-            </a:r>
-            <a:r>
-              <a:rPr lang="ru-RU" b="0" i="0" dirty="0" err="1">
-                <a:effectLst/>
-                <a:latin typeface="fkGroteskNeue"/>
-              </a:rPr>
-              <a:t>датасете</a:t>
-            </a:r>
-            <a:r>
-              <a:rPr lang="ru-RU" b="0" i="0" dirty="0">
-                <a:effectLst/>
-                <a:latin typeface="fkGroteskNeue"/>
-              </a:rPr>
-              <a:t>.</a:t>
-            </a:r>
-          </a:p>
-          <a:p>
-            <a:pPr algn="l"/>
-            <a:r>
-              <a:rPr lang="ru-RU" b="0" i="0" dirty="0">
-                <a:effectLst/>
-                <a:latin typeface="fkGroteskNeue"/>
-              </a:rPr>
-              <a:t>Результаты на тестовом наборе:</a:t>
-            </a:r>
-          </a:p>
-          <a:p>
-            <a:pPr algn="l"/>
-            <a:r>
-              <a:rPr lang="en-US" b="0" i="0" dirty="0">
-                <a:effectLst/>
-                <a:latin typeface="fkGroteskNeue"/>
-              </a:rPr>
-              <a:t>[table]</a:t>
-            </a:r>
-            <a:endParaRPr lang="ru-RU" b="0" i="0" dirty="0">
-              <a:effectLst/>
-              <a:latin typeface="fkGroteskNeue"/>
-            </a:endParaRPr>
-          </a:p>
-          <a:p>
-            <a:pPr algn="l"/>
-            <a:r>
-              <a:rPr lang="ru-RU" b="0" i="0" dirty="0">
-                <a:effectLst/>
-                <a:latin typeface="fkGroteskNeue"/>
-              </a:rPr>
-              <a:t>Вывод: </a:t>
-            </a:r>
-            <a:r>
-              <a:rPr lang="ru-RU" b="0" i="0" dirty="0" err="1">
-                <a:effectLst/>
-                <a:latin typeface="fkGroteskNeue"/>
-              </a:rPr>
-              <a:t>XGBoost</a:t>
-            </a:r>
-            <a:r>
-              <a:rPr lang="ru-RU" b="0" i="0" dirty="0">
-                <a:effectLst/>
-                <a:latin typeface="fkGroteskNeue"/>
-              </a:rPr>
-              <a:t> самый лучший! Все рады!</a:t>
-            </a:r>
-          </a:p>
-          <a:p>
-            <a:pPr algn="l"/>
-            <a:r>
-              <a:rPr lang="ru-RU" b="0" i="0" dirty="0">
-                <a:effectLst/>
-                <a:latin typeface="fkGroteskNeue"/>
-              </a:rPr>
-              <a:t>Но подождите...</a:t>
-            </a:r>
-          </a:p>
-          <a:p>
             <a:endParaRPr lang="ru-RU" sz="1200" b="0" i="0" kern="1200" dirty="0">
               <a:solidFill>
                 <a:schemeClr val="tx1"/>
@@ -867,442 +704,6 @@
           <a:lstStyle/>
           <a:p>
             <a:pPr algn="l"/>
-            <a:r>
-              <a:rPr lang="ru-RU" b="0" i="0" dirty="0">
-                <a:effectLst/>
-                <a:latin typeface="fkGroteskNeue"/>
-              </a:rPr>
-              <a:t>Может быть, это случайность. Может быть, на другом </a:t>
-            </a:r>
-            <a:r>
-              <a:rPr lang="ru-RU" b="0" i="0" dirty="0" err="1">
-                <a:effectLst/>
-                <a:latin typeface="fkGroteskNeue"/>
-              </a:rPr>
-              <a:t>random</a:t>
-            </a:r>
-            <a:r>
-              <a:rPr lang="ru-RU" b="0" i="0" dirty="0">
-                <a:effectLst/>
-                <a:latin typeface="fkGroteskNeue"/>
-              </a:rPr>
-              <a:t> </a:t>
-            </a:r>
-            <a:r>
-              <a:rPr lang="ru-RU" b="0" i="0" dirty="0" err="1">
-                <a:effectLst/>
-                <a:latin typeface="fkGroteskNeue"/>
-              </a:rPr>
-              <a:t>seed</a:t>
-            </a:r>
-            <a:r>
-              <a:rPr lang="ru-RU" b="0" i="0" dirty="0">
-                <a:effectLst/>
-                <a:latin typeface="fkGroteskNeue"/>
-              </a:rPr>
-              <a:t> результаты другие?</a:t>
-            </a:r>
-          </a:p>
-          <a:p>
-            <a:pPr algn="l"/>
-            <a:r>
-              <a:rPr lang="ru-RU" b="0" i="0" dirty="0">
-                <a:effectLst/>
-                <a:latin typeface="fkGroteskNeue"/>
-              </a:rPr>
-              <a:t>Правильный подход: K-</a:t>
-            </a:r>
-            <a:r>
-              <a:rPr lang="ru-RU" b="0" i="0" dirty="0" err="1">
-                <a:effectLst/>
-                <a:latin typeface="fkGroteskNeue"/>
-              </a:rPr>
-              <a:t>fold</a:t>
-            </a:r>
-            <a:r>
-              <a:rPr lang="ru-RU" b="0" i="0" dirty="0">
-                <a:effectLst/>
-                <a:latin typeface="fkGroteskNeue"/>
-              </a:rPr>
-              <a:t> </a:t>
-            </a:r>
-            <a:r>
-              <a:rPr lang="ru-RU" b="0" i="0" dirty="0" err="1">
-                <a:effectLst/>
-                <a:latin typeface="fkGroteskNeue"/>
-              </a:rPr>
-              <a:t>cross-validation</a:t>
-            </a:r>
-            <a:r>
-              <a:rPr lang="ru-RU" b="0" i="0" dirty="0">
-                <a:effectLst/>
-                <a:latin typeface="fkGroteskNeue"/>
-              </a:rPr>
-              <a:t>.</a:t>
-            </a:r>
-          </a:p>
-          <a:p>
-            <a:pPr algn="l"/>
-            <a:r>
-              <a:rPr lang="ru-RU" b="0" i="0" dirty="0">
-                <a:effectLst/>
-                <a:latin typeface="fkGroteskNeue"/>
-              </a:rPr>
-              <a:t>Обучаем каждый алгоритм 5 раз (с 5-fold):</a:t>
-            </a:r>
-          </a:p>
-          <a:p>
-            <a:pPr algn="l">
-              <a:buFont typeface="Arial" panose="020B0604020202020204" pitchFamily="34" charset="0"/>
-              <a:buChar char="•"/>
-            </a:pPr>
-            <a:r>
-              <a:rPr lang="ru-RU" b="0" i="0" dirty="0" err="1">
-                <a:effectLst/>
-                <a:latin typeface="fkGroteskNeue"/>
-              </a:rPr>
-              <a:t>Fold</a:t>
-            </a:r>
-            <a:r>
-              <a:rPr lang="ru-RU" b="0" i="0" dirty="0">
-                <a:effectLst/>
-                <a:latin typeface="fkGroteskNeue"/>
-              </a:rPr>
-              <a:t> 1: </a:t>
-            </a:r>
-            <a:r>
-              <a:rPr lang="ru-RU" b="0" i="0" dirty="0" err="1">
-                <a:effectLst/>
-                <a:latin typeface="fkGroteskNeue"/>
-              </a:rPr>
-              <a:t>train</a:t>
-            </a:r>
-            <a:r>
-              <a:rPr lang="ru-RU" b="0" i="0" dirty="0">
-                <a:effectLst/>
-                <a:latin typeface="fkGroteskNeue"/>
-              </a:rPr>
-              <a:t> на </a:t>
-            </a:r>
-            <a:r>
-              <a:rPr lang="ru-RU" b="0" i="0" dirty="0" err="1">
-                <a:effectLst/>
-                <a:latin typeface="fkGroteskNeue"/>
-              </a:rPr>
-              <a:t>фолдах</a:t>
-            </a:r>
-            <a:r>
-              <a:rPr lang="ru-RU" b="0" i="0" dirty="0">
-                <a:effectLst/>
-                <a:latin typeface="fkGroteskNeue"/>
-              </a:rPr>
-              <a:t> 2-5, </a:t>
-            </a:r>
-            <a:r>
-              <a:rPr lang="ru-RU" b="0" i="0" dirty="0" err="1">
-                <a:effectLst/>
-                <a:latin typeface="fkGroteskNeue"/>
-              </a:rPr>
-              <a:t>test</a:t>
-            </a:r>
-            <a:r>
-              <a:rPr lang="ru-RU" b="0" i="0" dirty="0">
-                <a:effectLst/>
-                <a:latin typeface="fkGroteskNeue"/>
-              </a:rPr>
-              <a:t> на </a:t>
-            </a:r>
-            <a:r>
-              <a:rPr lang="ru-RU" b="0" i="0" dirty="0" err="1">
-                <a:effectLst/>
-                <a:latin typeface="fkGroteskNeue"/>
-              </a:rPr>
-              <a:t>фолде</a:t>
-            </a:r>
-            <a:r>
-              <a:rPr lang="ru-RU" b="0" i="0" dirty="0">
-                <a:effectLst/>
-                <a:latin typeface="fkGroteskNeue"/>
-              </a:rPr>
-              <a:t> 1</a:t>
-            </a:r>
-          </a:p>
-          <a:p>
-            <a:pPr algn="l">
-              <a:buFont typeface="Arial" panose="020B0604020202020204" pitchFamily="34" charset="0"/>
-              <a:buChar char="•"/>
-            </a:pPr>
-            <a:r>
-              <a:rPr lang="ru-RU" b="0" i="0" dirty="0" err="1">
-                <a:effectLst/>
-                <a:latin typeface="fkGroteskNeue"/>
-              </a:rPr>
-              <a:t>Fold</a:t>
-            </a:r>
-            <a:r>
-              <a:rPr lang="ru-RU" b="0" i="0" dirty="0">
-                <a:effectLst/>
-                <a:latin typeface="fkGroteskNeue"/>
-              </a:rPr>
-              <a:t> 2: </a:t>
-            </a:r>
-            <a:r>
-              <a:rPr lang="ru-RU" b="0" i="0" dirty="0" err="1">
-                <a:effectLst/>
-                <a:latin typeface="fkGroteskNeue"/>
-              </a:rPr>
-              <a:t>train</a:t>
-            </a:r>
-            <a:r>
-              <a:rPr lang="ru-RU" b="0" i="0" dirty="0">
-                <a:effectLst/>
-                <a:latin typeface="fkGroteskNeue"/>
-              </a:rPr>
-              <a:t> на </a:t>
-            </a:r>
-            <a:r>
-              <a:rPr lang="ru-RU" b="0" i="0" dirty="0" err="1">
-                <a:effectLst/>
-                <a:latin typeface="fkGroteskNeue"/>
-              </a:rPr>
-              <a:t>фолдах</a:t>
-            </a:r>
-            <a:r>
-              <a:rPr lang="ru-RU" b="0" i="0" dirty="0">
-                <a:effectLst/>
-                <a:latin typeface="fkGroteskNeue"/>
-              </a:rPr>
-              <a:t> 1,3-5, </a:t>
-            </a:r>
-            <a:r>
-              <a:rPr lang="ru-RU" b="0" i="0" dirty="0" err="1">
-                <a:effectLst/>
-                <a:latin typeface="fkGroteskNeue"/>
-              </a:rPr>
-              <a:t>test</a:t>
-            </a:r>
-            <a:r>
-              <a:rPr lang="ru-RU" b="0" i="0" dirty="0">
-                <a:effectLst/>
-                <a:latin typeface="fkGroteskNeue"/>
-              </a:rPr>
-              <a:t> на </a:t>
-            </a:r>
-            <a:r>
-              <a:rPr lang="ru-RU" b="0" i="0" dirty="0" err="1">
-                <a:effectLst/>
-                <a:latin typeface="fkGroteskNeue"/>
-              </a:rPr>
-              <a:t>фолде</a:t>
-            </a:r>
-            <a:r>
-              <a:rPr lang="ru-RU" b="0" i="0" dirty="0">
-                <a:effectLst/>
-                <a:latin typeface="fkGroteskNeue"/>
-              </a:rPr>
-              <a:t> 2</a:t>
-            </a:r>
-          </a:p>
-          <a:p>
-            <a:pPr algn="l">
-              <a:buFont typeface="Arial" panose="020B0604020202020204" pitchFamily="34" charset="0"/>
-              <a:buChar char="•"/>
-            </a:pPr>
-            <a:r>
-              <a:rPr lang="ru-RU" b="0" i="0" dirty="0">
-                <a:effectLst/>
-                <a:latin typeface="fkGroteskNeue"/>
-              </a:rPr>
-              <a:t>...и т.д.</a:t>
-            </a:r>
-          </a:p>
-          <a:p>
-            <a:pPr algn="l"/>
-            <a:r>
-              <a:rPr lang="ru-RU" b="0" i="0" dirty="0">
-                <a:effectLst/>
-                <a:latin typeface="fkGroteskNeue"/>
-              </a:rPr>
-              <a:t>Результаты:</a:t>
-            </a:r>
-          </a:p>
-          <a:p>
-            <a:pPr algn="l"/>
-            <a:r>
-              <a:rPr lang="ru-RU" b="0" i="0" dirty="0">
-                <a:effectLst/>
-                <a:latin typeface="fkGroteskNeue"/>
-              </a:rPr>
-              <a:t>Теперь видно:</a:t>
-            </a:r>
-          </a:p>
-          <a:p>
-            <a:pPr algn="l">
-              <a:buFont typeface="Arial" panose="020B0604020202020204" pitchFamily="34" charset="0"/>
-              <a:buChar char="•"/>
-            </a:pPr>
-            <a:r>
-              <a:rPr lang="ru-RU" b="0" i="0" dirty="0" err="1">
-                <a:effectLst/>
-                <a:latin typeface="fkGroteskNeue"/>
-              </a:rPr>
-              <a:t>XGBoost</a:t>
-            </a:r>
-            <a:r>
-              <a:rPr lang="ru-RU" b="0" i="0" dirty="0">
-                <a:effectLst/>
-                <a:latin typeface="fkGroteskNeue"/>
-              </a:rPr>
-              <a:t>: 0.900 ± 0.015</a:t>
-            </a:r>
-          </a:p>
-          <a:p>
-            <a:pPr algn="l">
-              <a:buFont typeface="Arial" panose="020B0604020202020204" pitchFamily="34" charset="0"/>
-              <a:buChar char="•"/>
-            </a:pPr>
-            <a:r>
-              <a:rPr lang="ru-RU" b="0" i="0" dirty="0" err="1">
-                <a:effectLst/>
-                <a:latin typeface="fkGroteskNeue"/>
-              </a:rPr>
-              <a:t>Random</a:t>
-            </a:r>
-            <a:r>
-              <a:rPr lang="ru-RU" b="0" i="0" dirty="0">
-                <a:effectLst/>
-                <a:latin typeface="fkGroteskNeue"/>
-              </a:rPr>
-              <a:t> </a:t>
-            </a:r>
-            <a:r>
-              <a:rPr lang="ru-RU" b="0" i="0" dirty="0" err="1">
-                <a:effectLst/>
-                <a:latin typeface="fkGroteskNeue"/>
-              </a:rPr>
-              <a:t>Forest</a:t>
-            </a:r>
-            <a:r>
-              <a:rPr lang="ru-RU" b="0" i="0" dirty="0">
-                <a:effectLst/>
-                <a:latin typeface="fkGroteskNeue"/>
-              </a:rPr>
-              <a:t>: 0.882 ± 0.011</a:t>
-            </a:r>
-          </a:p>
-          <a:p>
-            <a:pPr algn="l">
-              <a:buFont typeface="Arial" panose="020B0604020202020204" pitchFamily="34" charset="0"/>
-              <a:buChar char="•"/>
-            </a:pPr>
-            <a:r>
-              <a:rPr lang="ru-RU" b="0" i="0" dirty="0">
-                <a:effectLst/>
-                <a:latin typeface="fkGroteskNeue"/>
-              </a:rPr>
-              <a:t>SVM: 0.868 ± 0.008</a:t>
-            </a:r>
-          </a:p>
-          <a:p>
-            <a:pPr algn="l"/>
-            <a:r>
-              <a:rPr lang="ru-RU" b="0" i="0" dirty="0">
-                <a:effectLst/>
-                <a:latin typeface="fkGroteskNeue"/>
-              </a:rPr>
-              <a:t>Пересекаются ли доверительные интервалы?</a:t>
-            </a:r>
-          </a:p>
-          <a:p>
-            <a:pPr algn="l"/>
-            <a:r>
-              <a:rPr lang="ru-RU" b="0" i="0" dirty="0" err="1">
-                <a:effectLst/>
-                <a:latin typeface="fkGroteskNeue"/>
-              </a:rPr>
-              <a:t>XGBoost</a:t>
-            </a:r>
-            <a:r>
-              <a:rPr lang="ru-RU" b="0" i="0" dirty="0">
-                <a:effectLst/>
-                <a:latin typeface="fkGroteskNeue"/>
-              </a:rPr>
-              <a:t>: [0.885, 0.915]</a:t>
-            </a:r>
-            <a:br>
-              <a:rPr lang="ru-RU" b="0" i="0" dirty="0">
-                <a:effectLst/>
-                <a:latin typeface="fkGroteskNeue"/>
-              </a:rPr>
-            </a:br>
-            <a:r>
-              <a:rPr lang="ru-RU" b="0" i="0" dirty="0" err="1">
-                <a:effectLst/>
-                <a:latin typeface="fkGroteskNeue"/>
-              </a:rPr>
-              <a:t>Random</a:t>
-            </a:r>
-            <a:r>
-              <a:rPr lang="ru-RU" b="0" i="0" dirty="0">
-                <a:effectLst/>
-                <a:latin typeface="fkGroteskNeue"/>
-              </a:rPr>
-              <a:t> </a:t>
-            </a:r>
-            <a:r>
-              <a:rPr lang="ru-RU" b="0" i="0" dirty="0" err="1">
-                <a:effectLst/>
-                <a:latin typeface="fkGroteskNeue"/>
-              </a:rPr>
-              <a:t>Forest</a:t>
-            </a:r>
-            <a:r>
-              <a:rPr lang="ru-RU" b="0" i="0" dirty="0">
-                <a:effectLst/>
-                <a:latin typeface="fkGroteskNeue"/>
-              </a:rPr>
-              <a:t>: [0.871, 0.893]</a:t>
-            </a:r>
-          </a:p>
-          <a:p>
-            <a:pPr algn="l"/>
-            <a:r>
-              <a:rPr lang="ru-RU" b="0" i="0" dirty="0">
-                <a:effectLst/>
-                <a:latin typeface="fkGroteskNeue"/>
-              </a:rPr>
-              <a:t>Нет полного пересечения. </a:t>
-            </a:r>
-          </a:p>
-          <a:p>
-            <a:pPr algn="l"/>
-            <a:r>
-              <a:rPr lang="ru-RU" b="0" i="0" dirty="0" err="1">
-                <a:effectLst/>
-                <a:latin typeface="fkGroteskNeue"/>
-              </a:rPr>
-              <a:t>XGBoost</a:t>
-            </a:r>
-            <a:r>
-              <a:rPr lang="ru-RU" b="0" i="0" dirty="0">
-                <a:effectLst/>
-                <a:latin typeface="fkGroteskNeue"/>
-              </a:rPr>
-              <a:t> действительно лучше RF.</a:t>
-            </a:r>
-          </a:p>
-          <a:p>
-            <a:pPr algn="l"/>
-            <a:r>
-              <a:rPr lang="ru-RU" b="0" i="0" dirty="0">
-                <a:effectLst/>
-                <a:latin typeface="fkGroteskNeue"/>
-              </a:rPr>
-              <a:t>Но...</a:t>
-            </a:r>
-          </a:p>
-          <a:p>
-            <a:pPr algn="l"/>
             <a:endParaRPr lang="ru-RU" sz="1200" b="0" i="0" kern="1200" dirty="0">
               <a:solidFill>
                 <a:schemeClr val="tx1"/>
@@ -1395,157 +796,6 @@
           <a:bodyPr/>
           <a:lstStyle/>
           <a:p>
-            <a:pPr algn="l"/>
-            <a:r>
-              <a:rPr lang="ru-RU" b="0" i="0" dirty="0">
-                <a:effectLst/>
-                <a:latin typeface="fkGroteskNeue"/>
-              </a:rPr>
-              <a:t>Часто есть </a:t>
-            </a:r>
-            <a:r>
-              <a:rPr lang="ru-RU" b="0" i="0" dirty="0" err="1">
-                <a:effectLst/>
-                <a:latin typeface="fkGroteskNeue"/>
-              </a:rPr>
-              <a:t>trade-off</a:t>
-            </a:r>
-            <a:r>
-              <a:rPr lang="ru-RU" b="0" i="0" dirty="0">
-                <a:effectLst/>
-                <a:latin typeface="fkGroteskNeue"/>
-              </a:rPr>
-              <a:t>.</a:t>
-            </a:r>
-          </a:p>
-          <a:p>
-            <a:pPr algn="l"/>
-            <a:r>
-              <a:rPr lang="ru-RU" b="0" i="0" dirty="0" err="1">
-                <a:effectLst/>
-                <a:latin typeface="fkGroteskNeue"/>
-              </a:rPr>
-              <a:t>XGBoost</a:t>
-            </a:r>
-            <a:r>
-              <a:rPr lang="ru-RU" b="0" i="0" dirty="0">
-                <a:effectLst/>
-                <a:latin typeface="fkGroteskNeue"/>
-              </a:rPr>
-              <a:t> на 1% лучше RF, но гораздо менее интерпретируемая.</a:t>
-            </a:r>
-          </a:p>
-          <a:p>
-            <a:pPr algn="l"/>
-            <a:r>
-              <a:rPr lang="ru-RU" b="0" i="0" dirty="0">
-                <a:effectLst/>
-                <a:latin typeface="fkGroteskNeue"/>
-              </a:rPr>
-              <a:t>В медицине это критично.</a:t>
-            </a:r>
-          </a:p>
-          <a:p>
-            <a:pPr algn="l"/>
-            <a:r>
-              <a:rPr lang="ru-RU" b="0" i="0" dirty="0">
-                <a:effectLst/>
-                <a:latin typeface="fkGroteskNeue"/>
-              </a:rPr>
-              <a:t>Врач должен понять, почему модель предсказала рак. "Потому что </a:t>
-            </a:r>
-            <a:r>
-              <a:rPr lang="ru-RU" b="0" i="0" dirty="0" err="1">
-                <a:effectLst/>
-                <a:latin typeface="fkGroteskNeue"/>
-              </a:rPr>
-              <a:t>XGBoost</a:t>
-            </a:r>
-            <a:r>
-              <a:rPr lang="ru-RU" b="0" i="0" dirty="0">
-                <a:effectLst/>
-                <a:latin typeface="fkGroteskNeue"/>
-              </a:rPr>
-              <a:t> так сказал" — это не ответ.</a:t>
-            </a:r>
-          </a:p>
-          <a:p>
-            <a:pPr algn="l"/>
-            <a:r>
-              <a:rPr lang="ru-RU" b="0" i="0" dirty="0">
-                <a:effectLst/>
-                <a:latin typeface="fkGroteskNeue"/>
-              </a:rPr>
-              <a:t>Поэтому в реальности часто выбирают </a:t>
-            </a:r>
-            <a:r>
-              <a:rPr lang="ru-RU" b="0" i="0" dirty="0" err="1">
-                <a:effectLst/>
-                <a:latin typeface="fkGroteskNeue"/>
-              </a:rPr>
-              <a:t>Logistic</a:t>
-            </a:r>
-            <a:r>
-              <a:rPr lang="ru-RU" b="0" i="0" dirty="0">
-                <a:effectLst/>
-                <a:latin typeface="fkGroteskNeue"/>
-              </a:rPr>
-              <a:t> </a:t>
-            </a:r>
-            <a:r>
-              <a:rPr lang="ru-RU" b="0" i="0" dirty="0" err="1">
-                <a:effectLst/>
-                <a:latin typeface="fkGroteskNeue"/>
-              </a:rPr>
-              <a:t>Regression</a:t>
-            </a:r>
-            <a:r>
-              <a:rPr lang="ru-RU" b="0" i="0" dirty="0">
-                <a:effectLst/>
-                <a:latin typeface="fkGroteskNeue"/>
-              </a:rPr>
-              <a:t> или </a:t>
-            </a:r>
-            <a:r>
-              <a:rPr lang="ru-RU" b="0" i="0" dirty="0" err="1">
-                <a:effectLst/>
-                <a:latin typeface="fkGroteskNeue"/>
-              </a:rPr>
-              <a:t>Random</a:t>
-            </a:r>
-            <a:r>
-              <a:rPr lang="ru-RU" b="0" i="0" dirty="0">
-                <a:effectLst/>
-                <a:latin typeface="fkGroteskNeue"/>
-              </a:rPr>
-              <a:t> </a:t>
-            </a:r>
-            <a:r>
-              <a:rPr lang="ru-RU" b="0" i="0" dirty="0" err="1">
-                <a:effectLst/>
-                <a:latin typeface="fkGroteskNeue"/>
-              </a:rPr>
-              <a:t>Forest</a:t>
-            </a:r>
-            <a:r>
-              <a:rPr lang="ru-RU" b="0" i="0" dirty="0">
-                <a:effectLst/>
-                <a:latin typeface="fkGroteskNeue"/>
-              </a:rPr>
-              <a:t>, даже если есть модель на 1-2% лучше.</a:t>
-            </a:r>
-          </a:p>
-          <a:p>
-            <a:pPr algn="l"/>
-            <a:r>
-              <a:rPr lang="ru-RU" b="0" i="0" dirty="0">
-                <a:effectLst/>
-                <a:latin typeface="fkGroteskNeue"/>
-              </a:rPr>
-              <a:t>Правило: если интерпретируемость важна (а в медицине она всегда важна), выбирайте более простую модель.</a:t>
-            </a:r>
-          </a:p>
-          <a:p>
             <a:endParaRPr lang="ru-RU" sz="1200" b="0" i="0" kern="1200" dirty="0">
               <a:solidFill>
                 <a:schemeClr val="tx1"/>
@@ -1638,201 +888,6 @@
           <a:bodyPr/>
           <a:lstStyle/>
           <a:p>
-            <a:pPr algn="l"/>
-            <a:r>
-              <a:rPr lang="ru-RU" b="0" i="0" dirty="0">
-                <a:effectLst/>
-                <a:latin typeface="fkGroteskNeue"/>
-              </a:rPr>
-              <a:t>Давайте реальный пример: диагностика сахарного диабета.</a:t>
-            </a:r>
-          </a:p>
-          <a:p>
-            <a:pPr algn="l"/>
-            <a:r>
-              <a:rPr lang="ru-RU" b="0" i="0" dirty="0" err="1">
-                <a:effectLst/>
-                <a:latin typeface="fkGroteskNeue"/>
-              </a:rPr>
-              <a:t>Датасет</a:t>
-            </a:r>
-            <a:r>
-              <a:rPr lang="ru-RU" b="0" i="0" dirty="0">
-                <a:effectLst/>
-                <a:latin typeface="fkGroteskNeue"/>
-              </a:rPr>
-              <a:t>: 768 пациентов из клиники Пима (</a:t>
-            </a:r>
-            <a:r>
-              <a:rPr lang="ru-RU" b="0" i="0" dirty="0" err="1">
-                <a:effectLst/>
-                <a:latin typeface="fkGroteskNeue"/>
-              </a:rPr>
-              <a:t>аризона</a:t>
-            </a:r>
-            <a:r>
-              <a:rPr lang="ru-RU" b="0" i="0" dirty="0">
-                <a:effectLst/>
-                <a:latin typeface="fkGroteskNeue"/>
-              </a:rPr>
-              <a:t>), 500 без диабета, 268 с диабетом.</a:t>
-            </a:r>
-          </a:p>
-          <a:p>
-            <a:pPr algn="l"/>
-            <a:r>
-              <a:rPr lang="ru-RU" b="0" i="0" dirty="0">
-                <a:effectLst/>
-                <a:latin typeface="fkGroteskNeue"/>
-              </a:rPr>
-              <a:t>Признаки (8):</a:t>
-            </a:r>
-          </a:p>
-          <a:p>
-            <a:pPr algn="l">
-              <a:buFont typeface="+mj-lt"/>
-              <a:buAutoNum type="arabicPeriod"/>
-            </a:pPr>
-            <a:r>
-              <a:rPr lang="ru-RU" b="0" i="0" dirty="0">
-                <a:effectLst/>
-                <a:latin typeface="fkGroteskNeue"/>
-              </a:rPr>
-              <a:t>Количество беременностей</a:t>
-            </a:r>
-          </a:p>
-          <a:p>
-            <a:pPr algn="l">
-              <a:buFont typeface="+mj-lt"/>
-              <a:buAutoNum type="arabicPeriod"/>
-            </a:pPr>
-            <a:r>
-              <a:rPr lang="ru-RU" b="0" i="0" dirty="0">
-                <a:effectLst/>
-                <a:latin typeface="fkGroteskNeue"/>
-              </a:rPr>
-              <a:t>Глюкоза натощак</a:t>
-            </a:r>
-          </a:p>
-          <a:p>
-            <a:pPr algn="l">
-              <a:buFont typeface="+mj-lt"/>
-              <a:buAutoNum type="arabicPeriod"/>
-            </a:pPr>
-            <a:r>
-              <a:rPr lang="ru-RU" b="0" i="0" dirty="0">
-                <a:effectLst/>
-                <a:latin typeface="fkGroteskNeue"/>
-              </a:rPr>
-              <a:t>Кровяное давление</a:t>
-            </a:r>
-          </a:p>
-          <a:p>
-            <a:pPr algn="l">
-              <a:buFont typeface="+mj-lt"/>
-              <a:buAutoNum type="arabicPeriod"/>
-            </a:pPr>
-            <a:r>
-              <a:rPr lang="ru-RU" b="0" i="0" dirty="0">
-                <a:effectLst/>
-                <a:latin typeface="fkGroteskNeue"/>
-              </a:rPr>
-              <a:t>Толщина кожной складки трицепса</a:t>
-            </a:r>
-          </a:p>
-          <a:p>
-            <a:pPr algn="l">
-              <a:buFont typeface="+mj-lt"/>
-              <a:buAutoNum type="arabicPeriod"/>
-            </a:pPr>
-            <a:r>
-              <a:rPr lang="ru-RU" b="0" i="0" dirty="0">
-                <a:effectLst/>
-                <a:latin typeface="fkGroteskNeue"/>
-              </a:rPr>
-              <a:t>Инсулин</a:t>
-            </a:r>
-          </a:p>
-          <a:p>
-            <a:pPr algn="l">
-              <a:buFont typeface="+mj-lt"/>
-              <a:buAutoNum type="arabicPeriod"/>
-            </a:pPr>
-            <a:r>
-              <a:rPr lang="ru-RU" b="0" i="0" dirty="0">
-                <a:effectLst/>
-                <a:latin typeface="fkGroteskNeue"/>
-              </a:rPr>
-              <a:t>Индекс массы тела (BMI)</a:t>
-            </a:r>
-          </a:p>
-          <a:p>
-            <a:pPr algn="l">
-              <a:buFont typeface="+mj-lt"/>
-              <a:buAutoNum type="arabicPeriod"/>
-            </a:pPr>
-            <a:r>
-              <a:rPr lang="ru-RU" b="0" i="0" dirty="0">
-                <a:effectLst/>
-                <a:latin typeface="fkGroteskNeue"/>
-              </a:rPr>
-              <a:t>Функция родословной по диабету</a:t>
-            </a:r>
-          </a:p>
-          <a:p>
-            <a:pPr algn="l">
-              <a:buFont typeface="+mj-lt"/>
-              <a:buAutoNum type="arabicPeriod"/>
-            </a:pPr>
-            <a:r>
-              <a:rPr lang="ru-RU" b="0" i="0" dirty="0">
-                <a:effectLst/>
-                <a:latin typeface="fkGroteskNeue"/>
-              </a:rPr>
-              <a:t>Возраст</a:t>
-            </a:r>
-          </a:p>
-          <a:p>
-            <a:pPr algn="l"/>
-            <a:r>
-              <a:rPr lang="ru-RU" b="0" i="0" dirty="0">
-                <a:effectLst/>
-                <a:latin typeface="fkGroteskNeue"/>
-              </a:rPr>
-              <a:t>Предварительная обработка, обучение, оценка.</a:t>
-            </a:r>
-            <a:br>
-              <a:rPr lang="ru-RU" b="0" i="0" dirty="0">
-                <a:effectLst/>
-                <a:latin typeface="fkGroteskNeue"/>
-              </a:rPr>
-            </a:br>
-            <a:r>
-              <a:rPr lang="ru-RU" b="0" i="0" dirty="0">
-                <a:effectLst/>
-                <a:latin typeface="fkGroteskNeue"/>
-              </a:rPr>
-              <a:t>Вывод:</a:t>
-            </a:r>
-          </a:p>
-          <a:p>
-            <a:pPr algn="l"/>
-            <a:r>
-              <a:rPr lang="ru-RU" b="0" i="0" dirty="0">
-                <a:effectLst/>
-                <a:latin typeface="fkGroteskNeue"/>
-              </a:rPr>
-              <a:t>"Модель использует в основном глюкозу и BMI для предсказания диабета. Это имеет биологический смысл: гипергликемия (высокая глюкоза) и ожирение (высокий BMI) — главные факторы диабета."</a:t>
-            </a:r>
-          </a:p>
-          <a:p>
-            <a:pPr algn="l"/>
-            <a:endParaRPr lang="ru-RU" b="0" i="0" dirty="0">
-              <a:effectLst/>
-              <a:latin typeface="fkGroteskNeue"/>
-            </a:endParaRPr>
-          </a:p>
-          <a:p>
             <a:endParaRPr lang="ru-RU" sz="1200" b="0" i="0" kern="1200" dirty="0">
               <a:solidFill>
                 <a:schemeClr val="tx1"/>
@@ -1925,39 +980,6 @@
           <a:bodyPr/>
           <a:lstStyle/>
           <a:p>
-            <a:pPr algn="l"/>
-            <a:r>
-              <a:rPr lang="ru-RU" b="0" i="0" dirty="0">
-                <a:effectLst/>
-                <a:latin typeface="fkGroteskNeue"/>
-              </a:rPr>
-              <a:t>Проверка на переобучение:</a:t>
-            </a:r>
-          </a:p>
-          <a:p>
-            <a:pPr algn="l"/>
-            <a:r>
-              <a:rPr lang="ru-RU" b="0" i="0" dirty="0">
-                <a:effectLst/>
-                <a:latin typeface="fkGroteskNeue"/>
-              </a:rPr>
-              <a:t>Обучили на первых 600 пациентов, тестируем на последних 168.</a:t>
-            </a:r>
-          </a:p>
-          <a:p>
-            <a:r>
-              <a:rPr lang="ru-RU" sz="1200" b="0" i="0" kern="1200" dirty="0">
-                <a:solidFill>
-                  <a:schemeClr val="tx1"/>
-                </a:solidFill>
-                <a:latin typeface="+mn-lt"/>
-                <a:ea typeface="+mn-ea"/>
-                <a:cs typeface="+mn-cs"/>
-              </a:rPr>
-              <a:t>Есть некоторое переобучение, но не критичное.</a:t>
-            </a:r>
-          </a:p>
-          <a:p>
             <a:endParaRPr lang="ru-RU" sz="1200" b="0" i="0" kern="1200" dirty="0">
               <a:solidFill>
                 <a:schemeClr val="tx1"/>
@@ -2050,114 +1072,6 @@
           <a:bodyPr/>
           <a:lstStyle/>
           <a:p>
-            <a:r>
-              <a:rPr lang="ru-RU" sz="1200" b="0" i="0" kern="1200" dirty="0">
-                <a:solidFill>
-                  <a:schemeClr val="tx1"/>
-                </a:solidFill>
-                <a:latin typeface="+mn-lt"/>
-                <a:ea typeface="+mn-ea"/>
-                <a:cs typeface="+mn-cs"/>
-              </a:rPr>
-              <a:t>Ансамблевые методы</a:t>
-            </a:r>
-          </a:p>
-          <a:p>
-            <a:endParaRPr lang="ru-RU" sz="1200" b="0" i="0" kern="1200" dirty="0">
-              <a:solidFill>
-                <a:schemeClr val="tx1"/>
-              </a:solidFill>
-              <a:latin typeface="+mn-lt"/>
-              <a:ea typeface="+mn-ea"/>
-              <a:cs typeface="+mn-cs"/>
-            </a:endParaRPr>
-          </a:p>
-          <a:p>
-            <a:r>
-              <a:rPr lang="ru-RU" sz="1200" b="0" i="0" kern="1200" dirty="0">
-                <a:solidFill>
-                  <a:schemeClr val="tx1"/>
-                </a:solidFill>
-                <a:latin typeface="+mn-lt"/>
-                <a:ea typeface="+mn-ea"/>
-                <a:cs typeface="+mn-cs"/>
-              </a:rPr>
-              <a:t>Часто один классификатор хорош, но несколько ещё лучше.</a:t>
-            </a:r>
-          </a:p>
-          <a:p>
-            <a:pPr algn="l"/>
-            <a:r>
-              <a:rPr lang="ru-RU" b="0" i="0" dirty="0" err="1">
-                <a:effectLst/>
-                <a:latin typeface="fkGroteskNeue"/>
-              </a:rPr>
-              <a:t>Voting</a:t>
-            </a:r>
-            <a:r>
-              <a:rPr lang="ru-RU" b="0" i="0" dirty="0">
-                <a:effectLst/>
-                <a:latin typeface="fkGroteskNeue"/>
-              </a:rPr>
-              <a:t>: Три модели "голосуют". Результат = большинство голосов. Часто даёт лучше результаты, чем любая одна модель.</a:t>
-            </a:r>
-          </a:p>
-          <a:p>
-            <a:pPr algn="l"/>
-            <a:r>
-              <a:rPr lang="en-US" b="0" i="0" dirty="0">
-                <a:effectLst/>
-                <a:latin typeface="fkGroteskNeue"/>
-              </a:rPr>
-              <a:t>Stacking:</a:t>
-            </a:r>
-            <a:r>
-              <a:rPr lang="ru-RU" b="0" i="0" dirty="0">
-                <a:effectLst/>
-                <a:latin typeface="fkGroteskNeue"/>
-              </a:rPr>
-              <a:t> Первый уровень: несколько моделей (RF, SVM, LR). Второй уровень: мета-модель (обычно LR), которая учится комбинировать предсказания первого уровня. Это как совет врачей: несколько специалистов дают мнение, а главврач принимает финальное решение.</a:t>
-            </a:r>
-          </a:p>
-          <a:p>
-            <a:pPr algn="l"/>
-            <a:r>
-              <a:rPr lang="en-US" b="0" i="0" dirty="0">
-                <a:effectLst/>
-                <a:latin typeface="fkGroteskNeue"/>
-              </a:rPr>
-              <a:t>Boosting</a:t>
-            </a:r>
-            <a:r>
-              <a:rPr lang="ru-RU" b="0" i="0" dirty="0">
-                <a:effectLst/>
-                <a:latin typeface="fkGroteskNeue"/>
-              </a:rPr>
-              <a:t>: Последовательное обучение слабых моделей. Каждая новая модель учится на ошибках предыдущей. Часто очень эффективно, но нужна тщательная подстройка </a:t>
-            </a:r>
-            <a:r>
-              <a:rPr lang="ru-RU" b="0" i="0" dirty="0" err="1">
-                <a:effectLst/>
-                <a:latin typeface="fkGroteskNeue"/>
-              </a:rPr>
-              <a:t>гиперпараметров</a:t>
-            </a:r>
-            <a:r>
-              <a:rPr lang="ru-RU" b="0" i="0" dirty="0">
-                <a:effectLst/>
-                <a:latin typeface="fkGroteskNeue"/>
-              </a:rPr>
-              <a:t>.</a:t>
-            </a:r>
-          </a:p>
-          <a:p>
-            <a:pPr algn="l"/>
-            <a:endParaRPr lang="ru-RU" b="0" i="0" dirty="0">
-              <a:effectLst/>
-              <a:latin typeface="fkGroteskNeue"/>
-            </a:endParaRPr>
-          </a:p>
-          <a:p>
             <a:endParaRPr lang="ru-RU" sz="1200" b="0" i="0" kern="1200" dirty="0">
               <a:solidFill>
                 <a:schemeClr val="tx1"/>
@@ -2250,175 +1164,6 @@
           <a:bodyPr/>
           <a:lstStyle/>
           <a:p>
-            <a:pPr algn="l"/>
-            <a:r>
-              <a:rPr lang="ru-RU" b="0" i="0" dirty="0" err="1">
-                <a:effectLst/>
-                <a:latin typeface="fkGroteskNeue"/>
-              </a:rPr>
-              <a:t>Гиперпараметрическая</a:t>
-            </a:r>
-            <a:r>
-              <a:rPr lang="ru-RU" b="0" i="0" dirty="0">
-                <a:effectLst/>
-                <a:latin typeface="fkGroteskNeue"/>
-              </a:rPr>
-              <a:t> оптимизация</a:t>
-            </a:r>
-          </a:p>
-          <a:p>
-            <a:pPr algn="l"/>
-            <a:r>
-              <a:rPr lang="ru-RU" b="0" i="0" dirty="0">
-                <a:effectLst/>
-                <a:latin typeface="fkGroteskNeue"/>
-              </a:rPr>
-              <a:t>Каждый алгоритм имеет параметры, которые нужно выбрать:</a:t>
-            </a:r>
-          </a:p>
-          <a:p>
-            <a:pPr algn="l"/>
-            <a:r>
-              <a:rPr lang="en-US" b="0" i="0" dirty="0">
-                <a:effectLst/>
-                <a:latin typeface="fkGroteskNeue"/>
-              </a:rPr>
-              <a:t>Random Forest: </a:t>
-            </a:r>
-            <a:r>
-              <a:rPr lang="en-US" b="0" i="0" dirty="0" err="1">
-                <a:effectLst/>
-                <a:latin typeface="fkGroteskNeue"/>
-              </a:rPr>
-              <a:t>n_estimators</a:t>
-            </a:r>
-            <a:r>
-              <a:rPr lang="en-US" b="0" i="0" dirty="0">
-                <a:effectLst/>
-                <a:latin typeface="fkGroteskNeue"/>
-              </a:rPr>
-              <a:t>, </a:t>
-            </a:r>
-            <a:r>
-              <a:rPr lang="en-US" b="0" i="0" dirty="0" err="1">
-                <a:effectLst/>
-                <a:latin typeface="fkGroteskNeue"/>
-              </a:rPr>
-              <a:t>max_depth</a:t>
-            </a:r>
-            <a:r>
-              <a:rPr lang="en-US" b="0" i="0" dirty="0">
-                <a:effectLst/>
-                <a:latin typeface="fkGroteskNeue"/>
-              </a:rPr>
-              <a:t>, </a:t>
-            </a:r>
-            <a:r>
-              <a:rPr lang="en-US" b="0" i="0" dirty="0" err="1">
-                <a:effectLst/>
-                <a:latin typeface="fkGroteskNeue"/>
-              </a:rPr>
-              <a:t>min_samples_leaf</a:t>
-            </a:r>
-            <a:r>
-              <a:rPr lang="en-US" b="0" i="0" dirty="0">
-                <a:effectLst/>
-                <a:latin typeface="fkGroteskNeue"/>
-              </a:rPr>
-              <a:t>...</a:t>
-            </a:r>
-          </a:p>
-          <a:p>
-            <a:pPr algn="l"/>
-            <a:r>
-              <a:rPr lang="en-US" b="0" i="0" dirty="0">
-                <a:effectLst/>
-                <a:latin typeface="fkGroteskNeue"/>
-              </a:rPr>
-              <a:t>SVM: C, kernel, gamma...</a:t>
-            </a:r>
-          </a:p>
-          <a:p>
-            <a:pPr algn="l"/>
-            <a:r>
-              <a:rPr lang="ru-RU" b="0" i="0" dirty="0">
-                <a:effectLst/>
-                <a:latin typeface="fkGroteskNeue"/>
-              </a:rPr>
-              <a:t>Как выбрать оптимальные?</a:t>
-            </a:r>
-          </a:p>
-          <a:p>
-            <a:r>
-              <a:rPr lang="en-US" sz="1200" b="0" i="0" kern="1200" dirty="0">
-                <a:solidFill>
-                  <a:schemeClr val="tx1"/>
-                </a:solidFill>
-                <a:latin typeface="+mn-lt"/>
-                <a:ea typeface="+mn-ea"/>
-                <a:cs typeface="+mn-cs"/>
-              </a:rPr>
-              <a:t>Grid Search:</a:t>
-            </a:r>
-            <a:r>
-              <a:rPr lang="ru-RU" sz="1200" b="0" i="0" kern="1200" dirty="0">
-                <a:solidFill>
-                  <a:schemeClr val="tx1"/>
-                </a:solidFill>
-                <a:latin typeface="+mn-lt"/>
-                <a:ea typeface="+mn-ea"/>
-                <a:cs typeface="+mn-cs"/>
-              </a:rPr>
-              <a:t> Пробуем все комбинации: 3 × 3 × 3 = 27 моделей. Долго, но гарантированно найдём лучшие.</a:t>
-            </a:r>
-          </a:p>
-          <a:p>
-            <a:pPr algn="l"/>
-            <a:r>
-              <a:rPr lang="en-US" b="0" i="0" dirty="0">
-                <a:effectLst/>
-                <a:latin typeface="fkGroteskNeue"/>
-              </a:rPr>
-              <a:t>Random Search:</a:t>
-            </a:r>
-            <a:r>
-              <a:rPr lang="ru-RU" sz="1200" b="0" i="0" kern="1200" dirty="0">
-                <a:solidFill>
-                  <a:schemeClr val="tx1"/>
-                </a:solidFill>
-                <a:effectLst/>
-                <a:latin typeface="+mn-lt"/>
-                <a:ea typeface="+mn-ea"/>
-                <a:cs typeface="+mn-cs"/>
-              </a:rPr>
-              <a:t> </a:t>
-            </a:r>
-            <a:r>
-              <a:rPr lang="ru-RU" b="0" i="0" dirty="0">
-                <a:effectLst/>
-                <a:latin typeface="fkGroteskNeue"/>
-              </a:rPr>
-              <a:t>Пробуем 10 случайных комбинаций вместо всех 27. Быстрее, но может пропустить оптимум.</a:t>
-            </a:r>
-          </a:p>
-          <a:p>
-            <a:pPr algn="l"/>
-            <a:r>
-              <a:rPr lang="ru-RU" b="0" i="0" dirty="0">
-                <a:effectLst/>
-                <a:latin typeface="fkGroteskNeue"/>
-              </a:rPr>
-              <a:t>Байесовская оптимизация: Умная стратегия выбора параметров. Использует прошлые результаты, чтобы выбрать следующий набор параметров. Самый эффективный, но самый сложный.</a:t>
-            </a:r>
-          </a:p>
-          <a:p>
-            <a:pPr algn="l"/>
-            <a:endParaRPr lang="ru-RU" b="0" i="0" dirty="0">
-              <a:effectLst/>
-              <a:latin typeface="fkGroteskNeue"/>
-            </a:endParaRPr>
-          </a:p>
-          <a:p>
             <a:endParaRPr lang="ru-RU" sz="1200" b="0" i="0" kern="1200" dirty="0">
               <a:solidFill>
                 <a:schemeClr val="tx1"/>
@@ -2511,175 +1256,6 @@
           <a:bodyPr/>
           <a:lstStyle/>
           <a:p>
-            <a:pPr algn="l"/>
-            <a:r>
-              <a:rPr lang="ru-RU" b="0" i="0" dirty="0" err="1">
-                <a:effectLst/>
-                <a:latin typeface="fkGroteskNeue"/>
-              </a:rPr>
-              <a:t>Гиперпараметрическая</a:t>
-            </a:r>
-            <a:r>
-              <a:rPr lang="ru-RU" b="0" i="0" dirty="0">
-                <a:effectLst/>
-                <a:latin typeface="fkGroteskNeue"/>
-              </a:rPr>
-              <a:t> оптимизация</a:t>
-            </a:r>
-          </a:p>
-          <a:p>
-            <a:pPr algn="l"/>
-            <a:r>
-              <a:rPr lang="ru-RU" b="0" i="0" dirty="0">
-                <a:effectLst/>
-                <a:latin typeface="fkGroteskNeue"/>
-              </a:rPr>
-              <a:t>Каждый алгоритм имеет параметры, которые нужно выбрать:</a:t>
-            </a:r>
-          </a:p>
-          <a:p>
-            <a:pPr algn="l"/>
-            <a:r>
-              <a:rPr lang="en-US" b="0" i="0" dirty="0">
-                <a:effectLst/>
-                <a:latin typeface="fkGroteskNeue"/>
-              </a:rPr>
-              <a:t>Random Forest: </a:t>
-            </a:r>
-            <a:r>
-              <a:rPr lang="en-US" b="0" i="0" dirty="0" err="1">
-                <a:effectLst/>
-                <a:latin typeface="fkGroteskNeue"/>
-              </a:rPr>
-              <a:t>n_estimators</a:t>
-            </a:r>
-            <a:r>
-              <a:rPr lang="en-US" b="0" i="0" dirty="0">
-                <a:effectLst/>
-                <a:latin typeface="fkGroteskNeue"/>
-              </a:rPr>
-              <a:t>, </a:t>
-            </a:r>
-            <a:r>
-              <a:rPr lang="en-US" b="0" i="0" dirty="0" err="1">
-                <a:effectLst/>
-                <a:latin typeface="fkGroteskNeue"/>
-              </a:rPr>
-              <a:t>max_depth</a:t>
-            </a:r>
-            <a:r>
-              <a:rPr lang="en-US" b="0" i="0" dirty="0">
-                <a:effectLst/>
-                <a:latin typeface="fkGroteskNeue"/>
-              </a:rPr>
-              <a:t>, </a:t>
-            </a:r>
-            <a:r>
-              <a:rPr lang="en-US" b="0" i="0" dirty="0" err="1">
-                <a:effectLst/>
-                <a:latin typeface="fkGroteskNeue"/>
-              </a:rPr>
-              <a:t>min_samples_leaf</a:t>
-            </a:r>
-            <a:r>
-              <a:rPr lang="en-US" b="0" i="0" dirty="0">
-                <a:effectLst/>
-                <a:latin typeface="fkGroteskNeue"/>
-              </a:rPr>
-              <a:t>...</a:t>
-            </a:r>
-          </a:p>
-          <a:p>
-            <a:pPr algn="l"/>
-            <a:r>
-              <a:rPr lang="en-US" b="0" i="0" dirty="0">
-                <a:effectLst/>
-                <a:latin typeface="fkGroteskNeue"/>
-              </a:rPr>
-              <a:t>SVM: C, kernel, gamma...</a:t>
-            </a:r>
-          </a:p>
-          <a:p>
-            <a:pPr algn="l"/>
-            <a:r>
-              <a:rPr lang="ru-RU" b="0" i="0" dirty="0">
-                <a:effectLst/>
-                <a:latin typeface="fkGroteskNeue"/>
-              </a:rPr>
-              <a:t>Как выбрать оптимальные?</a:t>
-            </a:r>
-          </a:p>
-          <a:p>
-            <a:r>
-              <a:rPr lang="en-US" sz="1200" b="0" i="0" kern="1200" dirty="0">
-                <a:solidFill>
-                  <a:schemeClr val="tx1"/>
-                </a:solidFill>
-                <a:latin typeface="+mn-lt"/>
-                <a:ea typeface="+mn-ea"/>
-                <a:cs typeface="+mn-cs"/>
-              </a:rPr>
-              <a:t>Grid Search:</a:t>
-            </a:r>
-            <a:r>
-              <a:rPr lang="ru-RU" sz="1200" b="0" i="0" kern="1200" dirty="0">
-                <a:solidFill>
-                  <a:schemeClr val="tx1"/>
-                </a:solidFill>
-                <a:latin typeface="+mn-lt"/>
-                <a:ea typeface="+mn-ea"/>
-                <a:cs typeface="+mn-cs"/>
-              </a:rPr>
-              <a:t> Пробуем все комбинации: 3 × 3 × 3 = 27 моделей. Долго, но гарантированно найдём лучшие.</a:t>
-            </a:r>
-          </a:p>
-          <a:p>
-            <a:pPr algn="l"/>
-            <a:r>
-              <a:rPr lang="en-US" b="0" i="0" dirty="0">
-                <a:effectLst/>
-                <a:latin typeface="fkGroteskNeue"/>
-              </a:rPr>
-              <a:t>Random Search:</a:t>
-            </a:r>
-            <a:r>
-              <a:rPr lang="ru-RU" sz="1200" b="0" i="0" kern="1200" dirty="0">
-                <a:solidFill>
-                  <a:schemeClr val="tx1"/>
-                </a:solidFill>
-                <a:effectLst/>
-                <a:latin typeface="+mn-lt"/>
-                <a:ea typeface="+mn-ea"/>
-                <a:cs typeface="+mn-cs"/>
-              </a:rPr>
-              <a:t> </a:t>
-            </a:r>
-            <a:r>
-              <a:rPr lang="ru-RU" b="0" i="0" dirty="0">
-                <a:effectLst/>
-                <a:latin typeface="fkGroteskNeue"/>
-              </a:rPr>
-              <a:t>Пробуем 10 случайных комбинаций вместо всех 27. Быстрее, но может пропустить оптимум.</a:t>
-            </a:r>
-          </a:p>
-          <a:p>
-            <a:pPr algn="l"/>
-            <a:r>
-              <a:rPr lang="ru-RU" b="0" i="0" dirty="0">
-                <a:effectLst/>
-                <a:latin typeface="fkGroteskNeue"/>
-              </a:rPr>
-              <a:t>Байесовская оптимизация: Умная стратегия выбора параметров. Использует прошлые результаты, чтобы выбрать следующий набор параметров. Самый эффективный, но самый сложный.</a:t>
-            </a:r>
-          </a:p>
-          <a:p>
-            <a:pPr algn="l"/>
-            <a:endParaRPr lang="ru-RU" b="0" i="0" dirty="0">
-              <a:effectLst/>
-              <a:latin typeface="fkGroteskNeue"/>
-            </a:endParaRPr>
-          </a:p>
-          <a:p>
             <a:endParaRPr lang="ru-RU" sz="1200" b="0" i="0" kern="1200" dirty="0">
               <a:solidFill>
                 <a:schemeClr val="tx1"/>
@@ -2718,7 +1294,7 @@
     </p:spTree>
     <p:extLst>
       <p:ext uri="{BB962C8B-B14F-4D97-AF65-F5344CB8AC3E}">
-        <p14:creationId xmlns:p14="http://schemas.microsoft.com/office/powerpoint/2010/main" val="139315975"/>
+        <p14:creationId xmlns:p14="http://schemas.microsoft.com/office/powerpoint/2010/main" val="1727770882"/>
       </p:ext>
     </p:extLst>
   </p:cSld>
@@ -2773,174 +1349,6 @@
           <a:lstStyle/>
           <a:p>
             <a:pPr algn="l"/>
-            <a:r>
-              <a:rPr lang="ru-RU" b="0" i="0" dirty="0" err="1">
-                <a:effectLst/>
-                <a:latin typeface="fkGroteskNeue"/>
-              </a:rPr>
-              <a:t>Гиперпараметрическая</a:t>
-            </a:r>
-            <a:r>
-              <a:rPr lang="ru-RU" b="0" i="0" dirty="0">
-                <a:effectLst/>
-                <a:latin typeface="fkGroteskNeue"/>
-              </a:rPr>
-              <a:t> оптимизация</a:t>
-            </a:r>
-          </a:p>
-          <a:p>
-            <a:pPr algn="l"/>
-            <a:r>
-              <a:rPr lang="ru-RU" b="0" i="0" dirty="0">
-                <a:effectLst/>
-                <a:latin typeface="fkGroteskNeue"/>
-              </a:rPr>
-              <a:t>Каждый алгоритм имеет параметры, которые нужно выбрать:</a:t>
-            </a:r>
-          </a:p>
-          <a:p>
-            <a:pPr algn="l"/>
-            <a:r>
-              <a:rPr lang="en-US" b="0" i="0" dirty="0">
-                <a:effectLst/>
-                <a:latin typeface="fkGroteskNeue"/>
-              </a:rPr>
-              <a:t>Random Forest: </a:t>
-            </a:r>
-            <a:r>
-              <a:rPr lang="en-US" b="0" i="0" dirty="0" err="1">
-                <a:effectLst/>
-                <a:latin typeface="fkGroteskNeue"/>
-              </a:rPr>
-              <a:t>n_estimators</a:t>
-            </a:r>
-            <a:r>
-              <a:rPr lang="en-US" b="0" i="0" dirty="0">
-                <a:effectLst/>
-                <a:latin typeface="fkGroteskNeue"/>
-              </a:rPr>
-              <a:t>, </a:t>
-            </a:r>
-            <a:r>
-              <a:rPr lang="en-US" b="0" i="0" dirty="0" err="1">
-                <a:effectLst/>
-                <a:latin typeface="fkGroteskNeue"/>
-              </a:rPr>
-              <a:t>max_depth</a:t>
-            </a:r>
-            <a:r>
-              <a:rPr lang="en-US" b="0" i="0" dirty="0">
-                <a:effectLst/>
-                <a:latin typeface="fkGroteskNeue"/>
-              </a:rPr>
-              <a:t>, </a:t>
-            </a:r>
-            <a:r>
-              <a:rPr lang="en-US" b="0" i="0" dirty="0" err="1">
-                <a:effectLst/>
-                <a:latin typeface="fkGroteskNeue"/>
-              </a:rPr>
-              <a:t>min_samples_leaf</a:t>
-            </a:r>
-            <a:r>
-              <a:rPr lang="en-US" b="0" i="0" dirty="0">
-                <a:effectLst/>
-                <a:latin typeface="fkGroteskNeue"/>
-              </a:rPr>
-              <a:t>...</a:t>
-            </a:r>
-          </a:p>
-          <a:p>
-            <a:pPr algn="l"/>
-            <a:r>
-              <a:rPr lang="en-US" b="0" i="0" dirty="0">
-                <a:effectLst/>
-                <a:latin typeface="fkGroteskNeue"/>
-              </a:rPr>
-              <a:t>SVM: C, kernel, gamma...</a:t>
-            </a:r>
-          </a:p>
-          <a:p>
-            <a:pPr algn="l"/>
-            <a:r>
-              <a:rPr lang="ru-RU" b="0" i="0" dirty="0">
-                <a:effectLst/>
-                <a:latin typeface="fkGroteskNeue"/>
-              </a:rPr>
-              <a:t>Как выбрать оптимальные?</a:t>
-            </a:r>
-          </a:p>
-          <a:p>
-            <a:r>
-              <a:rPr lang="en-US" sz="1200" b="0" i="0" kern="1200" dirty="0">
-                <a:solidFill>
-                  <a:schemeClr val="tx1"/>
-                </a:solidFill>
-                <a:latin typeface="+mn-lt"/>
-                <a:ea typeface="+mn-ea"/>
-                <a:cs typeface="+mn-cs"/>
-              </a:rPr>
-              <a:t>Grid Search:</a:t>
-            </a:r>
-            <a:r>
-              <a:rPr lang="ru-RU" sz="1200" b="0" i="0" kern="1200" dirty="0">
-                <a:solidFill>
-                  <a:schemeClr val="tx1"/>
-                </a:solidFill>
-                <a:latin typeface="+mn-lt"/>
-                <a:ea typeface="+mn-ea"/>
-                <a:cs typeface="+mn-cs"/>
-              </a:rPr>
-              <a:t> Пробуем все комбинации: 3 × 3 × 3 = 27 моделей. Долго, но гарантированно найдём лучшие.</a:t>
-            </a:r>
-          </a:p>
-          <a:p>
-            <a:pPr algn="l"/>
-            <a:r>
-              <a:rPr lang="en-US" b="0" i="0" dirty="0">
-                <a:effectLst/>
-                <a:latin typeface="fkGroteskNeue"/>
-              </a:rPr>
-              <a:t>Random Search:</a:t>
-            </a:r>
-            <a:r>
-              <a:rPr lang="ru-RU" sz="1200" b="0" i="0" kern="1200" dirty="0">
-                <a:solidFill>
-                  <a:schemeClr val="tx1"/>
-                </a:solidFill>
-                <a:effectLst/>
-                <a:latin typeface="+mn-lt"/>
-                <a:ea typeface="+mn-ea"/>
-                <a:cs typeface="+mn-cs"/>
-              </a:rPr>
-              <a:t> </a:t>
-            </a:r>
-            <a:r>
-              <a:rPr lang="ru-RU" b="0" i="0" dirty="0">
-                <a:effectLst/>
-                <a:latin typeface="fkGroteskNeue"/>
-              </a:rPr>
-              <a:t>Пробуем 10 случайных комбинаций вместо всех 27. Быстрее, но может пропустить оптимум.</a:t>
-            </a:r>
-          </a:p>
-          <a:p>
-            <a:pPr algn="l"/>
-            <a:r>
-              <a:rPr lang="ru-RU" b="0" i="0" dirty="0">
-                <a:effectLst/>
-                <a:latin typeface="fkGroteskNeue"/>
-              </a:rPr>
-              <a:t>Байесовская оптимизация: Умная стратегия выбора параметров. Использует прошлые результаты, чтобы выбрать следующий набор параметров. Самый эффективный, но самый сложный.</a:t>
-            </a:r>
-          </a:p>
-          <a:p>
-            <a:pPr algn="l"/>
-            <a:endParaRPr lang="ru-RU" b="0" i="0" dirty="0">
-              <a:effectLst/>
-              <a:latin typeface="fkGroteskNeue"/>
-            </a:endParaRPr>
-          </a:p>
-          <a:p>
             <a:endParaRPr lang="ru-RU" sz="1200" b="0" i="0" kern="1200" dirty="0">
               <a:solidFill>
                 <a:schemeClr val="tx1"/>
@@ -2979,7 +1387,7 @@
     </p:spTree>
     <p:extLst>
       <p:ext uri="{BB962C8B-B14F-4D97-AF65-F5344CB8AC3E}">
-        <p14:creationId xmlns:p14="http://schemas.microsoft.com/office/powerpoint/2010/main" val="1727770882"/>
+        <p14:creationId xmlns:p14="http://schemas.microsoft.com/office/powerpoint/2010/main" val="195470481"/>
       </p:ext>
     </p:extLst>
   </p:cSld>
@@ -3033,299 +1441,6 @@
           <a:bodyPr/>
           <a:lstStyle/>
           <a:p>
-            <a:pPr algn="l"/>
-            <a:r>
-              <a:rPr lang="ru-RU" b="0" i="0" dirty="0">
-                <a:effectLst/>
-                <a:latin typeface="fkGroteskNeue"/>
-              </a:rPr>
-              <a:t>Перед тем, как опубликовать результаты:</a:t>
-            </a:r>
-          </a:p>
-          <a:p>
-            <a:pPr algn="l">
-              <a:buFont typeface="Arial" panose="020B0604020202020204" pitchFamily="34" charset="0"/>
-              <a:buChar char="•"/>
-            </a:pPr>
-            <a:r>
-              <a:rPr lang="ru-RU" b="0" i="0" dirty="0">
-                <a:effectLst/>
-                <a:latin typeface="fkGroteskNeue"/>
-              </a:rPr>
-              <a:t>✓ Задача ясна, метрика выбрана правильно</a:t>
-            </a:r>
-          </a:p>
-          <a:p>
-            <a:pPr algn="l">
-              <a:buFont typeface="Arial" panose="020B0604020202020204" pitchFamily="34" charset="0"/>
-              <a:buChar char="•"/>
-            </a:pPr>
-            <a:r>
-              <a:rPr lang="ru-RU" b="0" i="0" dirty="0">
-                <a:effectLst/>
-                <a:latin typeface="fkGroteskNeue"/>
-              </a:rPr>
-              <a:t>✓ Данные </a:t>
-            </a:r>
-            <a:r>
-              <a:rPr lang="ru-RU" b="0" i="0" dirty="0" err="1">
-                <a:effectLst/>
-                <a:latin typeface="fkGroteskNeue"/>
-              </a:rPr>
-              <a:t>препроцессированы</a:t>
-            </a:r>
-            <a:r>
-              <a:rPr lang="ru-RU" b="0" i="0" dirty="0">
-                <a:effectLst/>
-                <a:latin typeface="fkGroteskNeue"/>
-              </a:rPr>
-              <a:t> (удалены пропуски, нормализованы, отобраны признаки)</a:t>
-            </a:r>
-          </a:p>
-          <a:p>
-            <a:pPr algn="l">
-              <a:buFont typeface="Arial" panose="020B0604020202020204" pitchFamily="34" charset="0"/>
-              <a:buChar char="•"/>
-            </a:pPr>
-            <a:r>
-              <a:rPr lang="ru-RU" b="0" i="0" dirty="0">
-                <a:effectLst/>
-                <a:latin typeface="fkGroteskNeue"/>
-              </a:rPr>
-              <a:t>✓ Использована правильная валидация (K-</a:t>
-            </a:r>
-            <a:r>
-              <a:rPr lang="ru-RU" b="0" i="0" dirty="0" err="1">
-                <a:effectLst/>
-                <a:latin typeface="fkGroteskNeue"/>
-              </a:rPr>
-              <a:t>fold</a:t>
-            </a:r>
-            <a:r>
-              <a:rPr lang="ru-RU" b="0" i="0" dirty="0">
-                <a:effectLst/>
-                <a:latin typeface="fkGroteskNeue"/>
-              </a:rPr>
-              <a:t> или </a:t>
-            </a:r>
-            <a:r>
-              <a:rPr lang="ru-RU" b="0" i="0" dirty="0" err="1">
-                <a:effectLst/>
-                <a:latin typeface="fkGroteskNeue"/>
-              </a:rPr>
-              <a:t>train-test</a:t>
-            </a:r>
-            <a:r>
-              <a:rPr lang="ru-RU" b="0" i="0" dirty="0">
-                <a:effectLst/>
-                <a:latin typeface="fkGroteskNeue"/>
-              </a:rPr>
-              <a:t>)</a:t>
-            </a:r>
-          </a:p>
-          <a:p>
-            <a:pPr algn="l">
-              <a:buFont typeface="Arial" panose="020B0604020202020204" pitchFamily="34" charset="0"/>
-              <a:buChar char="•"/>
-            </a:pPr>
-            <a:r>
-              <a:rPr lang="ru-RU" b="0" i="0" dirty="0">
-                <a:effectLst/>
-                <a:latin typeface="fkGroteskNeue"/>
-              </a:rPr>
-              <a:t>✓ Учтены несбалансированные классы (если они есть)</a:t>
-            </a:r>
-          </a:p>
-          <a:p>
-            <a:pPr algn="l">
-              <a:buFont typeface="Arial" panose="020B0604020202020204" pitchFamily="34" charset="0"/>
-              <a:buChar char="•"/>
-            </a:pPr>
-            <a:r>
-              <a:rPr lang="ru-RU" b="0" i="0" dirty="0">
-                <a:effectLst/>
-                <a:latin typeface="fkGroteskNeue"/>
-              </a:rPr>
-              <a:t>✓ </a:t>
-            </a:r>
-            <a:r>
-              <a:rPr lang="ru-RU" b="0" i="0" dirty="0" err="1">
-                <a:effectLst/>
-                <a:latin typeface="fkGroteskNeue"/>
-              </a:rPr>
-              <a:t>Feature</a:t>
-            </a:r>
-            <a:r>
-              <a:rPr lang="ru-RU" b="0" i="0" dirty="0">
-                <a:effectLst/>
-                <a:latin typeface="fkGroteskNeue"/>
-              </a:rPr>
-              <a:t> </a:t>
-            </a:r>
-            <a:r>
-              <a:rPr lang="ru-RU" b="0" i="0" dirty="0" err="1">
-                <a:effectLst/>
-                <a:latin typeface="fkGroteskNeue"/>
-              </a:rPr>
-              <a:t>Importance</a:t>
-            </a:r>
-            <a:r>
-              <a:rPr lang="ru-RU" b="0" i="0" dirty="0">
-                <a:effectLst/>
-                <a:latin typeface="fkGroteskNeue"/>
-              </a:rPr>
-              <a:t> посчитана и интерпретирована</a:t>
-            </a:r>
-          </a:p>
-          <a:p>
-            <a:pPr algn="l">
-              <a:buFont typeface="Arial" panose="020B0604020202020204" pitchFamily="34" charset="0"/>
-              <a:buChar char="•"/>
-            </a:pPr>
-            <a:r>
-              <a:rPr lang="ru-RU" b="0" i="0" dirty="0">
-                <a:effectLst/>
-                <a:latin typeface="fkGroteskNeue"/>
-              </a:rPr>
-              <a:t>✓ Несколько алгоритмов сравнены статистически (K-</a:t>
-            </a:r>
-            <a:r>
-              <a:rPr lang="ru-RU" b="0" i="0" dirty="0" err="1">
-                <a:effectLst/>
-                <a:latin typeface="fkGroteskNeue"/>
-              </a:rPr>
-              <a:t>fold</a:t>
-            </a:r>
-            <a:r>
-              <a:rPr lang="ru-RU" b="0" i="0" dirty="0">
-                <a:effectLst/>
-                <a:latin typeface="fkGroteskNeue"/>
-              </a:rPr>
-              <a:t> + t-</a:t>
-            </a:r>
-            <a:r>
-              <a:rPr lang="ru-RU" b="0" i="0" dirty="0" err="1">
-                <a:effectLst/>
-                <a:latin typeface="fkGroteskNeue"/>
-              </a:rPr>
-              <a:t>test</a:t>
-            </a:r>
-            <a:r>
-              <a:rPr lang="ru-RU" b="0" i="0" dirty="0">
-                <a:effectLst/>
-                <a:latin typeface="fkGroteskNeue"/>
-              </a:rPr>
-              <a:t>)</a:t>
-            </a:r>
-          </a:p>
-          <a:p>
-            <a:pPr algn="l">
-              <a:buFont typeface="Arial" panose="020B0604020202020204" pitchFamily="34" charset="0"/>
-              <a:buChar char="•"/>
-            </a:pPr>
-            <a:r>
-              <a:rPr lang="ru-RU" b="0" i="0" dirty="0">
-                <a:effectLst/>
-                <a:latin typeface="fkGroteskNeue"/>
-              </a:rPr>
-              <a:t>✓ Проверено переобучение (</a:t>
-            </a:r>
-            <a:r>
-              <a:rPr lang="ru-RU" b="0" i="0" dirty="0" err="1">
-                <a:effectLst/>
-                <a:latin typeface="fkGroteskNeue"/>
-              </a:rPr>
-              <a:t>gap</a:t>
-            </a:r>
-            <a:r>
-              <a:rPr lang="ru-RU" b="0" i="0" dirty="0">
-                <a:effectLst/>
-                <a:latin typeface="fkGroteskNeue"/>
-              </a:rPr>
-              <a:t> между </a:t>
-            </a:r>
-            <a:r>
-              <a:rPr lang="ru-RU" b="0" i="0" dirty="0" err="1">
-                <a:effectLst/>
-                <a:latin typeface="fkGroteskNeue"/>
-              </a:rPr>
-              <a:t>train</a:t>
-            </a:r>
-            <a:r>
-              <a:rPr lang="ru-RU" b="0" i="0" dirty="0">
-                <a:effectLst/>
-                <a:latin typeface="fkGroteskNeue"/>
-              </a:rPr>
-              <a:t> и </a:t>
-            </a:r>
-            <a:r>
-              <a:rPr lang="ru-RU" b="0" i="0" dirty="0" err="1">
-                <a:effectLst/>
-                <a:latin typeface="fkGroteskNeue"/>
-              </a:rPr>
-              <a:t>test</a:t>
-            </a:r>
-            <a:r>
-              <a:rPr lang="ru-RU" b="0" i="0" dirty="0">
-                <a:effectLst/>
-                <a:latin typeface="fkGroteskNeue"/>
-              </a:rPr>
-              <a:t>)</a:t>
-            </a:r>
-          </a:p>
-          <a:p>
-            <a:pPr algn="l">
-              <a:buFont typeface="Arial" panose="020B0604020202020204" pitchFamily="34" charset="0"/>
-              <a:buChar char="•"/>
-            </a:pPr>
-            <a:r>
-              <a:rPr lang="ru-RU" b="0" i="0" dirty="0">
-                <a:effectLst/>
-                <a:latin typeface="fkGroteskNeue"/>
-              </a:rPr>
-              <a:t>✓ Результаты воспроизводимы (код на </a:t>
-            </a:r>
-            <a:r>
-              <a:rPr lang="ru-RU" b="0" i="0" dirty="0" err="1">
-                <a:effectLst/>
-                <a:latin typeface="fkGroteskNeue"/>
-              </a:rPr>
-              <a:t>GitHub</a:t>
-            </a:r>
-            <a:r>
-              <a:rPr lang="ru-RU" b="0" i="0" dirty="0">
-                <a:effectLst/>
-                <a:latin typeface="fkGroteskNeue"/>
-              </a:rPr>
-              <a:t>, фиксированный </a:t>
-            </a:r>
-            <a:r>
-              <a:rPr lang="ru-RU" b="0" i="0" dirty="0" err="1">
-                <a:effectLst/>
-                <a:latin typeface="fkGroteskNeue"/>
-              </a:rPr>
-              <a:t>seed</a:t>
-            </a:r>
-            <a:r>
-              <a:rPr lang="ru-RU" b="0" i="0" dirty="0">
-                <a:effectLst/>
-                <a:latin typeface="fkGroteskNeue"/>
-              </a:rPr>
-              <a:t>)</a:t>
-            </a:r>
-          </a:p>
-          <a:p>
-            <a:pPr algn="l">
-              <a:buFont typeface="Arial" panose="020B0604020202020204" pitchFamily="34" charset="0"/>
-              <a:buChar char="•"/>
-            </a:pPr>
-            <a:r>
-              <a:rPr lang="ru-RU" b="0" i="0" dirty="0">
-                <a:effectLst/>
-                <a:latin typeface="fkGroteskNeue"/>
-              </a:rPr>
-              <a:t>✓ Биологическая/медицинская интерпретация проведена</a:t>
-            </a:r>
             <a:endParaRPr lang="ru-RU" sz="1200" b="0" i="0" kern="1200" dirty="0">
               <a:solidFill>
                 <a:schemeClr val="tx1"/>
@@ -3364,7 +1479,7 @@
     </p:spTree>
     <p:extLst>
       <p:ext uri="{BB962C8B-B14F-4D97-AF65-F5344CB8AC3E}">
-        <p14:creationId xmlns:p14="http://schemas.microsoft.com/office/powerpoint/2010/main" val="195470481"/>
+        <p14:creationId xmlns:p14="http://schemas.microsoft.com/office/powerpoint/2010/main" val="336608419"/>
       </p:ext>
     </p:extLst>
   </p:cSld>
@@ -3417,154 +1532,6 @@
         <p:txBody>
           <a:bodyPr/>
           <a:lstStyle/>
-          <a:p>
-            <a:pPr algn="l"/>
-            <a:r>
-              <a:rPr lang="ru-RU" b="0" i="0" dirty="0">
-                <a:effectLst/>
-                <a:latin typeface="fkGroteskNeue"/>
-              </a:rPr>
-              <a:t>Добрый день! На прошлой лекции мы разобрали основы. Теперь пойдём глубже.</a:t>
-            </a:r>
-          </a:p>
-          <a:p>
-            <a:pPr algn="l"/>
-            <a:r>
-              <a:rPr lang="ru-RU" b="0" i="0" dirty="0">
-                <a:effectLst/>
-                <a:latin typeface="fkGroteskNeue"/>
-              </a:rPr>
-              <a:t>Представьте: вы обучили </a:t>
-            </a:r>
-            <a:r>
-              <a:rPr lang="ru-RU" b="0" i="0" dirty="0" err="1">
-                <a:effectLst/>
-                <a:latin typeface="fkGroteskNeue"/>
-              </a:rPr>
-              <a:t>Random</a:t>
-            </a:r>
-            <a:r>
-              <a:rPr lang="ru-RU" b="0" i="0" dirty="0">
-                <a:effectLst/>
-                <a:latin typeface="fkGroteskNeue"/>
-              </a:rPr>
-              <a:t> </a:t>
-            </a:r>
-            <a:r>
-              <a:rPr lang="ru-RU" b="0" i="0" dirty="0" err="1">
-                <a:effectLst/>
-                <a:latin typeface="fkGroteskNeue"/>
-              </a:rPr>
-              <a:t>Forest</a:t>
-            </a:r>
-            <a:r>
-              <a:rPr lang="ru-RU" b="0" i="0" dirty="0">
-                <a:effectLst/>
-                <a:latin typeface="fkGroteskNeue"/>
-              </a:rPr>
-              <a:t>, </a:t>
-            </a:r>
-            <a:r>
-              <a:rPr lang="ru-RU" b="0" i="0" dirty="0" err="1">
-                <a:effectLst/>
-                <a:latin typeface="fkGroteskNeue"/>
-              </a:rPr>
-              <a:t>accuracy</a:t>
-            </a:r>
-            <a:r>
-              <a:rPr lang="ru-RU" b="0" i="0" dirty="0">
-                <a:effectLst/>
-                <a:latin typeface="fkGroteskNeue"/>
-              </a:rPr>
-              <a:t> 95%, все рады. Но потом врач задаёт вопрос: "А почему ты думаешь, что у этого пациента рак?"</a:t>
-            </a:r>
-          </a:p>
-          <a:p>
-            <a:pPr algn="l"/>
-            <a:r>
-              <a:rPr lang="ru-RU" b="0" i="0" dirty="0">
-                <a:effectLst/>
-                <a:latin typeface="fkGroteskNeue"/>
-              </a:rPr>
-              <a:t>Если вы ответите "модель сказала", врач вас не будет слушать. Нужна интерпретация.</a:t>
-            </a:r>
-          </a:p>
-          <a:p>
-            <a:pPr algn="l"/>
-            <a:r>
-              <a:rPr lang="ru-RU" b="0" i="0" dirty="0">
-                <a:effectLst/>
-                <a:latin typeface="fkGroteskNeue"/>
-              </a:rPr>
-              <a:t>Вторая проблема: в реальной клинике классы </a:t>
-            </a:r>
-            <a:r>
-              <a:rPr lang="ru-RU" b="0" i="0" dirty="0" err="1">
-                <a:effectLst/>
-                <a:latin typeface="fkGroteskNeue"/>
-              </a:rPr>
-              <a:t>несбалансированы</a:t>
-            </a:r>
-            <a:r>
-              <a:rPr lang="ru-RU" b="0" i="0" dirty="0">
-                <a:effectLst/>
-                <a:latin typeface="fkGroteskNeue"/>
-              </a:rPr>
-              <a:t>. Редкие болезни. Если у вас 99% здоровых, модель, которая всегда говорит "здоров", получит 99% </a:t>
-            </a:r>
-            <a:r>
-              <a:rPr lang="ru-RU" b="0" i="0" dirty="0" err="1">
-                <a:effectLst/>
-                <a:latin typeface="fkGroteskNeue"/>
-              </a:rPr>
-              <a:t>accuracy</a:t>
-            </a:r>
-            <a:r>
-              <a:rPr lang="ru-RU" b="0" i="0" dirty="0">
-                <a:effectLst/>
-                <a:latin typeface="fkGroteskNeue"/>
-              </a:rPr>
-              <a:t>. Но это совершенно бесполезная модель.</a:t>
-            </a:r>
-          </a:p>
-          <a:p>
-            <a:pPr algn="l"/>
-            <a:r>
-              <a:rPr lang="ru-RU" b="0" i="0" dirty="0">
-                <a:effectLst/>
-                <a:latin typeface="fkGroteskNeue"/>
-              </a:rPr>
-              <a:t>Сегодня мы разберём оба эти вопроса. Интерпретируемость и работа с дисбалансом — это то, что отличает хорошего </a:t>
-            </a:r>
-            <a:r>
-              <a:rPr lang="ru-RU" b="0" i="0" dirty="0" err="1">
-                <a:effectLst/>
-                <a:latin typeface="fkGroteskNeue"/>
-              </a:rPr>
-              <a:t>data</a:t>
-            </a:r>
-            <a:r>
-              <a:rPr lang="ru-RU" b="0" i="0" dirty="0">
-                <a:effectLst/>
-                <a:latin typeface="fkGroteskNeue"/>
-              </a:rPr>
-              <a:t> </a:t>
-            </a:r>
-            <a:r>
-              <a:rPr lang="ru-RU" b="0" i="0" dirty="0" err="1">
-                <a:effectLst/>
-                <a:latin typeface="fkGroteskNeue"/>
-              </a:rPr>
-              <a:t>scientist</a:t>
-            </a:r>
-            <a:r>
-              <a:rPr lang="ru-RU" b="0" i="0" dirty="0">
-                <a:effectLst/>
-                <a:latin typeface="fkGroteskNeue"/>
-              </a:rPr>
-              <a:t> от великого.</a:t>
-            </a:r>
-          </a:p>
           <a:p>
             <a:endParaRPr lang="ru-RU" sz="1200" b="0" i="0" kern="1200" dirty="0">
               <a:solidFill>
@@ -3658,169 +1625,7 @@
           <a:bodyPr/>
           <a:lstStyle/>
           <a:p>
-            <a:pPr algn="l"/>
-            <a:r>
-              <a:rPr lang="ru-RU" b="0" i="0" dirty="0">
-                <a:effectLst/>
-                <a:latin typeface="fkGroteskNeue"/>
-              </a:rPr>
-              <a:t>Мы научились предсказывать классы. Но в медицине часто нужно предсказывать время события.</a:t>
-            </a:r>
-          </a:p>
-          <a:p>
-            <a:pPr algn="l"/>
-            <a:r>
-              <a:rPr lang="ru-RU" b="0" i="0" dirty="0">
-                <a:effectLst/>
-                <a:latin typeface="fkGroteskNeue"/>
-              </a:rPr>
-              <a:t>Когда произойдёт рецидив? Когда пациент умрёт? Как долго будет болеть?</a:t>
-            </a:r>
-          </a:p>
-          <a:p>
-            <a:pPr algn="l"/>
-            <a:r>
-              <a:rPr lang="ru-RU" b="0" i="0" dirty="0">
-                <a:effectLst/>
-                <a:latin typeface="fkGroteskNeue"/>
-              </a:rPr>
-              <a:t>Это задача анализа выживаемости (</a:t>
-            </a:r>
-            <a:r>
-              <a:rPr lang="ru-RU" b="0" i="0" dirty="0" err="1">
-                <a:effectLst/>
-                <a:latin typeface="fkGroteskNeue"/>
-              </a:rPr>
-              <a:t>survival</a:t>
-            </a:r>
-            <a:r>
-              <a:rPr lang="ru-RU" b="0" i="0" dirty="0">
-                <a:effectLst/>
-                <a:latin typeface="fkGroteskNeue"/>
-              </a:rPr>
-              <a:t> </a:t>
-            </a:r>
-            <a:r>
-              <a:rPr lang="ru-RU" b="0" i="0" dirty="0" err="1">
-                <a:effectLst/>
-                <a:latin typeface="fkGroteskNeue"/>
-              </a:rPr>
-              <a:t>analysis</a:t>
-            </a:r>
-            <a:r>
-              <a:rPr lang="ru-RU" b="0" i="0" dirty="0">
-                <a:effectLst/>
-                <a:latin typeface="fkGroteskNeue"/>
-              </a:rPr>
-              <a:t>).</a:t>
-            </a:r>
-          </a:p>
-          <a:p>
-            <a:pPr algn="l"/>
-            <a:r>
-              <a:rPr lang="ru-RU" b="0" i="0" dirty="0">
-                <a:effectLst/>
-                <a:latin typeface="fkGroteskNeue"/>
-              </a:rPr>
-              <a:t>Мы разберём:</a:t>
-            </a:r>
-          </a:p>
-          <a:p>
-            <a:pPr algn="l">
-              <a:buFont typeface="Arial" panose="020B0604020202020204" pitchFamily="34" charset="0"/>
-              <a:buChar char="•"/>
-            </a:pPr>
-            <a:r>
-              <a:rPr lang="ru-RU" b="0" i="0" dirty="0">
-                <a:effectLst/>
-                <a:latin typeface="fkGroteskNeue"/>
-              </a:rPr>
-              <a:t>Функции выживаемости S(t) и опасности h(t)</a:t>
-            </a:r>
-          </a:p>
-          <a:p>
-            <a:pPr algn="l">
-              <a:buFont typeface="Arial" panose="020B0604020202020204" pitchFamily="34" charset="0"/>
-              <a:buChar char="•"/>
-            </a:pPr>
-            <a:r>
-              <a:rPr lang="ru-RU" b="0" i="0" dirty="0">
-                <a:effectLst/>
-                <a:latin typeface="fkGroteskNeue"/>
-              </a:rPr>
-              <a:t>Кривые Каплана-Мейера</a:t>
-            </a:r>
-          </a:p>
-          <a:p>
-            <a:pPr algn="l">
-              <a:buFont typeface="Arial" panose="020B0604020202020204" pitchFamily="34" charset="0"/>
-              <a:buChar char="•"/>
-            </a:pPr>
-            <a:r>
-              <a:rPr lang="ru-RU" b="0" i="0" dirty="0">
-                <a:effectLst/>
-                <a:latin typeface="fkGroteskNeue"/>
-              </a:rPr>
-              <a:t>Модель пропорциональных рисков Кокса</a:t>
-            </a:r>
-          </a:p>
-          <a:p>
-            <a:pPr algn="l">
-              <a:buFont typeface="Arial" panose="020B0604020202020204" pitchFamily="34" charset="0"/>
-              <a:buChar char="•"/>
-            </a:pPr>
-            <a:r>
-              <a:rPr lang="ru-RU" b="0" i="0" dirty="0">
-                <a:effectLst/>
-                <a:latin typeface="fkGroteskNeue"/>
-              </a:rPr>
-              <a:t>Интерпретацию </a:t>
-            </a:r>
-            <a:r>
-              <a:rPr lang="ru-RU" b="0" i="0" dirty="0" err="1">
-                <a:effectLst/>
-                <a:latin typeface="fkGroteskNeue"/>
-              </a:rPr>
-              <a:t>Hazard</a:t>
-            </a:r>
-            <a:r>
-              <a:rPr lang="ru-RU" b="0" i="0" dirty="0">
-                <a:effectLst/>
-                <a:latin typeface="fkGroteskNeue"/>
-              </a:rPr>
-              <a:t> </a:t>
-            </a:r>
-            <a:r>
-              <a:rPr lang="ru-RU" b="0" i="0" dirty="0" err="1">
-                <a:effectLst/>
-                <a:latin typeface="fkGroteskNeue"/>
-              </a:rPr>
-              <a:t>Ratio</a:t>
-            </a:r>
-            <a:endParaRPr lang="ru-RU" b="0" i="0" dirty="0">
-              <a:effectLst/>
-              <a:latin typeface="fkGroteskNeue"/>
-            </a:endParaRPr>
-          </a:p>
-          <a:p>
-            <a:pPr algn="l"/>
-            <a:r>
-              <a:rPr lang="ru-RU" b="0" i="0" dirty="0">
-                <a:effectLst/>
-                <a:latin typeface="fkGroteskNeue"/>
-              </a:rPr>
-              <a:t>Спасибо за внимание!</a:t>
-            </a:r>
-          </a:p>
-          <a:p>
-            <a:endParaRPr lang="ru-RU" sz="1200" b="0" i="0" kern="1200" dirty="0">
-              <a:solidFill>
-                <a:schemeClr val="tx1"/>
-              </a:solidFill>
-              <a:latin typeface="+mn-lt"/>
-              <a:ea typeface="+mn-ea"/>
-              <a:cs typeface="+mn-cs"/>
-            </a:endParaRPr>
+            <a:endParaRPr lang="ru-RU" dirty="0"/>
           </a:p>
         </p:txBody>
       </p:sp>
@@ -3841,92 +1646,7 @@
           <a:p>
             <a:fld id="{67A570D4-9143-4E91-8959-8D963457B763}" type="slidenum">
               <a:rPr lang="ru-RU" smtClean="0"/>
-              <a:pPr/>
               <a:t>20</a:t>
-            </a:fld>
-            <a:endParaRPr lang="ru-RU"/>
-          </a:p>
-        </p:txBody>
-      </p:sp>
-    </p:spTree>
-    <p:extLst>
-      <p:ext uri="{BB962C8B-B14F-4D97-AF65-F5344CB8AC3E}">
-        <p14:creationId xmlns:p14="http://schemas.microsoft.com/office/powerpoint/2010/main" val="336608419"/>
-      </p:ext>
-    </p:extLst>
-  </p:cSld>
-  <p:clrMapOvr>
-    <a:masterClrMapping/>
-  </p:clrMapOvr>
-</p:notes>
-</file>
-
-<file path=ppt/notesSlides/notesSlide21.xml><?xml version="1.0" encoding="utf-8"?>
-<p:notes xmlns:a="http://schemas.openxmlformats.org/drawingml/2006/main" xmlns:r="http://schemas.openxmlformats.org/officeDocument/2006/relationships" xmlns:p="http://schemas.openxmlformats.org/presentationml/2006/main">
-  <p:cSld>
-    <p:spTree>
-      <p:nvGrpSpPr>
-        <p:cNvPr id="1" name=""/>
-        <p:cNvGrpSpPr/>
-        <p:nvPr/>
-      </p:nvGrpSpPr>
-      <p:grpSpPr>
-        <a:xfrm>
-          <a:off x="0" y="0"/>
-          <a:ext cx="0" cy="0"/>
-          <a:chOff x="0" y="0"/>
-          <a:chExt cx="0" cy="0"/>
-        </a:xfrm>
-      </p:grpSpPr>
-      <p:sp>
-        <p:nvSpPr>
-          <p:cNvPr id="2" name="Образ слайда 1"/>
-          <p:cNvSpPr>
-            <a:spLocks noGrp="1" noRot="1" noChangeAspect="1"/>
-          </p:cNvSpPr>
-          <p:nvPr>
-            <p:ph type="sldImg"/>
-          </p:nvPr>
-        </p:nvSpPr>
-        <p:spPr/>
-      </p:sp>
-      <p:sp>
-        <p:nvSpPr>
-          <p:cNvPr id="3" name="Заметки 2"/>
-          <p:cNvSpPr>
-            <a:spLocks noGrp="1"/>
-          </p:cNvSpPr>
-          <p:nvPr>
-            <p:ph type="body" idx="1"/>
-          </p:nvPr>
-        </p:nvSpPr>
-        <p:spPr/>
-        <p:txBody>
-          <a:bodyPr/>
-          <a:lstStyle/>
-          <a:p>
-            <a:endParaRPr lang="ru-RU" dirty="0"/>
-          </a:p>
-        </p:txBody>
-      </p:sp>
-      <p:sp>
-        <p:nvSpPr>
-          <p:cNvPr id="4" name="Номер слайда 3"/>
-          <p:cNvSpPr>
-            <a:spLocks noGrp="1"/>
-          </p:cNvSpPr>
-          <p:nvPr>
-            <p:ph type="sldNum" sz="quarter" idx="10"/>
-          </p:nvPr>
-        </p:nvSpPr>
-        <p:spPr/>
-        <p:txBody>
-          <a:bodyPr/>
-          <a:lstStyle/>
-          <a:p>
-            <a:fld id="{67A570D4-9143-4E91-8959-8D963457B763}" type="slidenum">
-              <a:rPr lang="ru-RU" smtClean="0"/>
-              <a:t>21</a:t>
             </a:fld>
             <a:endParaRPr lang="ru-RU"/>
           </a:p>
@@ -3990,788 +1710,10 @@
           <a:lstStyle/>
           <a:p>
             <a:pPr algn="l"/>
-            <a:r>
-              <a:rPr lang="ru-RU" b="0" i="0" dirty="0">
-                <a:effectLst/>
-                <a:latin typeface="fkGroteskNeue"/>
-              </a:rPr>
-              <a:t>Первый вопрос: какие признаки действительно важны?</a:t>
-            </a:r>
-          </a:p>
-          <a:p>
-            <a:pPr algn="l"/>
-            <a:r>
-              <a:rPr lang="ru-RU" b="0" i="0" dirty="0" err="1">
-                <a:effectLst/>
-                <a:latin typeface="fkGroteskNeue"/>
-              </a:rPr>
-              <a:t>Random</a:t>
-            </a:r>
-            <a:r>
-              <a:rPr lang="ru-RU" b="0" i="0" dirty="0">
-                <a:effectLst/>
-                <a:latin typeface="fkGroteskNeue"/>
-              </a:rPr>
-              <a:t> </a:t>
-            </a:r>
-            <a:r>
-              <a:rPr lang="ru-RU" b="0" i="0" dirty="0" err="1">
-                <a:effectLst/>
-                <a:latin typeface="fkGroteskNeue"/>
-              </a:rPr>
-              <a:t>Forest</a:t>
-            </a:r>
-            <a:r>
-              <a:rPr lang="ru-RU" b="0" i="0" dirty="0">
-                <a:effectLst/>
-                <a:latin typeface="fkGroteskNeue"/>
-              </a:rPr>
-              <a:t> обучилась на 20,000 генах и 100 пациентах. Модель работает. Но какие гены на самом деле ответственны за предсказание?</a:t>
-            </a:r>
-          </a:p>
-          <a:p>
-            <a:pPr algn="l"/>
-            <a:r>
-              <a:rPr lang="ru-RU" b="0" i="0" dirty="0">
-                <a:effectLst/>
-                <a:latin typeface="fkGroteskNeue"/>
-              </a:rPr>
-              <a:t>Способ 1: Встроенный </a:t>
-            </a:r>
-            <a:r>
-              <a:rPr lang="ru-RU" b="0" i="0" dirty="0" err="1">
-                <a:effectLst/>
-                <a:latin typeface="fkGroteskNeue"/>
-              </a:rPr>
-              <a:t>Feature</a:t>
-            </a:r>
-            <a:r>
-              <a:rPr lang="ru-RU" b="0" i="0" dirty="0">
-                <a:effectLst/>
-                <a:latin typeface="fkGroteskNeue"/>
-              </a:rPr>
-              <a:t> </a:t>
-            </a:r>
-            <a:r>
-              <a:rPr lang="ru-RU" b="0" i="0" dirty="0" err="1">
-                <a:effectLst/>
-                <a:latin typeface="fkGroteskNeue"/>
-              </a:rPr>
-              <a:t>Importance</a:t>
-            </a:r>
-            <a:r>
-              <a:rPr lang="ru-RU" b="0" i="0" dirty="0">
-                <a:effectLst/>
-                <a:latin typeface="fkGroteskNeue"/>
-              </a:rPr>
-              <a:t> (самый популярный)</a:t>
-            </a:r>
-          </a:p>
-          <a:p>
-            <a:pPr algn="l"/>
-            <a:r>
-              <a:rPr lang="ru-RU" b="0" i="0" dirty="0" err="1">
-                <a:effectLst/>
-                <a:latin typeface="fkGroteskNeue"/>
-              </a:rPr>
-              <a:t>Random</a:t>
-            </a:r>
-            <a:r>
-              <a:rPr lang="ru-RU" b="0" i="0" dirty="0">
-                <a:effectLst/>
-                <a:latin typeface="fkGroteskNeue"/>
-              </a:rPr>
-              <a:t> </a:t>
-            </a:r>
-            <a:r>
-              <a:rPr lang="ru-RU" b="0" i="0" dirty="0" err="1">
-                <a:effectLst/>
-                <a:latin typeface="fkGroteskNeue"/>
-              </a:rPr>
-              <a:t>Forest</a:t>
-            </a:r>
-            <a:r>
-              <a:rPr lang="ru-RU" b="0" i="0" dirty="0">
-                <a:effectLst/>
-                <a:latin typeface="fkGroteskNeue"/>
-              </a:rPr>
-              <a:t> рассчитывает </a:t>
-            </a:r>
-            <a:r>
-              <a:rPr lang="ru-RU" b="0" i="0" dirty="0" err="1">
-                <a:effectLst/>
-                <a:latin typeface="fkGroteskNeue"/>
-              </a:rPr>
-              <a:t>Feature</a:t>
-            </a:r>
-            <a:r>
-              <a:rPr lang="ru-RU" b="0" i="0" dirty="0">
-                <a:effectLst/>
-                <a:latin typeface="fkGroteskNeue"/>
-              </a:rPr>
-              <a:t> </a:t>
-            </a:r>
-            <a:r>
-              <a:rPr lang="ru-RU" b="0" i="0" dirty="0" err="1">
-                <a:effectLst/>
-                <a:latin typeface="fkGroteskNeue"/>
-              </a:rPr>
-              <a:t>Importance</a:t>
-            </a:r>
-            <a:r>
-              <a:rPr lang="ru-RU" b="0" i="0" dirty="0">
-                <a:effectLst/>
-                <a:latin typeface="fkGroteskNeue"/>
-              </a:rPr>
-              <a:t> "из коробки":</a:t>
-            </a:r>
-          </a:p>
-          <a:p>
-            <a:pPr algn="l"/>
-            <a:r>
-              <a:rPr lang="ru-RU" b="0" i="0" dirty="0">
-                <a:effectLst/>
-                <a:latin typeface="fkGroteskNeue"/>
-              </a:rPr>
-              <a:t>Как это работает?</a:t>
-            </a:r>
-          </a:p>
-          <a:p>
-            <a:pPr algn="l"/>
-            <a:r>
-              <a:rPr lang="ru-RU" b="0" i="0" dirty="0">
-                <a:effectLst/>
-                <a:latin typeface="fkGroteskNeue"/>
-              </a:rPr>
-              <a:t>Для каждого дерева в лесу, для каждого узла, где происходит сплит (разделение), мы смотрим: на сколько улучшилось "нечистота" (</a:t>
-            </a:r>
-            <a:r>
-              <a:rPr lang="ru-RU" b="0" i="0" dirty="0" err="1">
-                <a:effectLst/>
-                <a:latin typeface="fkGroteskNeue"/>
-              </a:rPr>
-              <a:t>impurity</a:t>
-            </a:r>
-            <a:r>
-              <a:rPr lang="ru-RU" b="0" i="0" dirty="0">
-                <a:effectLst/>
-                <a:latin typeface="fkGroteskNeue"/>
-              </a:rPr>
-              <a:t>)?</a:t>
-            </a:r>
-          </a:p>
-          <a:p>
-            <a:pPr algn="l"/>
-            <a:r>
-              <a:rPr lang="ru-RU" b="0" i="0" dirty="0">
-                <a:effectLst/>
-                <a:latin typeface="fkGroteskNeue"/>
-              </a:rPr>
-              <a:t>Гены, которые часто используются в сплитах и очень улучшают классификацию, получают высокие баллы.</a:t>
-            </a:r>
-          </a:p>
-          <a:p>
-            <a:pPr algn="l"/>
-            <a:r>
-              <a:rPr lang="ru-RU" b="0" i="0" dirty="0">
-                <a:effectLst/>
-                <a:latin typeface="fkGroteskNeue"/>
-              </a:rPr>
-              <a:t>Плюсы:</a:t>
-            </a:r>
-          </a:p>
-          <a:p>
-            <a:pPr algn="l">
-              <a:buFont typeface="Arial" panose="020B0604020202020204" pitchFamily="34" charset="0"/>
-              <a:buChar char="•"/>
-            </a:pPr>
-            <a:r>
-              <a:rPr lang="ru-RU" b="0" i="0" dirty="0">
-                <a:effectLst/>
-                <a:latin typeface="fkGroteskNeue"/>
-              </a:rPr>
-              <a:t>Очень быстро</a:t>
-            </a:r>
-          </a:p>
-          <a:p>
-            <a:pPr algn="l">
-              <a:buFont typeface="Arial" panose="020B0604020202020204" pitchFamily="34" charset="0"/>
-              <a:buChar char="•"/>
-            </a:pPr>
-            <a:r>
-              <a:rPr lang="ru-RU" b="0" i="0" dirty="0">
-                <a:effectLst/>
-                <a:latin typeface="fkGroteskNeue"/>
-              </a:rPr>
-              <a:t>Интуитивно</a:t>
-            </a:r>
-          </a:p>
-          <a:p>
-            <a:pPr algn="l">
-              <a:buFont typeface="Arial" panose="020B0604020202020204" pitchFamily="34" charset="0"/>
-              <a:buChar char="•"/>
-            </a:pPr>
-            <a:r>
-              <a:rPr lang="ru-RU" b="0" i="0" dirty="0">
-                <a:effectLst/>
-                <a:latin typeface="fkGroteskNeue"/>
-              </a:rPr>
-              <a:t>Встроено в </a:t>
-            </a:r>
-            <a:r>
-              <a:rPr lang="ru-RU" b="0" i="0" dirty="0" err="1">
-                <a:effectLst/>
-                <a:latin typeface="fkGroteskNeue"/>
-              </a:rPr>
-              <a:t>sklearn</a:t>
-            </a:r>
             <a:endParaRPr lang="ru-RU" b="0" i="0" dirty="0">
               <a:effectLst/>
               <a:latin typeface="fkGroteskNeue"/>
             </a:endParaRPr>
-          </a:p>
-          <a:p>
-            <a:pPr algn="l"/>
-            <a:r>
-              <a:rPr lang="ru-RU" b="0" i="0" dirty="0">
-                <a:effectLst/>
-                <a:latin typeface="fkGroteskNeue"/>
-              </a:rPr>
-              <a:t>Минусы:</a:t>
-            </a:r>
-          </a:p>
-          <a:p>
-            <a:pPr algn="l">
-              <a:buFont typeface="Arial" panose="020B0604020202020204" pitchFamily="34" charset="0"/>
-              <a:buChar char="•"/>
-            </a:pPr>
-            <a:r>
-              <a:rPr lang="ru-RU" b="0" i="0" dirty="0">
-                <a:effectLst/>
-                <a:latin typeface="fkGroteskNeue"/>
-              </a:rPr>
-              <a:t>Может быть смещено в сторону </a:t>
-            </a:r>
-            <a:r>
-              <a:rPr lang="ru-RU" b="0" i="0" dirty="0" err="1">
-                <a:effectLst/>
-                <a:latin typeface="fkGroteskNeue"/>
-              </a:rPr>
-              <a:t>высоковариативных</a:t>
-            </a:r>
-            <a:r>
-              <a:rPr lang="ru-RU" b="0" i="0" dirty="0">
-                <a:effectLst/>
-                <a:latin typeface="fkGroteskNeue"/>
-              </a:rPr>
-              <a:t> признаков</a:t>
-            </a:r>
-          </a:p>
-          <a:p>
-            <a:pPr algn="l">
-              <a:buFont typeface="Arial" panose="020B0604020202020204" pitchFamily="34" charset="0"/>
-              <a:buChar char="•"/>
-            </a:pPr>
-            <a:r>
-              <a:rPr lang="ru-RU" b="0" i="0" dirty="0">
-                <a:effectLst/>
-                <a:latin typeface="fkGroteskNeue"/>
-              </a:rPr>
-              <a:t>Не учитывает </a:t>
-            </a:r>
-            <a:r>
-              <a:rPr lang="ru-RU" b="0" i="0" dirty="0" err="1">
-                <a:effectLst/>
-                <a:latin typeface="fkGroteskNeue"/>
-              </a:rPr>
-              <a:t>коллинеарность</a:t>
-            </a:r>
-            <a:r>
-              <a:rPr lang="ru-RU" b="0" i="0" dirty="0">
-                <a:effectLst/>
-                <a:latin typeface="fkGroteskNeue"/>
-              </a:rPr>
-              <a:t> (если два гена коррелируют, может быть, один "украсть" важность у другого)</a:t>
-            </a:r>
-          </a:p>
-          <a:p>
-            <a:pPr algn="l"/>
-            <a:r>
-              <a:rPr lang="ru-RU" b="0" i="0" dirty="0">
-                <a:effectLst/>
-                <a:latin typeface="fkGroteskNeue"/>
-              </a:rPr>
-              <a:t>Способ 2: </a:t>
-            </a:r>
-            <a:r>
-              <a:rPr lang="ru-RU" b="0" i="0" dirty="0" err="1">
-                <a:effectLst/>
-                <a:latin typeface="fkGroteskNeue"/>
-              </a:rPr>
-              <a:t>Permutation</a:t>
-            </a:r>
-            <a:r>
-              <a:rPr lang="ru-RU" b="0" i="0" dirty="0">
-                <a:effectLst/>
-                <a:latin typeface="fkGroteskNeue"/>
-              </a:rPr>
-              <a:t> </a:t>
-            </a:r>
-            <a:r>
-              <a:rPr lang="ru-RU" b="0" i="0" dirty="0" err="1">
-                <a:effectLst/>
-                <a:latin typeface="fkGroteskNeue"/>
-              </a:rPr>
-              <a:t>Importance</a:t>
-            </a:r>
-            <a:r>
-              <a:rPr lang="ru-RU" b="0" i="0" dirty="0">
-                <a:effectLst/>
-                <a:latin typeface="fkGroteskNeue"/>
-              </a:rPr>
-              <a:t> (более робастный)</a:t>
-            </a:r>
-          </a:p>
-          <a:p>
-            <a:pPr algn="l"/>
-            <a:r>
-              <a:rPr lang="ru-RU" b="0" i="0" dirty="0">
-                <a:effectLst/>
-                <a:latin typeface="fkGroteskNeue"/>
-              </a:rPr>
-              <a:t>Идея: если признак действительно важен, то перестановка его значений случайно должна сильно испортить модель.</a:t>
-            </a:r>
-          </a:p>
-          <a:p>
-            <a:pPr algn="l"/>
-            <a:r>
-              <a:rPr lang="ru-RU" b="0" i="0" dirty="0">
-                <a:effectLst/>
-                <a:latin typeface="fkGroteskNeue"/>
-              </a:rPr>
-              <a:t>Плюсы:</a:t>
-            </a:r>
-          </a:p>
-          <a:p>
-            <a:pPr algn="l">
-              <a:buFont typeface="Arial" panose="020B0604020202020204" pitchFamily="34" charset="0"/>
-              <a:buChar char="•"/>
-            </a:pPr>
-            <a:r>
-              <a:rPr lang="ru-RU" b="0" i="0" dirty="0">
-                <a:effectLst/>
-                <a:latin typeface="fkGroteskNeue"/>
-              </a:rPr>
-              <a:t>Работает с любой моделью (не только </a:t>
-            </a:r>
-            <a:r>
-              <a:rPr lang="ru-RU" b="0" i="0" dirty="0" err="1">
-                <a:effectLst/>
-                <a:latin typeface="fkGroteskNeue"/>
-              </a:rPr>
-              <a:t>Random</a:t>
-            </a:r>
-            <a:r>
-              <a:rPr lang="ru-RU" b="0" i="0" dirty="0">
-                <a:effectLst/>
-                <a:latin typeface="fkGroteskNeue"/>
-              </a:rPr>
-              <a:t> </a:t>
-            </a:r>
-            <a:r>
-              <a:rPr lang="ru-RU" b="0" i="0" dirty="0" err="1">
-                <a:effectLst/>
-                <a:latin typeface="fkGroteskNeue"/>
-              </a:rPr>
-              <a:t>Forest</a:t>
-            </a:r>
-            <a:r>
-              <a:rPr lang="ru-RU" b="0" i="0" dirty="0">
-                <a:effectLst/>
-                <a:latin typeface="fkGroteskNeue"/>
-              </a:rPr>
-              <a:t>)</a:t>
-            </a:r>
-          </a:p>
-          <a:p>
-            <a:pPr algn="l">
-              <a:buFont typeface="Arial" panose="020B0604020202020204" pitchFamily="34" charset="0"/>
-              <a:buChar char="•"/>
-            </a:pPr>
-            <a:r>
-              <a:rPr lang="ru-RU" b="0" i="0" dirty="0">
-                <a:effectLst/>
-                <a:latin typeface="fkGroteskNeue"/>
-              </a:rPr>
-              <a:t>Менее предвзята</a:t>
-            </a:r>
-          </a:p>
-          <a:p>
-            <a:pPr algn="l">
-              <a:buFont typeface="Arial" panose="020B0604020202020204" pitchFamily="34" charset="0"/>
-              <a:buChar char="•"/>
-            </a:pPr>
-            <a:r>
-              <a:rPr lang="ru-RU" b="0" i="0" dirty="0">
-                <a:effectLst/>
-                <a:latin typeface="fkGroteskNeue"/>
-              </a:rPr>
-              <a:t>Учитывает </a:t>
-            </a:r>
-            <a:r>
-              <a:rPr lang="ru-RU" b="0" i="0" dirty="0" err="1">
-                <a:effectLst/>
-                <a:latin typeface="fkGroteskNeue"/>
-              </a:rPr>
-              <a:t>коллинеарность</a:t>
-            </a:r>
-            <a:r>
-              <a:rPr lang="ru-RU" b="0" i="0" dirty="0">
-                <a:effectLst/>
-                <a:latin typeface="fkGroteskNeue"/>
-              </a:rPr>
-              <a:t> (если два гена коррелируют, оба получат низкую важность)</a:t>
-            </a:r>
-          </a:p>
-          <a:p>
-            <a:pPr algn="l"/>
-            <a:r>
-              <a:rPr lang="ru-RU" b="0" i="0" dirty="0">
-                <a:effectLst/>
-                <a:latin typeface="fkGroteskNeue"/>
-              </a:rPr>
-              <a:t>Минусы:</a:t>
-            </a:r>
-          </a:p>
-          <a:p>
-            <a:pPr algn="l">
-              <a:buFont typeface="Arial" panose="020B0604020202020204" pitchFamily="34" charset="0"/>
-              <a:buChar char="•"/>
-            </a:pPr>
-            <a:r>
-              <a:rPr lang="ru-RU" b="0" i="0" dirty="0">
-                <a:effectLst/>
-                <a:latin typeface="fkGroteskNeue"/>
-              </a:rPr>
-              <a:t>Медленнее (нужно много перестановок)</a:t>
-            </a:r>
-          </a:p>
-          <a:p>
-            <a:pPr algn="l">
-              <a:buFont typeface="Arial" panose="020B0604020202020204" pitchFamily="34" charset="0"/>
-              <a:buChar char="•"/>
-            </a:pPr>
-            <a:r>
-              <a:rPr lang="ru-RU" b="0" i="0" dirty="0">
-                <a:effectLst/>
-                <a:latin typeface="fkGroteskNeue"/>
-              </a:rPr>
-              <a:t>Может быть неустойчива на маленьких выборках</a:t>
-            </a:r>
-          </a:p>
-          <a:p>
-            <a:pPr algn="l"/>
-            <a:r>
-              <a:rPr lang="ru-RU" b="0" i="0" dirty="0">
-                <a:effectLst/>
-                <a:latin typeface="fkGroteskNeue"/>
-              </a:rPr>
-              <a:t>Способ 3: SHAP, LIME (самые точные, но сложные)</a:t>
-            </a:r>
-          </a:p>
-          <a:p>
-            <a:pPr algn="l"/>
-            <a:r>
-              <a:rPr lang="ru-RU" b="0" i="0" dirty="0">
-                <a:effectLst/>
-                <a:latin typeface="fkGroteskNeue"/>
-              </a:rPr>
-              <a:t>SHAP (</a:t>
-            </a:r>
-            <a:r>
-              <a:rPr lang="ru-RU" b="0" i="0" dirty="0" err="1">
-                <a:effectLst/>
-                <a:latin typeface="fkGroteskNeue"/>
-              </a:rPr>
-              <a:t>SHapley</a:t>
-            </a:r>
-            <a:r>
-              <a:rPr lang="ru-RU" b="0" i="0" dirty="0">
-                <a:effectLst/>
-                <a:latin typeface="fkGroteskNeue"/>
-              </a:rPr>
-              <a:t> </a:t>
-            </a:r>
-            <a:r>
-              <a:rPr lang="ru-RU" b="0" i="0" dirty="0" err="1">
-                <a:effectLst/>
-                <a:latin typeface="fkGroteskNeue"/>
-              </a:rPr>
-              <a:t>Additive</a:t>
-            </a:r>
-            <a:r>
-              <a:rPr lang="ru-RU" b="0" i="0" dirty="0">
-                <a:effectLst/>
-                <a:latin typeface="fkGroteskNeue"/>
-              </a:rPr>
-              <a:t> </a:t>
-            </a:r>
-            <a:r>
-              <a:rPr lang="ru-RU" b="0" i="0" dirty="0" err="1">
-                <a:effectLst/>
-                <a:latin typeface="fkGroteskNeue"/>
-              </a:rPr>
-              <a:t>exPlanations</a:t>
-            </a:r>
-            <a:r>
-              <a:rPr lang="ru-RU" b="0" i="0" dirty="0">
-                <a:effectLst/>
-                <a:latin typeface="fkGroteskNeue"/>
-              </a:rPr>
-              <a:t>) использует теорию игр.</a:t>
-            </a:r>
-          </a:p>
-          <a:p>
-            <a:pPr algn="l"/>
-            <a:r>
-              <a:rPr lang="ru-RU" b="0" i="0" dirty="0">
-                <a:effectLst/>
-                <a:latin typeface="fkGroteskNeue"/>
-              </a:rPr>
-              <a:t>Идея: для каждого предсказания посмотрим, на сколько каждый признак способствовал этому предсказанию?</a:t>
-            </a:r>
-          </a:p>
-          <a:p>
-            <a:pPr algn="l"/>
-            <a:r>
-              <a:rPr lang="ru-RU" b="0" i="0" dirty="0">
-                <a:effectLst/>
-                <a:latin typeface="fkGroteskNeue"/>
-              </a:rPr>
-              <a:t>Пример:</a:t>
-            </a:r>
-          </a:p>
-          <a:p>
-            <a:pPr algn="l">
-              <a:buFont typeface="Arial" panose="020B0604020202020204" pitchFamily="34" charset="0"/>
-              <a:buChar char="•"/>
-            </a:pPr>
-            <a:r>
-              <a:rPr lang="ru-RU" b="0" i="0" dirty="0">
-                <a:effectLst/>
-                <a:latin typeface="fkGroteskNeue"/>
-              </a:rPr>
-              <a:t>Предсказание: "рак" (вероятность 0.85)</a:t>
-            </a:r>
-          </a:p>
-          <a:p>
-            <a:pPr algn="l">
-              <a:buFont typeface="Arial" panose="020B0604020202020204" pitchFamily="34" charset="0"/>
-              <a:buChar char="•"/>
-            </a:pPr>
-            <a:r>
-              <a:rPr lang="ru-RU" b="0" i="0" dirty="0">
-                <a:effectLst/>
-                <a:latin typeface="fkGroteskNeue"/>
-              </a:rPr>
-              <a:t>Базовая вероятность (для среднего пациента): 0.50</a:t>
-            </a:r>
-          </a:p>
-          <a:p>
-            <a:pPr algn="l">
-              <a:buFont typeface="Arial" panose="020B0604020202020204" pitchFamily="34" charset="0"/>
-              <a:buChar char="•"/>
-            </a:pPr>
-            <a:r>
-              <a:rPr lang="ru-RU" b="0" i="0" dirty="0">
-                <a:effectLst/>
-                <a:latin typeface="fkGroteskNeue"/>
-              </a:rPr>
-              <a:t>TP53 мутация: +0.20</a:t>
-            </a:r>
-          </a:p>
-          <a:p>
-            <a:pPr algn="l">
-              <a:buFont typeface="Arial" panose="020B0604020202020204" pitchFamily="34" charset="0"/>
-              <a:buChar char="•"/>
-            </a:pPr>
-            <a:r>
-              <a:rPr lang="ru-RU" b="0" i="0" dirty="0">
-                <a:effectLst/>
-                <a:latin typeface="fkGroteskNeue"/>
-              </a:rPr>
-              <a:t>Возраст 65: +0.10</a:t>
-            </a:r>
-          </a:p>
-          <a:p>
-            <a:pPr algn="l">
-              <a:buFont typeface="Arial" panose="020B0604020202020204" pitchFamily="34" charset="0"/>
-              <a:buChar char="•"/>
-            </a:pPr>
-            <a:r>
-              <a:rPr lang="ru-RU" b="0" i="0" dirty="0">
-                <a:effectLst/>
-                <a:latin typeface="fkGroteskNeue"/>
-              </a:rPr>
-              <a:t>Экспрессия MYC: +0.05</a:t>
-            </a:r>
-          </a:p>
-          <a:p>
-            <a:pPr algn="l">
-              <a:buFont typeface="Arial" panose="020B0604020202020204" pitchFamily="34" charset="0"/>
-              <a:buChar char="•"/>
-            </a:pPr>
-            <a:r>
-              <a:rPr lang="ru-RU" b="0" i="0" dirty="0">
-                <a:effectLst/>
-                <a:latin typeface="fkGroteskNeue"/>
-              </a:rPr>
-              <a:t>Итого: 0.50 + 0.20 + 0.10 + 0.05 = 0.85</a:t>
-            </a:r>
-          </a:p>
-          <a:p>
-            <a:pPr algn="l"/>
-            <a:r>
-              <a:rPr lang="ru-RU" b="0" i="0" dirty="0">
-                <a:effectLst/>
-                <a:latin typeface="fkGroteskNeue"/>
-              </a:rPr>
-              <a:t>Это очень мощно: мы знаем не просто, что TP53 важен, мы знаем, что для этого конкретного пациента TP53 добавил 20% к вероятности рака.</a:t>
-            </a:r>
-          </a:p>
-          <a:p>
-            <a:pPr algn="l"/>
-            <a:r>
-              <a:rPr lang="ru-RU" b="0" i="0" dirty="0">
-                <a:effectLst/>
-                <a:latin typeface="fkGroteskNeue"/>
-              </a:rPr>
-              <a:t>Плюсы:</a:t>
-            </a:r>
-          </a:p>
-          <a:p>
-            <a:pPr algn="l">
-              <a:buFont typeface="Arial" panose="020B0604020202020204" pitchFamily="34" charset="0"/>
-              <a:buChar char="•"/>
-            </a:pPr>
-            <a:r>
-              <a:rPr lang="ru-RU" b="0" i="0" dirty="0">
-                <a:effectLst/>
-                <a:latin typeface="fkGroteskNeue"/>
-              </a:rPr>
-              <a:t>Самая точная интерпретация</a:t>
-            </a:r>
-          </a:p>
-          <a:p>
-            <a:pPr algn="l">
-              <a:buFont typeface="Arial" panose="020B0604020202020204" pitchFamily="34" charset="0"/>
-              <a:buChar char="•"/>
-            </a:pPr>
-            <a:r>
-              <a:rPr lang="ru-RU" b="0" i="0" dirty="0">
-                <a:effectLst/>
-                <a:latin typeface="fkGroteskNeue"/>
-              </a:rPr>
-              <a:t>Объясняет каждое предсказание</a:t>
-            </a:r>
-          </a:p>
-          <a:p>
-            <a:pPr algn="l">
-              <a:buFont typeface="Arial" panose="020B0604020202020204" pitchFamily="34" charset="0"/>
-              <a:buChar char="•"/>
-            </a:pPr>
-            <a:r>
-              <a:rPr lang="ru-RU" b="0" i="0" dirty="0">
-                <a:effectLst/>
-                <a:latin typeface="fkGroteskNeue"/>
-              </a:rPr>
-              <a:t>Теоретически обоснована</a:t>
-            </a:r>
-          </a:p>
-          <a:p>
-            <a:pPr algn="l"/>
-            <a:r>
-              <a:rPr lang="ru-RU" b="0" i="0" dirty="0">
-                <a:effectLst/>
-                <a:latin typeface="fkGroteskNeue"/>
-              </a:rPr>
-              <a:t>Минусы:</a:t>
-            </a:r>
-          </a:p>
-          <a:p>
-            <a:pPr algn="l">
-              <a:buFont typeface="Arial" panose="020B0604020202020204" pitchFamily="34" charset="0"/>
-              <a:buChar char="•"/>
-            </a:pPr>
-            <a:r>
-              <a:rPr lang="ru-RU" b="0" i="0" dirty="0">
-                <a:effectLst/>
-                <a:latin typeface="fkGroteskNeue"/>
-              </a:rPr>
-              <a:t>Вычислительно дорого</a:t>
-            </a:r>
-          </a:p>
-          <a:p>
-            <a:pPr algn="l">
-              <a:buFont typeface="Arial" panose="020B0604020202020204" pitchFamily="34" charset="0"/>
-              <a:buChar char="•"/>
-            </a:pPr>
-            <a:r>
-              <a:rPr lang="ru-RU" b="0" i="0" dirty="0">
-                <a:effectLst/>
-                <a:latin typeface="fkGroteskNeue"/>
-              </a:rPr>
-              <a:t>Библиотека SHAP может быть медленной на больших </a:t>
-            </a:r>
-            <a:r>
-              <a:rPr lang="ru-RU" b="0" i="0" dirty="0" err="1">
-                <a:effectLst/>
-                <a:latin typeface="fkGroteskNeue"/>
-              </a:rPr>
-              <a:t>датасетах</a:t>
-            </a:r>
-            <a:endParaRPr lang="ru-RU" b="0" i="0" dirty="0">
-              <a:effectLst/>
-              <a:latin typeface="fkGroteskNeue"/>
-            </a:endParaRPr>
-          </a:p>
-          <a:p>
-            <a:pPr algn="l"/>
-            <a:r>
-              <a:rPr lang="ru-RU" b="0" i="0" dirty="0">
-                <a:effectLst/>
-                <a:latin typeface="fkGroteskNeue"/>
-              </a:rPr>
-              <a:t>Рекомендация: начните с </a:t>
-            </a:r>
-            <a:r>
-              <a:rPr lang="ru-RU" b="0" i="0" dirty="0" err="1">
-                <a:effectLst/>
-                <a:latin typeface="fkGroteskNeue"/>
-              </a:rPr>
-              <a:t>Permutation</a:t>
-            </a:r>
-            <a:r>
-              <a:rPr lang="ru-RU" b="0" i="0" dirty="0">
-                <a:effectLst/>
-                <a:latin typeface="fkGroteskNeue"/>
-              </a:rPr>
-              <a:t> </a:t>
-            </a:r>
-            <a:r>
-              <a:rPr lang="ru-RU" b="0" i="0" dirty="0" err="1">
-                <a:effectLst/>
-                <a:latin typeface="fkGroteskNeue"/>
-              </a:rPr>
-              <a:t>Importance</a:t>
-            </a:r>
-            <a:r>
-              <a:rPr lang="ru-RU" b="0" i="0" dirty="0">
-                <a:effectLst/>
-                <a:latin typeface="fkGroteskNeue"/>
-              </a:rPr>
-              <a:t>, потом если нужна детальная интерпретация — SHAP.</a:t>
-            </a:r>
           </a:p>
         </p:txBody>
       </p:sp>
@@ -4856,167 +1798,10 @@
           <a:bodyPr/>
           <a:lstStyle/>
           <a:p>
-            <a:r>
-              <a:rPr lang="ru-RU" b="0" i="0" dirty="0">
-                <a:effectLst/>
-                <a:latin typeface="fkGroteskNeue"/>
-              </a:rPr>
-              <a:t>Давайте посмотрим на реальный пример: предсказание рецидива рака молочной железы.</a:t>
-            </a:r>
-          </a:p>
-          <a:p>
-            <a:pPr algn="l"/>
-            <a:r>
-              <a:rPr lang="ru-RU" b="0" i="0" dirty="0">
-                <a:effectLst/>
-                <a:latin typeface="fkGroteskNeue"/>
-              </a:rPr>
-              <a:t>Интерпретация:</a:t>
-            </a:r>
-          </a:p>
-          <a:p>
-            <a:pPr algn="l"/>
-            <a:r>
-              <a:rPr lang="ru-RU" b="0" i="0" dirty="0">
-                <a:effectLst/>
-                <a:latin typeface="fkGroteskNeue"/>
-              </a:rPr>
-              <a:t>TP53 в 35% случаев решает, будет ли рецидив или нет. Это имеет биологический смысл: TP53 — это "страж генома", отвечает за апоптоз. Мутация TP53 → раковые клетки не умирают → рецидив.</a:t>
-            </a:r>
-          </a:p>
-          <a:p>
-            <a:pPr algn="l"/>
-            <a:r>
-              <a:rPr lang="ru-RU" b="0" i="0" dirty="0">
-                <a:effectLst/>
-                <a:latin typeface="fkGroteskNeue"/>
-              </a:rPr>
-              <a:t>BRCA1 — знаменитый ген рака молочной железы, 18% важности. Тоже логично.</a:t>
-            </a:r>
-          </a:p>
-          <a:p>
-            <a:pPr algn="l"/>
-            <a:r>
-              <a:rPr lang="ru-RU" b="0" i="0" dirty="0">
-                <a:effectLst/>
-                <a:latin typeface="fkGroteskNeue"/>
-              </a:rPr>
-              <a:t>Что дальше?</a:t>
-            </a:r>
-          </a:p>
-          <a:p>
-            <a:pPr algn="l"/>
-            <a:r>
-              <a:rPr lang="ru-RU" b="0" i="0" dirty="0">
-                <a:effectLst/>
-                <a:latin typeface="fkGroteskNeue"/>
-              </a:rPr>
-              <a:t>Когда вы видите такую таблицу:</a:t>
-            </a:r>
-          </a:p>
-          <a:p>
-            <a:pPr algn="l">
-              <a:buFont typeface="+mj-lt"/>
-              <a:buAutoNum type="arabicPeriod"/>
-            </a:pPr>
-            <a:r>
-              <a:rPr lang="ru-RU" b="0" i="0" dirty="0">
-                <a:effectLst/>
-                <a:latin typeface="fkGroteskNeue"/>
-              </a:rPr>
-              <a:t>Проверяете литературу: есть ли известная связь TP53 и рецидива?</a:t>
-            </a:r>
-          </a:p>
-          <a:p>
-            <a:pPr algn="l">
-              <a:buFont typeface="+mj-lt"/>
-              <a:buAutoNum type="arabicPeriod"/>
-            </a:pPr>
-            <a:r>
-              <a:rPr lang="ru-RU" b="0" i="0" dirty="0">
-                <a:effectLst/>
-                <a:latin typeface="fkGroteskNeue"/>
-              </a:rPr>
-              <a:t>Если да — отлично, модель уловила биологию.</a:t>
-            </a:r>
-          </a:p>
-          <a:p>
-            <a:pPr algn="l">
-              <a:buFont typeface="+mj-lt"/>
-              <a:buAutoNum type="arabicPeriod"/>
-            </a:pPr>
-            <a:r>
-              <a:rPr lang="ru-RU" b="0" i="0" dirty="0">
-                <a:effectLst/>
-                <a:latin typeface="fkGroteskNeue"/>
-              </a:rPr>
-              <a:t>Если нет — либо вы нашли новое, либо модель ошибается.</a:t>
-            </a:r>
-          </a:p>
-          <a:p>
-            <a:pPr algn="l">
-              <a:buFont typeface="+mj-lt"/>
-              <a:buAutoNum type="arabicPeriod"/>
-            </a:pPr>
-            <a:r>
-              <a:rPr lang="ru-RU" b="0" i="0" dirty="0">
-                <a:effectLst/>
-                <a:latin typeface="fkGroteskNeue"/>
-              </a:rPr>
-              <a:t>Функциональные исследования: почему TP53 важна? Экспресс-анализ, вестерны и т.д.</a:t>
-            </a:r>
-          </a:p>
-          <a:p>
-            <a:pPr algn="l"/>
-            <a:r>
-              <a:rPr lang="ru-RU" b="0" i="0" dirty="0">
-                <a:effectLst/>
-                <a:latin typeface="fkGroteskNeue"/>
-              </a:rPr>
-              <a:t>Важный момент: </a:t>
-            </a:r>
-            <a:r>
-              <a:rPr lang="ru-RU" b="0" i="0" dirty="0" err="1">
-                <a:effectLst/>
-                <a:latin typeface="fkGroteskNeue"/>
-              </a:rPr>
-              <a:t>Feature</a:t>
-            </a:r>
-            <a:r>
-              <a:rPr lang="ru-RU" b="0" i="0" dirty="0">
-                <a:effectLst/>
-                <a:latin typeface="fkGroteskNeue"/>
-              </a:rPr>
-              <a:t> </a:t>
-            </a:r>
-            <a:r>
-              <a:rPr lang="ru-RU" b="0" i="0" dirty="0" err="1">
-                <a:effectLst/>
-                <a:latin typeface="fkGroteskNeue"/>
-              </a:rPr>
-              <a:t>Importance</a:t>
-            </a:r>
-            <a:r>
-              <a:rPr lang="ru-RU" b="0" i="0" dirty="0">
-                <a:effectLst/>
-                <a:latin typeface="fkGroteskNeue"/>
-              </a:rPr>
-              <a:t> — это не p-</a:t>
-            </a:r>
-            <a:r>
-              <a:rPr lang="ru-RU" b="0" i="0" dirty="0" err="1">
-                <a:effectLst/>
-                <a:latin typeface="fkGroteskNeue"/>
-              </a:rPr>
-              <a:t>value</a:t>
-            </a:r>
-            <a:r>
-              <a:rPr lang="ru-RU" b="0" i="0" dirty="0">
-                <a:effectLst/>
-                <a:latin typeface="fkGroteskNeue"/>
-              </a:rPr>
-              <a:t>. Высокая важность не значит "статистически значимо". Это просто "часто используется моделью". Нужно отдельно проверять на независимой выборке.</a:t>
-            </a:r>
+            <a:endParaRPr lang="ru-RU" b="0" i="0" dirty="0">
+              <a:effectLst/>
+              <a:latin typeface="fkGroteskNeue"/>
+            </a:endParaRPr>
           </a:p>
         </p:txBody>
       </p:sp>
@@ -5101,320 +1886,6 @@
           <a:bodyPr/>
           <a:lstStyle/>
           <a:p>
-            <a:pPr algn="l"/>
-            <a:r>
-              <a:rPr lang="ru-RU" b="0" i="0" dirty="0">
-                <a:effectLst/>
-                <a:latin typeface="fkGroteskNeue"/>
-              </a:rPr>
-              <a:t>А теперь логистическая регрессия. Это более интерпретируемая модель.</a:t>
-            </a:r>
-          </a:p>
-          <a:p>
-            <a:pPr algn="l"/>
-            <a:r>
-              <a:rPr lang="ru-RU" b="0" i="0" dirty="0">
-                <a:effectLst/>
-                <a:latin typeface="fkGroteskNeue"/>
-              </a:rPr>
-              <a:t>Логистическая регрессия моделирует:</a:t>
-            </a:r>
-          </a:p>
-          <a:p>
-            <a:pPr algn="l"/>
-            <a:r>
-              <a:rPr lang="ru-RU" b="0" i="0" dirty="0" err="1">
-                <a:effectLst/>
-                <a:latin typeface="fkGroteskNeue"/>
-              </a:rPr>
-              <a:t>log</a:t>
-            </a:r>
-            <a:r>
-              <a:rPr lang="ru-RU" b="0" i="0" dirty="0">
-                <a:effectLst/>
-                <a:latin typeface="fkGroteskNeue"/>
-              </a:rPr>
-              <a:t>(P(болезнь) / (1 - P(болезнь))) = β₀ + β₁X₁ + β₂X₂ + ...</a:t>
-            </a:r>
-          </a:p>
-          <a:p>
-            <a:pPr algn="l"/>
-            <a:r>
-              <a:rPr lang="ru-RU" b="0" i="0" dirty="0">
-                <a:effectLst/>
-                <a:latin typeface="fkGroteskNeue"/>
-              </a:rPr>
-              <a:t>Это называется </a:t>
-            </a:r>
-            <a:r>
-              <a:rPr lang="ru-RU" b="0" i="0" dirty="0" err="1">
-                <a:effectLst/>
-                <a:latin typeface="fkGroteskNeue"/>
-              </a:rPr>
-              <a:t>log-odds</a:t>
-            </a:r>
-            <a:r>
-              <a:rPr lang="ru-RU" b="0" i="0" dirty="0">
-                <a:effectLst/>
-                <a:latin typeface="fkGroteskNeue"/>
-              </a:rPr>
-              <a:t>.</a:t>
-            </a:r>
-          </a:p>
-          <a:p>
-            <a:pPr algn="l"/>
-            <a:r>
-              <a:rPr lang="ru-RU" b="0" i="0" dirty="0">
-                <a:effectLst/>
-                <a:latin typeface="fkGroteskNeue"/>
-              </a:rPr>
-              <a:t>Интерпретация коэффициента:</a:t>
-            </a:r>
-          </a:p>
-          <a:p>
-            <a:pPr algn="l"/>
-            <a:r>
-              <a:rPr lang="ru-RU" b="0" i="0" dirty="0">
-                <a:effectLst/>
-                <a:latin typeface="fkGroteskNeue"/>
-              </a:rPr>
-              <a:t>Если β₁ = 0.5 для признака X₁, это значит:</a:t>
-            </a:r>
-          </a:p>
-          <a:p>
-            <a:pPr algn="l"/>
-            <a:r>
-              <a:rPr lang="ru-RU" b="0" i="0" dirty="0">
-                <a:effectLst/>
-                <a:latin typeface="fkGroteskNeue"/>
-              </a:rPr>
-              <a:t>При увеличении X₁ на одну единицу </a:t>
-            </a:r>
-            <a:r>
-              <a:rPr lang="ru-RU" b="0" i="0" dirty="0" err="1">
-                <a:effectLst/>
-                <a:latin typeface="fkGroteskNeue"/>
-              </a:rPr>
-              <a:t>log-odds</a:t>
-            </a:r>
-            <a:r>
-              <a:rPr lang="ru-RU" b="0" i="0" dirty="0">
-                <a:effectLst/>
-                <a:latin typeface="fkGroteskNeue"/>
-              </a:rPr>
-              <a:t> увеличивается на 0.5.</a:t>
-            </a:r>
-          </a:p>
-          <a:p>
-            <a:pPr algn="l"/>
-            <a:r>
-              <a:rPr lang="ru-RU" b="0" i="0" dirty="0">
-                <a:effectLst/>
-                <a:latin typeface="fkGroteskNeue"/>
-              </a:rPr>
-              <a:t>Или переводя в вероятность:</a:t>
-            </a:r>
-          </a:p>
-          <a:p>
-            <a:pPr algn="l"/>
-            <a:r>
-              <a:rPr lang="ru-RU" b="0" i="0" dirty="0" err="1">
-                <a:effectLst/>
-                <a:latin typeface="fkGroteskNeue"/>
-              </a:rPr>
-              <a:t>Odds</a:t>
-            </a:r>
-            <a:r>
-              <a:rPr lang="ru-RU" b="0" i="0" dirty="0">
-                <a:effectLst/>
-                <a:latin typeface="fkGroteskNeue"/>
-              </a:rPr>
-              <a:t> увеличиваются в e^0.5 ≈ 1.65 раза.</a:t>
-            </a:r>
-          </a:p>
-          <a:p>
-            <a:pPr algn="l"/>
-            <a:r>
-              <a:rPr lang="ru-RU" b="0" i="0" dirty="0">
-                <a:effectLst/>
-                <a:latin typeface="fkGroteskNeue"/>
-              </a:rPr>
-              <a:t>Пример с возрастом:</a:t>
-            </a:r>
-          </a:p>
-          <a:p>
-            <a:pPr algn="l"/>
-            <a:r>
-              <a:rPr lang="ru-RU" b="0" i="0" dirty="0">
-                <a:effectLst/>
-                <a:latin typeface="fkGroteskNeue"/>
-              </a:rPr>
-              <a:t>Пусть β_возраст = 0.05 (это реалистично).</a:t>
-            </a:r>
-          </a:p>
-          <a:p>
-            <a:pPr algn="l"/>
-            <a:r>
-              <a:rPr lang="ru-RU" b="0" i="0" dirty="0">
-                <a:effectLst/>
-                <a:latin typeface="fkGroteskNeue"/>
-              </a:rPr>
-              <a:t>Тогда каждый год жизни увеличивает </a:t>
-            </a:r>
-            <a:r>
-              <a:rPr lang="ru-RU" b="0" i="0" dirty="0" err="1">
-                <a:effectLst/>
-                <a:latin typeface="fkGroteskNeue"/>
-              </a:rPr>
-              <a:t>odds</a:t>
-            </a:r>
-            <a:r>
-              <a:rPr lang="ru-RU" b="0" i="0" dirty="0">
-                <a:effectLst/>
-                <a:latin typeface="fkGroteskNeue"/>
-              </a:rPr>
-              <a:t> развития диабета в e^0.05 ≈ 1.05 раз.</a:t>
-            </a:r>
-          </a:p>
-          <a:p>
-            <a:pPr algn="l"/>
-            <a:r>
-              <a:rPr lang="ru-RU" b="0" i="0" dirty="0">
-                <a:effectLst/>
-                <a:latin typeface="fkGroteskNeue"/>
-              </a:rPr>
-              <a:t>То есть в 65 лет (плюс 10 лет от 55-летнего):</a:t>
-            </a:r>
-          </a:p>
-          <a:p>
-            <a:pPr algn="l">
-              <a:buFont typeface="Arial" panose="020B0604020202020204" pitchFamily="34" charset="0"/>
-              <a:buChar char="•"/>
-            </a:pPr>
-            <a:r>
-              <a:rPr lang="ru-RU" b="0" i="0" dirty="0" err="1">
-                <a:effectLst/>
-                <a:latin typeface="fkGroteskNeue"/>
-              </a:rPr>
-              <a:t>Odds</a:t>
-            </a:r>
-            <a:r>
-              <a:rPr lang="ru-RU" b="0" i="0" dirty="0">
-                <a:effectLst/>
-                <a:latin typeface="fkGroteskNeue"/>
-              </a:rPr>
-              <a:t> увеличиваются в (1.05)^10 ≈ 1.63 раза.</a:t>
-            </a:r>
-          </a:p>
-          <a:p>
-            <a:pPr algn="l"/>
-            <a:r>
-              <a:rPr lang="ru-RU" b="0" i="0" dirty="0">
-                <a:effectLst/>
-                <a:latin typeface="fkGroteskNeue"/>
-              </a:rPr>
-              <a:t>Медицинская интерпретация:</a:t>
-            </a:r>
-          </a:p>
-          <a:p>
-            <a:pPr algn="l"/>
-            <a:r>
-              <a:rPr lang="ru-RU" b="0" i="0" dirty="0">
-                <a:effectLst/>
-                <a:latin typeface="fkGroteskNeue"/>
-              </a:rPr>
-              <a:t>"Каждый дополнительный год жизни увеличивает риск диабета на 5%."</a:t>
-            </a:r>
-          </a:p>
-          <a:p>
-            <a:pPr algn="l"/>
-            <a:r>
-              <a:rPr lang="ru-RU" b="0" i="0" dirty="0">
-                <a:effectLst/>
-                <a:latin typeface="fkGroteskNeue"/>
-              </a:rPr>
-              <a:t>Пример с геномными вариантами:</a:t>
-            </a:r>
-          </a:p>
-          <a:p>
-            <a:pPr algn="l"/>
-            <a:r>
-              <a:rPr lang="ru-RU" b="0" i="0" dirty="0">
-                <a:effectLst/>
-                <a:latin typeface="fkGroteskNeue"/>
-              </a:rPr>
-              <a:t>TP53 мутация: β_TP53 = 1.2</a:t>
-            </a:r>
-          </a:p>
-          <a:p>
-            <a:pPr algn="l"/>
-            <a:r>
-              <a:rPr lang="ru-RU" b="0" i="0" dirty="0">
-                <a:effectLst/>
-                <a:latin typeface="fkGroteskNeue"/>
-              </a:rPr>
-              <a:t>Наличие TP53 мутации увеличивает </a:t>
-            </a:r>
-            <a:r>
-              <a:rPr lang="ru-RU" b="0" i="0" dirty="0" err="1">
-                <a:effectLst/>
-                <a:latin typeface="fkGroteskNeue"/>
-              </a:rPr>
-              <a:t>odds</a:t>
-            </a:r>
-            <a:r>
-              <a:rPr lang="ru-RU" b="0" i="0" dirty="0">
-                <a:effectLst/>
-                <a:latin typeface="fkGroteskNeue"/>
-              </a:rPr>
-              <a:t> развития рака в e^1.2 ≈ 3.3 раза.</a:t>
-            </a:r>
-          </a:p>
-          <a:p>
-            <a:pPr algn="l"/>
-            <a:r>
-              <a:rPr lang="ru-RU" b="0" i="0" dirty="0">
-                <a:effectLst/>
-                <a:latin typeface="fkGroteskNeue"/>
-              </a:rPr>
-              <a:t>"Пациент с TP53 мутацией имеет риск рака в 3.3 раза выше, чем без мутации (при равных других условиях)."</a:t>
-            </a:r>
-          </a:p>
-          <a:p>
-            <a:pPr algn="l"/>
-            <a:r>
-              <a:rPr lang="ru-RU" b="0" i="0" dirty="0">
-                <a:effectLst/>
-                <a:latin typeface="fkGroteskNeue"/>
-              </a:rPr>
-              <a:t>Это очень мощно для клиники: врач может сказать пациенту: "У вас обнаружена TP53 мутация, это увеличивает ваш риск рака в три раза. Нужен усиленный мониторинг."</a:t>
-            </a:r>
-          </a:p>
-          <a:p>
-            <a:pPr algn="l"/>
-            <a:r>
-              <a:rPr lang="ru-RU" b="0" i="0" dirty="0">
-                <a:effectLst/>
-                <a:latin typeface="fkGroteskNeue"/>
-              </a:rPr>
-              <a:t>Важная оговорка: коэффициенты в логистической регрессии зависят от шкалы признаков! Если вы не нормализовали данные, интерпретация может быть неправильной. Всегда используйте </a:t>
-            </a:r>
-            <a:r>
-              <a:rPr lang="ru-RU" b="0" i="0" dirty="0" err="1">
-                <a:effectLst/>
-                <a:latin typeface="fkGroteskNeue"/>
-              </a:rPr>
-              <a:t>StandardScaler</a:t>
-            </a:r>
-            <a:r>
-              <a:rPr lang="ru-RU" b="0" i="0" dirty="0">
-                <a:effectLst/>
-                <a:latin typeface="fkGroteskNeue"/>
-              </a:rPr>
-              <a:t>().</a:t>
-            </a:r>
-          </a:p>
-          <a:p>
             <a:endParaRPr lang="ru-RU" sz="1200" b="0" i="0" kern="1200" dirty="0">
               <a:solidFill>
                 <a:schemeClr val="tx1"/>
@@ -5508,263 +1979,10 @@
           <a:lstStyle/>
           <a:p>
             <a:pPr algn="l"/>
-            <a:r>
-              <a:rPr lang="ru-RU" b="0" i="0" dirty="0">
-                <a:effectLst/>
-                <a:latin typeface="fkGroteskNeue"/>
-              </a:rPr>
-              <a:t>Теперь к главной проблеме. Несбалансированные данные.</a:t>
-            </a:r>
-          </a:p>
-          <a:p>
-            <a:pPr algn="l"/>
-            <a:r>
-              <a:rPr lang="ru-RU" b="0" i="0" dirty="0">
-                <a:effectLst/>
-                <a:latin typeface="fkGroteskNeue"/>
-              </a:rPr>
-              <a:t>В идеальном мире для каждого больного человека есть здоровый. Классы 50-50.</a:t>
-            </a:r>
-          </a:p>
-          <a:p>
-            <a:pPr algn="l"/>
-            <a:r>
-              <a:rPr lang="ru-RU" b="0" i="0" dirty="0">
-                <a:effectLst/>
-                <a:latin typeface="fkGroteskNeue"/>
-              </a:rPr>
-              <a:t>В реальности:</a:t>
-            </a:r>
-          </a:p>
-          <a:p>
-            <a:pPr algn="l">
-              <a:buFont typeface="Arial" panose="020B0604020202020204" pitchFamily="34" charset="0"/>
-              <a:buChar char="•"/>
-            </a:pPr>
-            <a:r>
-              <a:rPr lang="ru-RU" b="0" i="0" dirty="0">
-                <a:effectLst/>
-                <a:latin typeface="fkGroteskNeue"/>
-              </a:rPr>
-              <a:t>Редкие болезни: 99% здоровых, 1% больных</a:t>
-            </a:r>
-          </a:p>
-          <a:p>
-            <a:pPr algn="l">
-              <a:buFont typeface="Arial" panose="020B0604020202020204" pitchFamily="34" charset="0"/>
-              <a:buChar char="•"/>
-            </a:pPr>
-            <a:r>
-              <a:rPr lang="ru-RU" b="0" i="0" dirty="0">
-                <a:effectLst/>
-                <a:latin typeface="fkGroteskNeue"/>
-              </a:rPr>
-              <a:t>Побочные эффекты лекарств: 98% без </a:t>
-            </a:r>
-            <a:r>
-              <a:rPr lang="ru-RU" b="0" i="0" dirty="0" err="1">
-                <a:effectLst/>
-                <a:latin typeface="fkGroteskNeue"/>
-              </a:rPr>
-              <a:t>побочек</a:t>
-            </a:r>
-            <a:r>
-              <a:rPr lang="ru-RU" b="0" i="0" dirty="0">
-                <a:effectLst/>
-                <a:latin typeface="fkGroteskNeue"/>
-              </a:rPr>
-              <a:t>, 2% с </a:t>
-            </a:r>
-            <a:r>
-              <a:rPr lang="ru-RU" b="0" i="0" dirty="0" err="1">
-                <a:effectLst/>
-                <a:latin typeface="fkGroteskNeue"/>
-              </a:rPr>
-              <a:t>побочками</a:t>
-            </a:r>
             <a:endParaRPr lang="ru-RU" b="0" i="0" dirty="0">
               <a:effectLst/>
               <a:latin typeface="fkGroteskNeue"/>
             </a:endParaRPr>
-          </a:p>
-          <a:p>
-            <a:pPr algn="l">
-              <a:buFont typeface="Arial" panose="020B0604020202020204" pitchFamily="34" charset="0"/>
-              <a:buChar char="•"/>
-            </a:pPr>
-            <a:r>
-              <a:rPr lang="ru-RU" b="0" i="0" dirty="0">
-                <a:effectLst/>
-                <a:latin typeface="fkGroteskNeue"/>
-              </a:rPr>
-              <a:t>Редкие осложнения: 99.5% без осложнений</a:t>
-            </a:r>
-          </a:p>
-          <a:p>
-            <a:pPr algn="l"/>
-            <a:r>
-              <a:rPr lang="ru-RU" b="0" i="0" dirty="0">
-                <a:effectLst/>
-                <a:latin typeface="fkGroteskNeue"/>
-              </a:rPr>
-              <a:t>Что случается, когда у вас 990 здоровых и 10 больных?</a:t>
-            </a:r>
-          </a:p>
-          <a:p>
-            <a:pPr algn="l"/>
-            <a:r>
-              <a:rPr lang="ru-RU" b="0" i="0" dirty="0">
-                <a:effectLst/>
-                <a:latin typeface="fkGroteskNeue"/>
-              </a:rPr>
-              <a:t>Наивная модель: "Всегда говори 'здоров'."</a:t>
-            </a:r>
-          </a:p>
-          <a:p>
-            <a:pPr algn="l"/>
-            <a:r>
-              <a:rPr lang="ru-RU" b="0" i="0" dirty="0" err="1">
-                <a:effectLst/>
-                <a:latin typeface="fkGroteskNeue"/>
-              </a:rPr>
-              <a:t>Accuracy</a:t>
-            </a:r>
-            <a:r>
-              <a:rPr lang="ru-RU" b="0" i="0" dirty="0">
-                <a:effectLst/>
-                <a:latin typeface="fkGroteskNeue"/>
-              </a:rPr>
-              <a:t>: 990/1000 = 99%</a:t>
-            </a:r>
-          </a:p>
-          <a:p>
-            <a:pPr algn="l"/>
-            <a:r>
-              <a:rPr lang="ru-RU" b="0" i="0" dirty="0">
-                <a:effectLst/>
-                <a:latin typeface="fkGroteskNeue"/>
-              </a:rPr>
-              <a:t>Но:</a:t>
-            </a:r>
-          </a:p>
-          <a:p>
-            <a:pPr algn="l">
-              <a:buFont typeface="Arial" panose="020B0604020202020204" pitchFamily="34" charset="0"/>
-              <a:buChar char="•"/>
-            </a:pPr>
-            <a:r>
-              <a:rPr lang="ru-RU" b="0" i="0" dirty="0" err="1">
-                <a:effectLst/>
-                <a:latin typeface="fkGroteskNeue"/>
-              </a:rPr>
-              <a:t>Recall</a:t>
-            </a:r>
-            <a:r>
-              <a:rPr lang="ru-RU" b="0" i="0" dirty="0">
-                <a:effectLst/>
-                <a:latin typeface="fkGroteskNeue"/>
-              </a:rPr>
-              <a:t>: 0/10 = 0% (не нашли ни одного больного!)</a:t>
-            </a:r>
-          </a:p>
-          <a:p>
-            <a:pPr algn="l">
-              <a:buFont typeface="Arial" panose="020B0604020202020204" pitchFamily="34" charset="0"/>
-              <a:buChar char="•"/>
-            </a:pPr>
-            <a:r>
-              <a:rPr lang="ru-RU" b="0" i="0" dirty="0">
-                <a:effectLst/>
-                <a:latin typeface="fkGroteskNeue"/>
-              </a:rPr>
-              <a:t>AUC-ROC: 0.5 (хуже, чем случайность после калибровки)</a:t>
-            </a:r>
-          </a:p>
-          <a:p>
-            <a:pPr algn="l"/>
-            <a:r>
-              <a:rPr lang="ru-RU" b="0" i="0" dirty="0">
-                <a:effectLst/>
-                <a:latin typeface="fkGroteskNeue"/>
-              </a:rPr>
-              <a:t>Это совершенно бесполезная модель, но по </a:t>
-            </a:r>
-            <a:r>
-              <a:rPr lang="ru-RU" b="0" i="0" dirty="0" err="1">
-                <a:effectLst/>
-                <a:latin typeface="fkGroteskNeue"/>
-              </a:rPr>
-              <a:t>accuracy</a:t>
-            </a:r>
-            <a:r>
-              <a:rPr lang="ru-RU" b="0" i="0" dirty="0">
-                <a:effectLst/>
-                <a:latin typeface="fkGroteskNeue"/>
-              </a:rPr>
-              <a:t> кажется отличной!</a:t>
-            </a:r>
-          </a:p>
-          <a:p>
-            <a:pPr algn="l"/>
-            <a:r>
-              <a:rPr lang="ru-RU" b="0" i="0" dirty="0">
-                <a:effectLst/>
-                <a:latin typeface="fkGroteskNeue"/>
-              </a:rPr>
-              <a:t>Почему так происходит?</a:t>
-            </a:r>
-          </a:p>
-          <a:p>
-            <a:pPr algn="l"/>
-            <a:r>
-              <a:rPr lang="ru-RU" b="0" i="0" dirty="0">
-                <a:effectLst/>
-                <a:latin typeface="fkGroteskNeue"/>
-              </a:rPr>
-              <a:t>Машинное обучение — это оптимизация. Модель оптимизирует </a:t>
-            </a:r>
-            <a:r>
-              <a:rPr lang="ru-RU" b="0" i="0" dirty="0" err="1">
-                <a:effectLst/>
-                <a:latin typeface="fkGroteskNeue"/>
-              </a:rPr>
-              <a:t>loss</a:t>
-            </a:r>
-            <a:r>
-              <a:rPr lang="ru-RU" b="0" i="0" dirty="0">
-                <a:effectLst/>
-                <a:latin typeface="fkGroteskNeue"/>
-              </a:rPr>
-              <a:t> </a:t>
-            </a:r>
-            <a:r>
-              <a:rPr lang="ru-RU" b="0" i="0" dirty="0" err="1">
-                <a:effectLst/>
-                <a:latin typeface="fkGroteskNeue"/>
-              </a:rPr>
-              <a:t>function</a:t>
-            </a:r>
-            <a:r>
-              <a:rPr lang="ru-RU" b="0" i="0" dirty="0">
-                <a:effectLst/>
-                <a:latin typeface="fkGroteskNeue"/>
-              </a:rPr>
-              <a:t>. Если задача — минимизировать ошибки классификации (то есть </a:t>
-            </a:r>
-            <a:r>
-              <a:rPr lang="ru-RU" b="0" i="0" dirty="0" err="1">
-                <a:effectLst/>
-                <a:latin typeface="fkGroteskNeue"/>
-              </a:rPr>
-              <a:t>accuracy</a:t>
-            </a:r>
-            <a:r>
-              <a:rPr lang="ru-RU" b="0" i="0" dirty="0">
-                <a:effectLst/>
-                <a:latin typeface="fkGroteskNeue"/>
-              </a:rPr>
-              <a:t>), модель найдёт самый лёгкий путь: просто всегда говори большинство.</a:t>
-            </a:r>
           </a:p>
         </p:txBody>
       </p:sp>
@@ -5849,218 +2067,6 @@
           <a:bodyPr/>
           <a:lstStyle/>
           <a:p>
-            <a:pPr algn="l"/>
-            <a:r>
-              <a:rPr lang="ru-RU" b="0" i="0" dirty="0">
-                <a:effectLst/>
-                <a:latin typeface="fkGroteskNeue"/>
-              </a:rPr>
-              <a:t>Решение 1: Правильная метрика</a:t>
-            </a:r>
-          </a:p>
-          <a:p>
-            <a:pPr algn="l"/>
-            <a:r>
-              <a:rPr lang="ru-RU" b="0" i="0" dirty="0">
-                <a:effectLst/>
-                <a:latin typeface="fkGroteskNeue"/>
-              </a:rPr>
-              <a:t>Как мы видели на лекции 1, никогда не используйте </a:t>
-            </a:r>
-            <a:r>
-              <a:rPr lang="ru-RU" b="0" i="0" dirty="0" err="1">
-                <a:effectLst/>
-                <a:latin typeface="fkGroteskNeue"/>
-              </a:rPr>
-              <a:t>Accuracy</a:t>
-            </a:r>
-            <a:r>
-              <a:rPr lang="ru-RU" b="0" i="0" dirty="0">
-                <a:effectLst/>
-                <a:latin typeface="fkGroteskNeue"/>
-              </a:rPr>
-              <a:t> для несбалансированных данных.</a:t>
-            </a:r>
-          </a:p>
-          <a:p>
-            <a:pPr algn="l"/>
-            <a:r>
-              <a:rPr lang="ru-RU" b="0" i="0" dirty="0">
-                <a:effectLst/>
-                <a:latin typeface="fkGroteskNeue"/>
-              </a:rPr>
-              <a:t>AUC-ROC — вот правильная метрика.</a:t>
-            </a:r>
-          </a:p>
-          <a:p>
-            <a:pPr algn="l"/>
-            <a:r>
-              <a:rPr lang="ru-RU" b="0" i="0" dirty="0">
-                <a:effectLst/>
-                <a:latin typeface="fkGroteskNeue"/>
-              </a:rPr>
-              <a:t>ROC-</a:t>
-            </a:r>
-            <a:r>
-              <a:rPr lang="ru-RU" b="0" i="0" dirty="0" err="1">
-                <a:effectLst/>
-                <a:latin typeface="fkGroteskNeue"/>
-              </a:rPr>
-              <a:t>curve</a:t>
-            </a:r>
-            <a:r>
-              <a:rPr lang="ru-RU" b="0" i="0" dirty="0">
-                <a:effectLst/>
-                <a:latin typeface="fkGroteskNeue"/>
-              </a:rPr>
-              <a:t> инвариантна к классовому дисбалансу. Она показывает: какой </a:t>
-            </a:r>
-            <a:r>
-              <a:rPr lang="ru-RU" b="0" i="0" dirty="0" err="1">
-                <a:effectLst/>
-                <a:latin typeface="fkGroteskNeue"/>
-              </a:rPr>
-              <a:t>trade-off</a:t>
-            </a:r>
-            <a:r>
-              <a:rPr lang="ru-RU" b="0" i="0" dirty="0">
-                <a:effectLst/>
-                <a:latin typeface="fkGroteskNeue"/>
-              </a:rPr>
-              <a:t> между нахождением больных (TPR) и ложными тревогами (FPR)?</a:t>
-            </a:r>
-          </a:p>
-          <a:p>
-            <a:pPr algn="l"/>
-            <a:r>
-              <a:rPr lang="ru-RU" b="0" i="0" dirty="0">
-                <a:effectLst/>
-                <a:latin typeface="fkGroteskNeue"/>
-              </a:rPr>
-              <a:t>Даже если у вас 99% здоровых, AUC-ROC будет объективной.</a:t>
-            </a:r>
-          </a:p>
-          <a:p>
-            <a:pPr algn="l"/>
-            <a:r>
-              <a:rPr lang="ru-RU" b="0" i="0" dirty="0">
-                <a:effectLst/>
-                <a:latin typeface="fkGroteskNeue"/>
-              </a:rPr>
-              <a:t>F1-score — второй вариант.</a:t>
-            </a:r>
-          </a:p>
-          <a:p>
-            <a:pPr algn="l"/>
-            <a:r>
-              <a:rPr lang="ru-RU" b="0" i="0" dirty="0">
-                <a:effectLst/>
-                <a:latin typeface="fkGroteskNeue"/>
-              </a:rPr>
-              <a:t>F1 = 2 * (Precision * </a:t>
-            </a:r>
-            <a:r>
-              <a:rPr lang="ru-RU" b="0" i="0" dirty="0" err="1">
-                <a:effectLst/>
-                <a:latin typeface="fkGroteskNeue"/>
-              </a:rPr>
-              <a:t>Recall</a:t>
-            </a:r>
-            <a:r>
-              <a:rPr lang="ru-RU" b="0" i="0" dirty="0">
-                <a:effectLst/>
-                <a:latin typeface="fkGroteskNeue"/>
-              </a:rPr>
-              <a:t>) / (Precision + </a:t>
-            </a:r>
-            <a:r>
-              <a:rPr lang="ru-RU" b="0" i="0" dirty="0" err="1">
-                <a:effectLst/>
-                <a:latin typeface="fkGroteskNeue"/>
-              </a:rPr>
-              <a:t>Recall</a:t>
-            </a:r>
-            <a:r>
-              <a:rPr lang="ru-RU" b="0" i="0" dirty="0">
-                <a:effectLst/>
-                <a:latin typeface="fkGroteskNeue"/>
-              </a:rPr>
-              <a:t>)</a:t>
-            </a:r>
-          </a:p>
-          <a:p>
-            <a:pPr algn="l"/>
-            <a:r>
-              <a:rPr lang="ru-RU" b="0" i="0" dirty="0">
-                <a:effectLst/>
-                <a:latin typeface="fkGroteskNeue"/>
-              </a:rPr>
-              <a:t>Для несбалансированных данных используйте F1-macro (усредняем F1 по классам) или F1-weighted (взвешиваем по количеству примеров).</a:t>
-            </a:r>
-          </a:p>
-          <a:p>
-            <a:pPr algn="l"/>
-            <a:r>
-              <a:rPr lang="ru-RU" b="0" i="0" dirty="0">
-                <a:effectLst/>
-                <a:latin typeface="fkGroteskNeue"/>
-              </a:rPr>
-              <a:t>Precision-</a:t>
-            </a:r>
-            <a:r>
-              <a:rPr lang="ru-RU" b="0" i="0" dirty="0" err="1">
-                <a:effectLst/>
-                <a:latin typeface="fkGroteskNeue"/>
-              </a:rPr>
-              <a:t>Recall</a:t>
-            </a:r>
-            <a:r>
-              <a:rPr lang="ru-RU" b="0" i="0" dirty="0">
-                <a:effectLst/>
-                <a:latin typeface="fkGroteskNeue"/>
-              </a:rPr>
-              <a:t> </a:t>
-            </a:r>
-            <a:r>
-              <a:rPr lang="ru-RU" b="0" i="0" dirty="0" err="1">
-                <a:effectLst/>
-                <a:latin typeface="fkGroteskNeue"/>
-              </a:rPr>
-              <a:t>curve</a:t>
-            </a:r>
-            <a:r>
-              <a:rPr lang="ru-RU" b="0" i="0" dirty="0">
-                <a:effectLst/>
-                <a:latin typeface="fkGroteskNeue"/>
-              </a:rPr>
-              <a:t> — третий вариант, особенно хорош для очень редких классов.</a:t>
-            </a:r>
-          </a:p>
-          <a:p>
-            <a:pPr algn="l"/>
-            <a:r>
-              <a:rPr lang="ru-RU" b="0" i="0" dirty="0">
-                <a:effectLst/>
-                <a:latin typeface="fkGroteskNeue"/>
-              </a:rPr>
-              <a:t>Практически: сначала смотрим на AUC-ROC, потом на </a:t>
-            </a:r>
-            <a:r>
-              <a:rPr lang="ru-RU" b="0" i="0" dirty="0" err="1">
-                <a:effectLst/>
-                <a:latin typeface="fkGroteskNeue"/>
-              </a:rPr>
-              <a:t>Recall</a:t>
-            </a:r>
-            <a:r>
-              <a:rPr lang="ru-RU" b="0" i="0" dirty="0">
-                <a:effectLst/>
-                <a:latin typeface="fkGroteskNeue"/>
-              </a:rPr>
-              <a:t> (чтобы не пропустить редкий класс), потом на Precision (чтобы не было слишком много ложных тревог).</a:t>
-            </a:r>
-          </a:p>
-          <a:p>
             <a:endParaRPr lang="ru-RU" sz="1200" b="0" i="0" kern="1200" dirty="0">
               <a:solidFill>
                 <a:schemeClr val="tx1"/>
@@ -6153,418 +2159,6 @@
           <a:bodyPr/>
           <a:lstStyle/>
           <a:p>
-            <a:pPr algn="l"/>
-            <a:r>
-              <a:rPr lang="ru-RU" b="0" i="0" dirty="0">
-                <a:effectLst/>
-                <a:latin typeface="fkGroteskNeue"/>
-              </a:rPr>
-              <a:t>Решение 2: </a:t>
-            </a:r>
-            <a:r>
-              <a:rPr lang="ru-RU" b="0" i="0" dirty="0" err="1">
-                <a:effectLst/>
-                <a:latin typeface="fkGroteskNeue"/>
-              </a:rPr>
-              <a:t>Перебаланс</a:t>
-            </a:r>
-            <a:r>
-              <a:rPr lang="ru-RU" b="0" i="0" dirty="0">
-                <a:effectLst/>
-                <a:latin typeface="fkGroteskNeue"/>
-              </a:rPr>
-              <a:t> данных</a:t>
-            </a:r>
-          </a:p>
-          <a:p>
-            <a:pPr algn="l"/>
-            <a:r>
-              <a:rPr lang="ru-RU" b="0" i="0" dirty="0">
-                <a:effectLst/>
-                <a:latin typeface="fkGroteskNeue"/>
-              </a:rPr>
-              <a:t>Если метрика не решит, нужно менять сами данные.</a:t>
-            </a:r>
-          </a:p>
-          <a:p>
-            <a:pPr algn="l"/>
-            <a:r>
-              <a:rPr lang="ru-RU" b="0" i="0" dirty="0" err="1">
-                <a:effectLst/>
-                <a:latin typeface="fkGroteskNeue"/>
-              </a:rPr>
-              <a:t>Over-sampling</a:t>
-            </a:r>
-            <a:r>
-              <a:rPr lang="ru-RU" b="0" i="0" dirty="0">
-                <a:effectLst/>
-                <a:latin typeface="fkGroteskNeue"/>
-              </a:rPr>
-              <a:t> меньшинства:</a:t>
-            </a:r>
-          </a:p>
-          <a:p>
-            <a:pPr algn="l"/>
-            <a:r>
-              <a:rPr lang="ru-RU" b="0" i="0" dirty="0">
-                <a:effectLst/>
-                <a:latin typeface="fkGroteskNeue"/>
-              </a:rPr>
-              <a:t>Берём 10 больных пациентов и дублируем их несколько раз:</a:t>
-            </a:r>
-          </a:p>
-          <a:p>
-            <a:pPr algn="l">
-              <a:buFont typeface="Arial" panose="020B0604020202020204" pitchFamily="34" charset="0"/>
-              <a:buChar char="•"/>
-            </a:pPr>
-            <a:r>
-              <a:rPr lang="ru-RU" b="0" i="0" dirty="0">
-                <a:effectLst/>
-                <a:latin typeface="fkGroteskNeue"/>
-              </a:rPr>
-              <a:t>Оригинальные 10 +</a:t>
-            </a:r>
-          </a:p>
-          <a:p>
-            <a:pPr algn="l">
-              <a:buFont typeface="Arial" panose="020B0604020202020204" pitchFamily="34" charset="0"/>
-              <a:buChar char="•"/>
-            </a:pPr>
-            <a:r>
-              <a:rPr lang="ru-RU" b="0" i="0" dirty="0">
-                <a:effectLst/>
-                <a:latin typeface="fkGroteskNeue"/>
-              </a:rPr>
-              <a:t>Дубли 10 +</a:t>
-            </a:r>
-          </a:p>
-          <a:p>
-            <a:pPr algn="l">
-              <a:buFont typeface="Arial" panose="020B0604020202020204" pitchFamily="34" charset="0"/>
-              <a:buChar char="•"/>
-            </a:pPr>
-            <a:r>
-              <a:rPr lang="ru-RU" b="0" i="0" dirty="0">
-                <a:effectLst/>
-                <a:latin typeface="fkGroteskNeue"/>
-              </a:rPr>
-              <a:t>Ещё дубли 10</a:t>
-            </a:r>
-          </a:p>
-          <a:p>
-            <a:pPr algn="l"/>
-            <a:r>
-              <a:rPr lang="ru-RU" b="0" i="0" dirty="0">
-                <a:effectLst/>
-                <a:latin typeface="fkGroteskNeue"/>
-              </a:rPr>
-              <a:t>Теперь 30 больных вместо 10. Классы ближе к балансу.</a:t>
-            </a:r>
-          </a:p>
-          <a:p>
-            <a:pPr algn="l"/>
-            <a:r>
-              <a:rPr lang="ru-RU" b="0" i="0" dirty="0">
-                <a:effectLst/>
-                <a:latin typeface="fkGroteskNeue"/>
-              </a:rPr>
-              <a:t>Проблема: модель может "запомнить" дубли. Это переобучение.</a:t>
-            </a:r>
-          </a:p>
-          <a:p>
-            <a:pPr algn="l"/>
-            <a:r>
-              <a:rPr lang="ru-RU" b="0" i="0" dirty="0">
-                <a:effectLst/>
-                <a:latin typeface="fkGroteskNeue"/>
-              </a:rPr>
-              <a:t>SMOTE (</a:t>
-            </a:r>
-            <a:r>
-              <a:rPr lang="ru-RU" b="0" i="0" dirty="0" err="1">
-                <a:effectLst/>
-                <a:latin typeface="fkGroteskNeue"/>
-              </a:rPr>
-              <a:t>Synthetic</a:t>
-            </a:r>
-            <a:r>
-              <a:rPr lang="ru-RU" b="0" i="0" dirty="0">
-                <a:effectLst/>
-                <a:latin typeface="fkGroteskNeue"/>
-              </a:rPr>
-              <a:t> </a:t>
-            </a:r>
-            <a:r>
-              <a:rPr lang="ru-RU" b="0" i="0" dirty="0" err="1">
-                <a:effectLst/>
-                <a:latin typeface="fkGroteskNeue"/>
-              </a:rPr>
-              <a:t>Minority</a:t>
-            </a:r>
-            <a:r>
-              <a:rPr lang="ru-RU" b="0" i="0" dirty="0">
-                <a:effectLst/>
-                <a:latin typeface="fkGroteskNeue"/>
-              </a:rPr>
-              <a:t> </a:t>
-            </a:r>
-            <a:r>
-              <a:rPr lang="ru-RU" b="0" i="0" dirty="0" err="1">
-                <a:effectLst/>
-                <a:latin typeface="fkGroteskNeue"/>
-              </a:rPr>
-              <a:t>Over-sampling</a:t>
-            </a:r>
-            <a:r>
-              <a:rPr lang="ru-RU" b="0" i="0" dirty="0">
-                <a:effectLst/>
-                <a:latin typeface="fkGroteskNeue"/>
-              </a:rPr>
-              <a:t> </a:t>
-            </a:r>
-            <a:r>
-              <a:rPr lang="ru-RU" b="0" i="0" dirty="0" err="1">
-                <a:effectLst/>
-                <a:latin typeface="fkGroteskNeue"/>
-              </a:rPr>
-              <a:t>Technique</a:t>
-            </a:r>
-            <a:r>
-              <a:rPr lang="ru-RU" b="0" i="0" dirty="0">
-                <a:effectLst/>
-                <a:latin typeface="fkGroteskNeue"/>
-              </a:rPr>
-              <a:t>):</a:t>
-            </a:r>
-          </a:p>
-          <a:p>
-            <a:pPr algn="l"/>
-            <a:r>
-              <a:rPr lang="ru-RU" b="0" i="0" dirty="0">
-                <a:effectLst/>
-                <a:latin typeface="fkGroteskNeue"/>
-              </a:rPr>
-              <a:t>Вместо дублирования генерируем синтетические примеры.</a:t>
-            </a:r>
-          </a:p>
-          <a:p>
-            <a:pPr algn="l"/>
-            <a:r>
-              <a:rPr lang="ru-RU" b="0" i="0" dirty="0">
-                <a:effectLst/>
-                <a:latin typeface="fkGroteskNeue"/>
-              </a:rPr>
-              <a:t>Как? Берём случайно два примера из редкого класса, интерполируем между ними.</a:t>
-            </a:r>
-          </a:p>
-          <a:p>
-            <a:pPr algn="l"/>
-            <a:r>
-              <a:rPr lang="ru-RU" b="0" i="0" dirty="0">
-                <a:effectLst/>
-                <a:latin typeface="fkGroteskNeue"/>
-              </a:rPr>
-              <a:t>Пример: пациент A с TP53, без BRCA1. Пациент B с BRCA1, с TP53.</a:t>
-            </a:r>
-          </a:p>
-          <a:p>
-            <a:pPr algn="l"/>
-            <a:r>
-              <a:rPr lang="ru-RU" b="0" i="0" dirty="0">
-                <a:effectLst/>
-                <a:latin typeface="fkGroteskNeue"/>
-              </a:rPr>
-              <a:t>Синтетический пациент: что-то между A и B в генном пространстве.</a:t>
-            </a:r>
-          </a:p>
-          <a:p>
-            <a:pPr algn="l"/>
-            <a:r>
-              <a:rPr lang="ru-RU" b="0" i="0" dirty="0">
-                <a:effectLst/>
-                <a:latin typeface="fkGroteskNeue"/>
-              </a:rPr>
-              <a:t>Это лучше, чем просто дублирование, потому что модель учится на новых примерах, а не на дублях.</a:t>
-            </a:r>
-          </a:p>
-          <a:p>
-            <a:pPr algn="l"/>
-            <a:r>
-              <a:rPr lang="ru-RU" b="0" i="0" dirty="0" err="1">
-                <a:effectLst/>
-                <a:latin typeface="fkGroteskNeue"/>
-              </a:rPr>
-              <a:t>Under-sampling</a:t>
-            </a:r>
-            <a:r>
-              <a:rPr lang="ru-RU" b="0" i="0" dirty="0">
-                <a:effectLst/>
-                <a:latin typeface="fkGroteskNeue"/>
-              </a:rPr>
-              <a:t> большинства:</a:t>
-            </a:r>
-          </a:p>
-          <a:p>
-            <a:pPr algn="l"/>
-            <a:r>
-              <a:rPr lang="ru-RU" b="0" i="0" dirty="0">
-                <a:effectLst/>
-                <a:latin typeface="fkGroteskNeue"/>
-              </a:rPr>
-              <a:t>Удаляем примеры большинства, чтобы сбалансировать.</a:t>
-            </a:r>
-          </a:p>
-          <a:p>
-            <a:pPr algn="l"/>
-            <a:r>
-              <a:rPr lang="ru-RU" b="0" i="0" dirty="0">
-                <a:effectLst/>
-                <a:latin typeface="fkGroteskNeue"/>
-              </a:rPr>
-              <a:t>Если 990 здоровых, берём рандомно 50 (или 20-30, чтобы примерно в балансе).</a:t>
-            </a:r>
-          </a:p>
-          <a:p>
-            <a:pPr algn="l"/>
-            <a:r>
-              <a:rPr lang="ru-RU" b="0" i="0" dirty="0">
-                <a:effectLst/>
-                <a:latin typeface="fkGroteskNeue"/>
-              </a:rPr>
-              <a:t>Проблема: теряем информацию. Если у вас есть паттерны в здоровых, которые встречаются редко, под-выборка их удалит.</a:t>
-            </a:r>
-          </a:p>
-          <a:p>
-            <a:pPr algn="l"/>
-            <a:r>
-              <a:rPr lang="ru-RU" b="0" i="0" dirty="0">
-                <a:effectLst/>
-                <a:latin typeface="fkGroteskNeue"/>
-              </a:rPr>
-              <a:t>Как выбрать?</a:t>
-            </a:r>
-          </a:p>
-          <a:p>
-            <a:pPr algn="l">
-              <a:buFont typeface="Arial" panose="020B0604020202020204" pitchFamily="34" charset="0"/>
-              <a:buChar char="•"/>
-            </a:pPr>
-            <a:r>
-              <a:rPr lang="ru-RU" b="0" i="0" dirty="0">
-                <a:effectLst/>
-                <a:latin typeface="fkGroteskNeue"/>
-              </a:rPr>
-              <a:t>Большой </a:t>
-            </a:r>
-            <a:r>
-              <a:rPr lang="ru-RU" b="0" i="0" dirty="0" err="1">
-                <a:effectLst/>
-                <a:latin typeface="fkGroteskNeue"/>
-              </a:rPr>
-              <a:t>датасет</a:t>
-            </a:r>
-            <a:r>
-              <a:rPr lang="ru-RU" b="0" i="0" dirty="0">
-                <a:effectLst/>
-                <a:latin typeface="fkGroteskNeue"/>
-              </a:rPr>
-              <a:t> (&gt;10,000) → </a:t>
-            </a:r>
-            <a:r>
-              <a:rPr lang="ru-RU" b="0" i="0" dirty="0" err="1">
-                <a:effectLst/>
-                <a:latin typeface="fkGroteskNeue"/>
-              </a:rPr>
-              <a:t>over-sampling</a:t>
-            </a:r>
-            <a:r>
-              <a:rPr lang="ru-RU" b="0" i="0" dirty="0">
-                <a:effectLst/>
-                <a:latin typeface="fkGroteskNeue"/>
-              </a:rPr>
-              <a:t> меньшинства или SMOTE</a:t>
-            </a:r>
-          </a:p>
-          <a:p>
-            <a:pPr algn="l">
-              <a:buFont typeface="Arial" panose="020B0604020202020204" pitchFamily="34" charset="0"/>
-              <a:buChar char="•"/>
-            </a:pPr>
-            <a:r>
-              <a:rPr lang="ru-RU" b="0" i="0" dirty="0">
-                <a:effectLst/>
-                <a:latin typeface="fkGroteskNeue"/>
-              </a:rPr>
-              <a:t>Маленький </a:t>
-            </a:r>
-            <a:r>
-              <a:rPr lang="ru-RU" b="0" i="0" dirty="0" err="1">
-                <a:effectLst/>
-                <a:latin typeface="fkGroteskNeue"/>
-              </a:rPr>
-              <a:t>датасет</a:t>
-            </a:r>
-            <a:r>
-              <a:rPr lang="ru-RU" b="0" i="0" dirty="0">
-                <a:effectLst/>
-                <a:latin typeface="fkGroteskNeue"/>
-              </a:rPr>
-              <a:t> (&lt;1,000) → SMOTE + небольшое </a:t>
-            </a:r>
-            <a:r>
-              <a:rPr lang="ru-RU" b="0" i="0" dirty="0" err="1">
-                <a:effectLst/>
-                <a:latin typeface="fkGroteskNeue"/>
-              </a:rPr>
-              <a:t>under-sampling</a:t>
-            </a:r>
-            <a:r>
-              <a:rPr lang="ru-RU" b="0" i="0" dirty="0">
-                <a:effectLst/>
-                <a:latin typeface="fkGroteskNeue"/>
-              </a:rPr>
-              <a:t> большинства</a:t>
-            </a:r>
-          </a:p>
-          <a:p>
-            <a:pPr algn="l">
-              <a:buFont typeface="Arial" panose="020B0604020202020204" pitchFamily="34" charset="0"/>
-              <a:buChar char="•"/>
-            </a:pPr>
-            <a:r>
-              <a:rPr lang="ru-RU" b="0" i="0" dirty="0">
-                <a:effectLst/>
-                <a:latin typeface="fkGroteskNeue"/>
-              </a:rPr>
-              <a:t>Очень маленький (&lt;100) → может, вообще не разделять, использовать кросс-валидацию</a:t>
-            </a:r>
-          </a:p>
-          <a:p>
-            <a:pPr algn="l"/>
-            <a:r>
-              <a:rPr lang="ru-RU" b="0" i="0" dirty="0">
-                <a:effectLst/>
-                <a:latin typeface="fkGroteskNeue"/>
-              </a:rPr>
-              <a:t>Важное: SMOTE делается только на </a:t>
-            </a:r>
-            <a:r>
-              <a:rPr lang="ru-RU" b="0" i="0" dirty="0" err="1">
-                <a:effectLst/>
-                <a:latin typeface="fkGroteskNeue"/>
-              </a:rPr>
-              <a:t>training</a:t>
-            </a:r>
-            <a:r>
-              <a:rPr lang="ru-RU" b="0" i="0" dirty="0">
-                <a:effectLst/>
-                <a:latin typeface="fkGroteskNeue"/>
-              </a:rPr>
-              <a:t> данных. Test набор остаётся нетронутым (чтобы был честный тест).</a:t>
-            </a:r>
-          </a:p>
-          <a:p>
             <a:endParaRPr lang="ru-RU" sz="1200" b="0" i="0" kern="1200" dirty="0">
               <a:solidFill>
                 <a:schemeClr val="tx1"/>
@@ -6657,177 +2251,6 @@
           <a:bodyPr/>
           <a:lstStyle/>
           <a:p>
-            <a:r>
-              <a:rPr lang="ru-RU" b="0" i="0" dirty="0">
-                <a:effectLst/>
-                <a:latin typeface="fkGroteskNeue"/>
-              </a:rPr>
-              <a:t>Многие алгоритмы поддерживают </a:t>
-            </a:r>
-            <a:r>
-              <a:rPr lang="ru-RU" dirty="0" err="1"/>
-              <a:t>class_weight</a:t>
-            </a:r>
-            <a:r>
-              <a:rPr lang="ru-RU" b="0" i="0" dirty="0">
-                <a:effectLst/>
-                <a:latin typeface="fkGroteskNeue"/>
-              </a:rPr>
-              <a:t> параметр.</a:t>
-            </a:r>
-          </a:p>
-          <a:p>
-            <a:pPr algn="l"/>
-            <a:r>
-              <a:rPr lang="ru-RU" b="0" i="0" dirty="0">
-                <a:effectLst/>
-                <a:latin typeface="fkGroteskNeue"/>
-              </a:rPr>
-              <a:t>Как это работает?</a:t>
-            </a:r>
-          </a:p>
-          <a:p>
-            <a:pPr algn="l"/>
-            <a:r>
-              <a:rPr lang="ru-RU" b="0" i="0" dirty="0">
-                <a:effectLst/>
-                <a:latin typeface="fkGroteskNeue"/>
-              </a:rPr>
-              <a:t>При обучении модель получает штраф за ошибку на редком классе. Если она ошибается на редком классе, </a:t>
-            </a:r>
-            <a:r>
-              <a:rPr lang="ru-RU" b="0" i="0" dirty="0" err="1">
-                <a:effectLst/>
-                <a:latin typeface="fkGroteskNeue"/>
-              </a:rPr>
-              <a:t>loss</a:t>
-            </a:r>
-            <a:r>
-              <a:rPr lang="ru-RU" b="0" i="0" dirty="0">
-                <a:effectLst/>
-                <a:latin typeface="fkGroteskNeue"/>
-              </a:rPr>
-              <a:t> увеличивается в 10 раз.</a:t>
-            </a:r>
-          </a:p>
-          <a:p>
-            <a:pPr algn="l"/>
-            <a:r>
-              <a:rPr lang="ru-RU" b="0" i="0" dirty="0">
-                <a:effectLst/>
-                <a:latin typeface="fkGroteskNeue"/>
-              </a:rPr>
-              <a:t>Это заставляет модель учиться лучше на редких примерах.</a:t>
-            </a:r>
-          </a:p>
-          <a:p>
-            <a:pPr algn="l"/>
-            <a:r>
-              <a:rPr lang="ru-RU" b="0" i="0" dirty="0">
-                <a:effectLst/>
-                <a:latin typeface="fkGroteskNeue"/>
-              </a:rPr>
-              <a:t>Это часто самое эффективное решение, потому что:</a:t>
-            </a:r>
-          </a:p>
-          <a:p>
-            <a:pPr algn="l">
-              <a:buFont typeface="Arial" panose="020B0604020202020204" pitchFamily="34" charset="0"/>
-              <a:buChar char="•"/>
-            </a:pPr>
-            <a:r>
-              <a:rPr lang="ru-RU" b="0" i="0" dirty="0">
-                <a:effectLst/>
-                <a:latin typeface="fkGroteskNeue"/>
-              </a:rPr>
-              <a:t>Просто (одна строка кода)</a:t>
-            </a:r>
-          </a:p>
-          <a:p>
-            <a:pPr algn="l">
-              <a:buFont typeface="Arial" panose="020B0604020202020204" pitchFamily="34" charset="0"/>
-              <a:buChar char="•"/>
-            </a:pPr>
-            <a:r>
-              <a:rPr lang="ru-RU" b="0" i="0" dirty="0">
-                <a:effectLst/>
-                <a:latin typeface="fkGroteskNeue"/>
-              </a:rPr>
-              <a:t>Не требует много памяти</a:t>
-            </a:r>
-          </a:p>
-          <a:p>
-            <a:pPr algn="l">
-              <a:buFont typeface="Arial" panose="020B0604020202020204" pitchFamily="34" charset="0"/>
-              <a:buChar char="•"/>
-            </a:pPr>
-            <a:r>
-              <a:rPr lang="ru-RU" b="0" i="0" dirty="0">
-                <a:effectLst/>
-                <a:latin typeface="fkGroteskNeue"/>
-              </a:rPr>
-              <a:t>Часто работает лучше, чем SMOTE</a:t>
-            </a:r>
-          </a:p>
-          <a:p>
-            <a:pPr algn="l"/>
-            <a:r>
-              <a:rPr lang="ru-RU" b="0" i="0" dirty="0">
-                <a:effectLst/>
-                <a:latin typeface="fkGroteskNeue"/>
-              </a:rPr>
-              <a:t>Рекомендация: начните с </a:t>
-            </a:r>
-            <a:r>
-              <a:rPr lang="ru-RU" b="0" i="0" dirty="0" err="1">
-                <a:effectLst/>
-                <a:latin typeface="fkGroteskNeue"/>
-              </a:rPr>
-              <a:t>class_weight</a:t>
-            </a:r>
-            <a:r>
-              <a:rPr lang="ru-RU" b="0" i="0" dirty="0">
-                <a:effectLst/>
-                <a:latin typeface="fkGroteskNeue"/>
-              </a:rPr>
-              <a:t>='</a:t>
-            </a:r>
-            <a:r>
-              <a:rPr lang="ru-RU" b="0" i="0" dirty="0" err="1">
-                <a:effectLst/>
-                <a:latin typeface="fkGroteskNeue"/>
-              </a:rPr>
-              <a:t>balanced</a:t>
-            </a:r>
-            <a:r>
-              <a:rPr lang="ru-RU" b="0" i="0" dirty="0">
-                <a:effectLst/>
-                <a:latin typeface="fkGroteskNeue"/>
-              </a:rPr>
-              <a:t>'. Если не работает — пробуйте SMOTE.</a:t>
-            </a:r>
-          </a:p>
-          <a:p>
-            <a:pPr algn="l"/>
-            <a:endParaRPr lang="ru-RU" b="0" i="0" dirty="0">
-              <a:effectLst/>
-              <a:latin typeface="fkGroteskNeue"/>
-            </a:endParaRPr>
-          </a:p>
-          <a:p>
-            <a:pPr algn="l"/>
-            <a:r>
-              <a:rPr lang="ru-RU" b="0" i="0" dirty="0">
-                <a:effectLst/>
-                <a:latin typeface="fkGroteskNeue"/>
-              </a:rPr>
-              <a:t>ПАУЗА</a:t>
-            </a:r>
-          </a:p>
-          <a:p>
-            <a:br>
-              <a:rPr lang="ru-RU" dirty="0"/>
-            </a:br>
             <a:endParaRPr lang="ru-RU" sz="1200" b="0" i="0" kern="1200" dirty="0">
               <a:solidFill>
                 <a:schemeClr val="tx1"/>
@@ -15042,53 +10465,6 @@
           <a:chExt cx="0" cy="0"/>
         </a:xfrm>
       </p:grpSpPr>
-      <p:pic>
-        <p:nvPicPr>
-          <p:cNvPr id="1026" name="Picture 2" descr="Picture background">
-            <a:extLst>
-              <a:ext uri="{FF2B5EF4-FFF2-40B4-BE49-F238E27FC236}">
-                <a16:creationId xmlns:a16="http://schemas.microsoft.com/office/drawing/2014/main" id="{8A0E89EE-006C-462B-85FE-BA36FEA9E4EA}"/>
-              </a:ext>
-            </a:extLst>
-          </p:cNvPr>
-          <p:cNvPicPr>
-            <a:picLocks noChangeAspect="1" noChangeArrowheads="1"/>
-          </p:cNvPicPr>
-          <p:nvPr/>
-        </p:nvPicPr>
-        <p:blipFill>
-          <a:blip r:embed="rId3">
-            <a:extLst>
-              <a:ext uri="{28A0092B-C50C-407E-A947-70E740481C1C}">
-                <a14:useLocalDpi xmlns:a14="http://schemas.microsoft.com/office/drawing/2010/main" val="0"/>
-              </a:ext>
-            </a:extLst>
-          </a:blip>
-          <a:srcRect/>
-          <a:stretch>
-            <a:fillRect/>
-          </a:stretch>
-        </p:blipFill>
-        <p:spPr bwMode="auto">
-          <a:xfrm>
-            <a:off x="4594669" y="1344006"/>
-            <a:ext cx="7597331" cy="3975937"/>
-          </a:xfrm>
-          <a:prstGeom prst="rect">
-            <a:avLst/>
-          </a:prstGeom>
-          <a:noFill/>
-          <a:extLst>
-            <a:ext uri="{909E8E84-426E-40DD-AFC4-6F175D3DCCD1}">
-              <a14:hiddenFill xmlns:a14="http://schemas.microsoft.com/office/drawing/2010/main">
-                <a:solidFill>
-                  <a:srgbClr val="FFFFFF"/>
-                </a:solidFill>
-              </a14:hiddenFill>
-            </a:ext>
-          </a:extLst>
-        </p:spPr>
-      </p:pic>
       <p:sp>
         <p:nvSpPr>
           <p:cNvPr id="13" name="Номер слайда 12"/>
@@ -15115,808 +10491,6 @@
               </a:rPr>
               <a:pPr/>
               <a:t>17</a:t>
-            </a:fld>
-            <a:endParaRPr lang="ru-RU" dirty="0">
-              <a:latin typeface="PT Sans" panose="020B0503020203020204" pitchFamily="34" charset="0"/>
-            </a:endParaRPr>
-          </a:p>
-        </p:txBody>
-      </p:sp>
-      <p:grpSp>
-        <p:nvGrpSpPr>
-          <p:cNvPr id="9" name="Группа 8">
-            <a:extLst>
-              <a:ext uri="{FF2B5EF4-FFF2-40B4-BE49-F238E27FC236}">
-                <a16:creationId xmlns:a16="http://schemas.microsoft.com/office/drawing/2014/main" id="{D7342440-FCEE-2E4F-950F-6FE7857B3EB5}"/>
-              </a:ext>
-            </a:extLst>
-          </p:cNvPr>
-          <p:cNvGrpSpPr/>
-          <p:nvPr/>
-        </p:nvGrpSpPr>
-        <p:grpSpPr>
-          <a:xfrm>
-            <a:off x="0" y="-4966"/>
-            <a:ext cx="12192000" cy="1035565"/>
-            <a:chOff x="0" y="1924"/>
-            <a:chExt cx="9144000" cy="832664"/>
-          </a:xfrm>
-        </p:grpSpPr>
-        <p:sp>
-          <p:nvSpPr>
-            <p:cNvPr id="10" name="Google Shape;133;p5">
-              <a:extLst>
-                <a:ext uri="{FF2B5EF4-FFF2-40B4-BE49-F238E27FC236}">
-                  <a16:creationId xmlns:a16="http://schemas.microsoft.com/office/drawing/2014/main" id="{E1FF157E-1AAE-A345-AC22-C4FE991023F3}"/>
-                </a:ext>
-              </a:extLst>
-            </p:cNvPr>
-            <p:cNvSpPr/>
-            <p:nvPr/>
-          </p:nvSpPr>
-          <p:spPr>
-            <a:xfrm>
-              <a:off x="0" y="1924"/>
-              <a:ext cx="9144000" cy="832664"/>
-            </a:xfrm>
-            <a:prstGeom prst="rect">
-              <a:avLst/>
-            </a:prstGeom>
-            <a:gradFill>
-              <a:gsLst>
-                <a:gs pos="0">
-                  <a:srgbClr val="003061"/>
-                </a:gs>
-                <a:gs pos="50000">
-                  <a:srgbClr val="00468D"/>
-                </a:gs>
-                <a:gs pos="100000">
-                  <a:srgbClr val="0054AA"/>
-                </a:gs>
-              </a:gsLst>
-              <a:lin ang="5400000" scaled="0"/>
-            </a:gradFill>
-            <a:ln>
-              <a:noFill/>
-            </a:ln>
-          </p:spPr>
-          <p:txBody>
-            <a:bodyPr spcFirstLastPara="1" wrap="square" lIns="91425" tIns="45700" rIns="91425" bIns="45700" anchor="ctr" anchorCtr="0">
-              <a:noAutofit/>
-            </a:bodyPr>
-            <a:lstStyle/>
-            <a:p>
-              <a:pPr marL="0" marR="0" lvl="0" indent="0" algn="ctr" rtl="0">
-                <a:spcBef>
-                  <a:spcPts val="0"/>
-                </a:spcBef>
-                <a:spcAft>
-                  <a:spcPts val="0"/>
-                </a:spcAft>
-                <a:buNone/>
-              </a:pPr>
-              <a:endParaRPr sz="1800" dirty="0">
-                <a:solidFill>
-                  <a:schemeClr val="lt1"/>
-                </a:solidFill>
-                <a:latin typeface="PT Sans" panose="020B0503020203020204" pitchFamily="34" charset="0"/>
-                <a:ea typeface="Calibri"/>
-                <a:cs typeface="Calibri"/>
-                <a:sym typeface="Calibri"/>
-              </a:endParaRPr>
-            </a:p>
-          </p:txBody>
-        </p:sp>
-        <p:pic>
-          <p:nvPicPr>
-            <p:cNvPr id="11" name="Google Shape;134;p5" descr="C:\Users\MSShafigullin\Desktop\2020\Презентация КФУ\kfu_logo_circle_rus.png">
-              <a:extLst>
-                <a:ext uri="{FF2B5EF4-FFF2-40B4-BE49-F238E27FC236}">
-                  <a16:creationId xmlns:a16="http://schemas.microsoft.com/office/drawing/2014/main" id="{25CDED6D-DB62-6B41-9BFC-DFBDD55047A7}"/>
-                </a:ext>
-              </a:extLst>
-            </p:cNvPr>
-            <p:cNvPicPr preferRelativeResize="0"/>
-            <p:nvPr/>
-          </p:nvPicPr>
-          <p:blipFill rotWithShape="1">
-            <a:blip r:embed="rId4">
-              <a:alphaModFix/>
-            </a:blip>
-            <a:srcRect/>
-            <a:stretch/>
-          </p:blipFill>
-          <p:spPr>
-            <a:xfrm>
-              <a:off x="137267" y="148256"/>
-              <a:ext cx="553050" cy="540000"/>
-            </a:xfrm>
-            <a:prstGeom prst="rect">
-              <a:avLst/>
-            </a:prstGeom>
-            <a:noFill/>
-            <a:ln>
-              <a:noFill/>
-            </a:ln>
-          </p:spPr>
-        </p:pic>
-        <p:sp>
-          <p:nvSpPr>
-            <p:cNvPr id="12" name="Google Shape;135;p5">
-              <a:extLst>
-                <a:ext uri="{FF2B5EF4-FFF2-40B4-BE49-F238E27FC236}">
-                  <a16:creationId xmlns:a16="http://schemas.microsoft.com/office/drawing/2014/main" id="{B90A0E07-9A35-E74D-859C-8109875E2889}"/>
-                </a:ext>
-              </a:extLst>
-            </p:cNvPr>
-            <p:cNvSpPr txBox="1"/>
-            <p:nvPr/>
-          </p:nvSpPr>
-          <p:spPr>
-            <a:xfrm>
-              <a:off x="835887" y="240719"/>
-              <a:ext cx="7344900" cy="321682"/>
-            </a:xfrm>
-            <a:prstGeom prst="rect">
-              <a:avLst/>
-            </a:prstGeom>
-            <a:noFill/>
-            <a:ln>
-              <a:noFill/>
-            </a:ln>
-          </p:spPr>
-          <p:txBody>
-            <a:bodyPr spcFirstLastPara="1" wrap="square" lIns="91425" tIns="45700" rIns="91425" bIns="45700" anchor="t" anchorCtr="0">
-              <a:spAutoFit/>
-            </a:bodyPr>
-            <a:lstStyle/>
-            <a:p>
-              <a:pPr lvl="0"/>
-              <a:r>
-                <a:rPr lang="ru-RU" sz="2000" dirty="0">
-                  <a:solidFill>
-                    <a:schemeClr val="lt1"/>
-                  </a:solidFill>
-                  <a:latin typeface="PT Sans" panose="020B0503020203020204" pitchFamily="34" charset="0"/>
-                  <a:ea typeface="PT Sans"/>
-                  <a:cs typeface="PT Sans"/>
-                  <a:sym typeface="PT Sans"/>
-                </a:rPr>
-                <a:t>Расширенные техники (2)</a:t>
-              </a:r>
-            </a:p>
-          </p:txBody>
-        </p:sp>
-        <p:pic>
-          <p:nvPicPr>
-            <p:cNvPr id="14" name="Google Shape;136;p5" descr="C:\Users\MSShafigullin\Desktop\Проекты\Презентация по ДК\qs.jpg">
-              <a:extLst>
-                <a:ext uri="{FF2B5EF4-FFF2-40B4-BE49-F238E27FC236}">
-                  <a16:creationId xmlns:a16="http://schemas.microsoft.com/office/drawing/2014/main" id="{9F8DFA2B-AC78-464C-BC1D-62929B6D8A97}"/>
-                </a:ext>
-              </a:extLst>
-            </p:cNvPr>
-            <p:cNvPicPr preferRelativeResize="0"/>
-            <p:nvPr/>
-          </p:nvPicPr>
-          <p:blipFill rotWithShape="1">
-            <a:blip r:embed="rId5">
-              <a:alphaModFix/>
-            </a:blip>
-            <a:srcRect/>
-            <a:stretch/>
-          </p:blipFill>
-          <p:spPr>
-            <a:xfrm>
-              <a:off x="7878094" y="367563"/>
-              <a:ext cx="353386" cy="353386"/>
-            </a:xfrm>
-            <a:prstGeom prst="rect">
-              <a:avLst/>
-            </a:prstGeom>
-            <a:noFill/>
-            <a:ln>
-              <a:noFill/>
-            </a:ln>
-          </p:spPr>
-        </p:pic>
-        <p:pic>
-          <p:nvPicPr>
-            <p:cNvPr id="15" name="Google Shape;137;p5" descr="C:\Users\MSShafigullin\Desktop\2020\Презентация КФУ\THE.png">
-              <a:extLst>
-                <a:ext uri="{FF2B5EF4-FFF2-40B4-BE49-F238E27FC236}">
-                  <a16:creationId xmlns:a16="http://schemas.microsoft.com/office/drawing/2014/main" id="{835D2624-2EF8-2144-9816-A09872F47777}"/>
-                </a:ext>
-              </a:extLst>
-            </p:cNvPr>
-            <p:cNvPicPr preferRelativeResize="0"/>
-            <p:nvPr/>
-          </p:nvPicPr>
-          <p:blipFill rotWithShape="1">
-            <a:blip r:embed="rId6">
-              <a:alphaModFix/>
-            </a:blip>
-            <a:srcRect/>
-            <a:stretch/>
-          </p:blipFill>
-          <p:spPr>
-            <a:xfrm>
-              <a:off x="7928787" y="114719"/>
-              <a:ext cx="252000" cy="252000"/>
-            </a:xfrm>
-            <a:prstGeom prst="rect">
-              <a:avLst/>
-            </a:prstGeom>
-            <a:noFill/>
-            <a:ln>
-              <a:noFill/>
-            </a:ln>
-          </p:spPr>
-        </p:pic>
-        <p:sp>
-          <p:nvSpPr>
-            <p:cNvPr id="16" name="Google Shape;138;p5">
-              <a:extLst>
-                <a:ext uri="{FF2B5EF4-FFF2-40B4-BE49-F238E27FC236}">
-                  <a16:creationId xmlns:a16="http://schemas.microsoft.com/office/drawing/2014/main" id="{841F1A31-5CCC-E941-956A-F47E7E67D768}"/>
-                </a:ext>
-              </a:extLst>
-            </p:cNvPr>
-            <p:cNvSpPr txBox="1"/>
-            <p:nvPr/>
-          </p:nvSpPr>
-          <p:spPr>
-            <a:xfrm>
-              <a:off x="8279432" y="374979"/>
-              <a:ext cx="659482" cy="272188"/>
-            </a:xfrm>
-            <a:prstGeom prst="rect">
-              <a:avLst/>
-            </a:prstGeom>
-            <a:noFill/>
-            <a:ln>
-              <a:noFill/>
-            </a:ln>
-          </p:spPr>
-          <p:txBody>
-            <a:bodyPr spcFirstLastPara="1" wrap="square" lIns="91425" tIns="45700" rIns="91425" bIns="45700" anchor="t" anchorCtr="0">
-              <a:spAutoFit/>
-            </a:bodyPr>
-            <a:lstStyle/>
-            <a:p>
-              <a:pPr marL="0" marR="0" lvl="0" indent="0" algn="l" rtl="0">
-                <a:lnSpc>
-                  <a:spcPct val="100000"/>
-                </a:lnSpc>
-                <a:spcBef>
-                  <a:spcPts val="0"/>
-                </a:spcBef>
-                <a:spcAft>
-                  <a:spcPts val="0"/>
-                </a:spcAft>
-                <a:buClr>
-                  <a:schemeClr val="lt1"/>
-                </a:buClr>
-                <a:buSzPts val="800"/>
-                <a:buFont typeface="PT Sans"/>
-                <a:buNone/>
-              </a:pPr>
-              <a:r>
-                <a:rPr lang="ru-RU" sz="800" b="0">
-                  <a:solidFill>
-                    <a:schemeClr val="lt1"/>
-                  </a:solidFill>
-                  <a:latin typeface="PT Sans" panose="020B0503020203020204" pitchFamily="34" charset="0"/>
-                  <a:ea typeface="PT Sans"/>
-                  <a:cs typeface="PT Sans"/>
-                  <a:sym typeface="PT Sans"/>
-                </a:rPr>
-                <a:t>370</a:t>
-              </a:r>
-              <a:endParaRPr>
-                <a:latin typeface="PT Sans" panose="020B0503020203020204" pitchFamily="34" charset="0"/>
-              </a:endParaRPr>
-            </a:p>
-            <a:p>
-              <a:pPr marL="0" marR="0" lvl="0" indent="0" algn="l" rtl="0">
-                <a:lnSpc>
-                  <a:spcPct val="100000"/>
-                </a:lnSpc>
-                <a:spcBef>
-                  <a:spcPts val="0"/>
-                </a:spcBef>
-                <a:spcAft>
-                  <a:spcPts val="0"/>
-                </a:spcAft>
-                <a:buClr>
-                  <a:schemeClr val="lt1"/>
-                </a:buClr>
-                <a:buSzPts val="800"/>
-                <a:buFont typeface="PT Sans"/>
-                <a:buNone/>
-              </a:pPr>
-              <a:r>
-                <a:rPr lang="ru-RU" sz="800" b="0" u="none" strike="noStrike" cap="none">
-                  <a:solidFill>
-                    <a:schemeClr val="lt1"/>
-                  </a:solidFill>
-                  <a:latin typeface="PT Sans" panose="020B0503020203020204" pitchFamily="34" charset="0"/>
-                  <a:ea typeface="PT Sans"/>
-                  <a:cs typeface="PT Sans"/>
-                  <a:sym typeface="PT Sans"/>
-                </a:rPr>
-                <a:t>13</a:t>
-              </a:r>
-              <a:endParaRPr sz="800" b="0" u="none" strike="noStrike" cap="none">
-                <a:solidFill>
-                  <a:schemeClr val="lt1"/>
-                </a:solidFill>
-                <a:latin typeface="PT Sans" panose="020B0503020203020204" pitchFamily="34" charset="0"/>
-                <a:ea typeface="PT Sans"/>
-                <a:cs typeface="PT Sans"/>
-                <a:sym typeface="PT Sans"/>
-              </a:endParaRPr>
-            </a:p>
-          </p:txBody>
-        </p:sp>
-        <p:sp>
-          <p:nvSpPr>
-            <p:cNvPr id="17" name="Google Shape;139;p5">
-              <a:extLst>
-                <a:ext uri="{FF2B5EF4-FFF2-40B4-BE49-F238E27FC236}">
-                  <a16:creationId xmlns:a16="http://schemas.microsoft.com/office/drawing/2014/main" id="{A28DBFF6-9F47-6244-B20A-895959377BC2}"/>
-                </a:ext>
-              </a:extLst>
-            </p:cNvPr>
-            <p:cNvSpPr txBox="1"/>
-            <p:nvPr/>
-          </p:nvSpPr>
-          <p:spPr>
-            <a:xfrm>
-              <a:off x="8279432" y="71442"/>
-              <a:ext cx="659482" cy="272188"/>
-            </a:xfrm>
-            <a:prstGeom prst="rect">
-              <a:avLst/>
-            </a:prstGeom>
-            <a:noFill/>
-            <a:ln>
-              <a:noFill/>
-            </a:ln>
-          </p:spPr>
-          <p:txBody>
-            <a:bodyPr spcFirstLastPara="1" wrap="square" lIns="91425" tIns="45700" rIns="91425" bIns="45700" anchor="t" anchorCtr="0">
-              <a:spAutoFit/>
-            </a:bodyPr>
-            <a:lstStyle/>
-            <a:p>
-              <a:pPr marL="0" marR="0" lvl="0" indent="0" algn="l" rtl="0">
-                <a:lnSpc>
-                  <a:spcPct val="100000"/>
-                </a:lnSpc>
-                <a:spcBef>
-                  <a:spcPts val="0"/>
-                </a:spcBef>
-                <a:spcAft>
-                  <a:spcPts val="0"/>
-                </a:spcAft>
-                <a:buClr>
-                  <a:schemeClr val="lt1"/>
-                </a:buClr>
-                <a:buSzPts val="800"/>
-                <a:buFont typeface="PT Sans"/>
-                <a:buNone/>
-              </a:pPr>
-              <a:r>
-                <a:rPr lang="ru-RU" sz="800" b="0">
-                  <a:solidFill>
-                    <a:schemeClr val="lt1"/>
-                  </a:solidFill>
-                  <a:latin typeface="PT Sans" panose="020B0503020203020204" pitchFamily="34" charset="0"/>
-                  <a:ea typeface="PT Sans"/>
-                  <a:cs typeface="PT Sans"/>
-                  <a:sym typeface="PT Sans"/>
-                </a:rPr>
-                <a:t>601-800</a:t>
-              </a:r>
-              <a:endParaRPr>
-                <a:latin typeface="PT Sans" panose="020B0503020203020204" pitchFamily="34" charset="0"/>
-              </a:endParaRPr>
-            </a:p>
-            <a:p>
-              <a:pPr marL="0" marR="0" lvl="0" indent="0" algn="l" rtl="0">
-                <a:lnSpc>
-                  <a:spcPct val="100000"/>
-                </a:lnSpc>
-                <a:spcBef>
-                  <a:spcPts val="0"/>
-                </a:spcBef>
-                <a:spcAft>
-                  <a:spcPts val="0"/>
-                </a:spcAft>
-                <a:buClr>
-                  <a:schemeClr val="lt1"/>
-                </a:buClr>
-                <a:buSzPts val="800"/>
-                <a:buFont typeface="PT Sans"/>
-                <a:buNone/>
-              </a:pPr>
-              <a:r>
-                <a:rPr lang="ru-RU" sz="800" b="0" u="none" strike="noStrike" cap="none">
-                  <a:solidFill>
-                    <a:schemeClr val="lt1"/>
-                  </a:solidFill>
-                  <a:latin typeface="PT Sans" panose="020B0503020203020204" pitchFamily="34" charset="0"/>
-                  <a:ea typeface="PT Sans"/>
-                  <a:cs typeface="PT Sans"/>
-                  <a:sym typeface="PT Sans"/>
-                </a:rPr>
-                <a:t>9</a:t>
-              </a:r>
-              <a:endParaRPr sz="800" b="0" u="none" strike="noStrike" cap="none">
-                <a:solidFill>
-                  <a:schemeClr val="lt1"/>
-                </a:solidFill>
-                <a:latin typeface="PT Sans" panose="020B0503020203020204" pitchFamily="34" charset="0"/>
-                <a:ea typeface="PT Sans"/>
-                <a:cs typeface="PT Sans"/>
-                <a:sym typeface="PT Sans"/>
-              </a:endParaRPr>
-            </a:p>
-          </p:txBody>
-        </p:sp>
-      </p:grpSp>
-      <p:sp>
-        <p:nvSpPr>
-          <p:cNvPr id="19" name="Объект 2">
-            <a:extLst>
-              <a:ext uri="{FF2B5EF4-FFF2-40B4-BE49-F238E27FC236}">
-                <a16:creationId xmlns:a16="http://schemas.microsoft.com/office/drawing/2014/main" id="{30C61546-9215-4D0C-81CB-5EE3A5637E25}"/>
-              </a:ext>
-            </a:extLst>
-          </p:cNvPr>
-          <p:cNvSpPr>
-            <a:spLocks noGrp="1"/>
-          </p:cNvSpPr>
-          <p:nvPr>
-            <p:ph idx="1"/>
-          </p:nvPr>
-        </p:nvSpPr>
-        <p:spPr>
-          <a:xfrm>
-            <a:off x="183023" y="1223234"/>
-            <a:ext cx="11423283" cy="5677647"/>
-          </a:xfrm>
-        </p:spPr>
-        <p:txBody>
-          <a:bodyPr>
-            <a:noAutofit/>
-          </a:bodyPr>
-          <a:lstStyle/>
-          <a:p>
-            <a:pPr marL="0" indent="0" algn="l">
-              <a:buNone/>
-            </a:pPr>
-            <a:r>
-              <a:rPr lang="ru-RU" sz="2000" b="1" i="1" dirty="0" err="1">
-                <a:effectLst/>
-                <a:latin typeface="fkGroteskNeue"/>
-              </a:rPr>
-              <a:t>Гиперпараметрическая</a:t>
-            </a:r>
-            <a:r>
-              <a:rPr lang="ru-RU" sz="2000" b="1" i="1" dirty="0">
-                <a:effectLst/>
-                <a:latin typeface="fkGroteskNeue"/>
-              </a:rPr>
-              <a:t> оптимизация</a:t>
-            </a:r>
-          </a:p>
-          <a:p>
-            <a:pPr marL="0" indent="0" algn="l">
-              <a:buNone/>
-            </a:pPr>
-            <a:r>
-              <a:rPr lang="en-US" sz="2000" b="0" i="0" dirty="0">
-                <a:effectLst/>
-                <a:latin typeface="fkGroteskNeue"/>
-              </a:rPr>
-              <a:t>Grid Search:</a:t>
-            </a:r>
-          </a:p>
-          <a:p>
-            <a:pPr marL="457200" lvl="1" indent="0">
-              <a:buNone/>
-            </a:pPr>
-            <a:r>
-              <a:rPr lang="en-US" sz="1800" b="0" i="0" dirty="0" err="1">
-                <a:effectLst/>
-                <a:latin typeface="Cambria Math" panose="02040503050406030204" pitchFamily="18" charset="0"/>
-                <a:ea typeface="Cambria Math" panose="02040503050406030204" pitchFamily="18" charset="0"/>
-              </a:rPr>
-              <a:t>param_grid</a:t>
-            </a:r>
-            <a:r>
-              <a:rPr lang="en-US" sz="1800" b="0" i="0" dirty="0">
-                <a:effectLst/>
-                <a:latin typeface="Cambria Math" panose="02040503050406030204" pitchFamily="18" charset="0"/>
-                <a:ea typeface="Cambria Math" panose="02040503050406030204" pitchFamily="18" charset="0"/>
-              </a:rPr>
-              <a:t> = {</a:t>
-            </a:r>
-          </a:p>
-          <a:p>
-            <a:pPr marL="457200" lvl="1" indent="0">
-              <a:buNone/>
-            </a:pPr>
-            <a:r>
-              <a:rPr lang="en-US" sz="1800" b="0" i="0" dirty="0">
-                <a:effectLst/>
-                <a:latin typeface="Cambria Math" panose="02040503050406030204" pitchFamily="18" charset="0"/>
-                <a:ea typeface="Cambria Math" panose="02040503050406030204" pitchFamily="18" charset="0"/>
-              </a:rPr>
-              <a:t>    '</a:t>
-            </a:r>
-            <a:r>
-              <a:rPr lang="en-US" sz="1800" b="0" i="0" dirty="0" err="1">
-                <a:effectLst/>
-                <a:latin typeface="Cambria Math" panose="02040503050406030204" pitchFamily="18" charset="0"/>
-                <a:ea typeface="Cambria Math" panose="02040503050406030204" pitchFamily="18" charset="0"/>
-              </a:rPr>
-              <a:t>n_estimators</a:t>
-            </a:r>
-            <a:r>
-              <a:rPr lang="en-US" sz="1800" b="0" i="0" dirty="0">
-                <a:effectLst/>
-                <a:latin typeface="Cambria Math" panose="02040503050406030204" pitchFamily="18" charset="0"/>
-                <a:ea typeface="Cambria Math" panose="02040503050406030204" pitchFamily="18" charset="0"/>
-              </a:rPr>
-              <a:t>': [50, 100, 200],</a:t>
-            </a:r>
-          </a:p>
-          <a:p>
-            <a:pPr marL="457200" lvl="1" indent="0">
-              <a:buNone/>
-            </a:pPr>
-            <a:r>
-              <a:rPr lang="en-US" sz="1800" b="0" i="0" dirty="0">
-                <a:effectLst/>
-                <a:latin typeface="Cambria Math" panose="02040503050406030204" pitchFamily="18" charset="0"/>
-                <a:ea typeface="Cambria Math" panose="02040503050406030204" pitchFamily="18" charset="0"/>
-              </a:rPr>
-              <a:t>    '</a:t>
-            </a:r>
-            <a:r>
-              <a:rPr lang="en-US" sz="1800" b="0" i="0" dirty="0" err="1">
-                <a:effectLst/>
-                <a:latin typeface="Cambria Math" panose="02040503050406030204" pitchFamily="18" charset="0"/>
-                <a:ea typeface="Cambria Math" panose="02040503050406030204" pitchFamily="18" charset="0"/>
-              </a:rPr>
-              <a:t>max_depth</a:t>
-            </a:r>
-            <a:r>
-              <a:rPr lang="en-US" sz="1800" b="0" i="0" dirty="0">
-                <a:effectLst/>
-                <a:latin typeface="Cambria Math" panose="02040503050406030204" pitchFamily="18" charset="0"/>
-                <a:ea typeface="Cambria Math" panose="02040503050406030204" pitchFamily="18" charset="0"/>
-              </a:rPr>
-              <a:t>': [5, 10, 15],</a:t>
-            </a:r>
-          </a:p>
-          <a:p>
-            <a:pPr marL="457200" lvl="1" indent="0">
-              <a:buNone/>
-            </a:pPr>
-            <a:r>
-              <a:rPr lang="en-US" sz="1800" b="0" i="0" dirty="0">
-                <a:effectLst/>
-                <a:latin typeface="Cambria Math" panose="02040503050406030204" pitchFamily="18" charset="0"/>
-                <a:ea typeface="Cambria Math" panose="02040503050406030204" pitchFamily="18" charset="0"/>
-              </a:rPr>
-              <a:t>    '</a:t>
-            </a:r>
-            <a:r>
-              <a:rPr lang="en-US" sz="1800" b="0" i="0" dirty="0" err="1">
-                <a:effectLst/>
-                <a:latin typeface="Cambria Math" panose="02040503050406030204" pitchFamily="18" charset="0"/>
-                <a:ea typeface="Cambria Math" panose="02040503050406030204" pitchFamily="18" charset="0"/>
-              </a:rPr>
-              <a:t>min_samples_leaf</a:t>
-            </a:r>
-            <a:r>
-              <a:rPr lang="en-US" sz="1800" b="0" i="0" dirty="0">
-                <a:effectLst/>
-                <a:latin typeface="Cambria Math" panose="02040503050406030204" pitchFamily="18" charset="0"/>
-                <a:ea typeface="Cambria Math" panose="02040503050406030204" pitchFamily="18" charset="0"/>
-              </a:rPr>
-              <a:t>': [2, 4]</a:t>
-            </a:r>
-          </a:p>
-          <a:p>
-            <a:pPr marL="457200" lvl="1" indent="0">
-              <a:buNone/>
-            </a:pPr>
-            <a:r>
-              <a:rPr lang="en-US" sz="1800" b="0" i="0" dirty="0">
-                <a:effectLst/>
-                <a:latin typeface="Cambria Math" panose="02040503050406030204" pitchFamily="18" charset="0"/>
-                <a:ea typeface="Cambria Math" panose="02040503050406030204" pitchFamily="18" charset="0"/>
-              </a:rPr>
-              <a:t>}</a:t>
-            </a:r>
-          </a:p>
-          <a:p>
-            <a:pPr marL="0" indent="0" algn="l">
-              <a:buNone/>
-            </a:pPr>
-            <a:r>
-              <a:rPr lang="ru-RU" sz="2000" b="0" i="0" dirty="0">
-                <a:effectLst/>
-                <a:latin typeface="fkGroteskNeue"/>
-              </a:rPr>
-              <a:t>Пробуем все комбинации: 3 × 3 × 2 = 18 моделей</a:t>
-            </a:r>
-          </a:p>
-          <a:p>
-            <a:pPr marL="0" indent="0" algn="l">
-              <a:buNone/>
-            </a:pPr>
-            <a:r>
-              <a:rPr lang="ru-RU" sz="2000" b="0" i="0" dirty="0" err="1">
-                <a:effectLst/>
-                <a:latin typeface="fkGroteskNeue"/>
-              </a:rPr>
-              <a:t>Random</a:t>
-            </a:r>
-            <a:r>
-              <a:rPr lang="ru-RU" sz="2000" b="0" i="0" dirty="0">
-                <a:effectLst/>
-                <a:latin typeface="fkGroteskNeue"/>
-              </a:rPr>
-              <a:t> Search:</a:t>
-            </a:r>
-          </a:p>
-          <a:p>
-            <a:pPr algn="l">
-              <a:buFont typeface="Arial" panose="020B0604020202020204" pitchFamily="34" charset="0"/>
-              <a:buChar char="•"/>
-            </a:pPr>
-            <a:r>
-              <a:rPr lang="ru-RU" sz="2000" b="0" i="0" dirty="0">
-                <a:effectLst/>
-                <a:latin typeface="fkGroteskNeue"/>
-              </a:rPr>
-              <a:t>Случайная выборка параметров</a:t>
-            </a:r>
-          </a:p>
-          <a:p>
-            <a:pPr algn="l">
-              <a:buFont typeface="Arial" panose="020B0604020202020204" pitchFamily="34" charset="0"/>
-              <a:buChar char="•"/>
-            </a:pPr>
-            <a:r>
-              <a:rPr lang="ru-RU" sz="2000" b="0" i="0" dirty="0">
-                <a:effectLst/>
-                <a:latin typeface="fkGroteskNeue"/>
-              </a:rPr>
-              <a:t>Быстрее, но может пропустить оптимум</a:t>
-            </a:r>
-          </a:p>
-          <a:p>
-            <a:pPr marL="0" indent="0" algn="l">
-              <a:buNone/>
-            </a:pPr>
-            <a:r>
-              <a:rPr lang="ru-RU" sz="2000" b="0" i="0" dirty="0">
-                <a:effectLst/>
-                <a:latin typeface="fkGroteskNeue"/>
-              </a:rPr>
-              <a:t>Байесовская оптимизация:</a:t>
-            </a:r>
-          </a:p>
-          <a:p>
-            <a:pPr algn="l">
-              <a:buFont typeface="Arial" panose="020B0604020202020204" pitchFamily="34" charset="0"/>
-              <a:buChar char="•"/>
-            </a:pPr>
-            <a:r>
-              <a:rPr lang="ru-RU" sz="2000" b="0" i="0" dirty="0">
-                <a:effectLst/>
-                <a:latin typeface="fkGroteskNeue"/>
-              </a:rPr>
-              <a:t>Умная стратегия выбора параметров</a:t>
-            </a:r>
-          </a:p>
-          <a:p>
-            <a:pPr algn="l">
-              <a:buFont typeface="Arial" panose="020B0604020202020204" pitchFamily="34" charset="0"/>
-              <a:buChar char="•"/>
-            </a:pPr>
-            <a:r>
-              <a:rPr lang="ru-RU" sz="2000" b="0" i="0" dirty="0">
-                <a:effectLst/>
-                <a:latin typeface="fkGroteskNeue"/>
-              </a:rPr>
-              <a:t>Дороже вычислительно, но эффективнее</a:t>
-            </a:r>
-          </a:p>
-          <a:p>
-            <a:pPr marL="0" indent="0" algn="l">
-              <a:buNone/>
-            </a:pPr>
-            <a:endParaRPr lang="en-US" sz="2000" b="0" i="0" dirty="0">
-              <a:effectLst/>
-              <a:latin typeface="Cambria Math" panose="02040503050406030204" pitchFamily="18" charset="0"/>
-              <a:ea typeface="Cambria Math" panose="02040503050406030204" pitchFamily="18" charset="0"/>
-            </a:endParaRPr>
-          </a:p>
-          <a:p>
-            <a:pPr marL="0" indent="0" algn="l">
-              <a:buNone/>
-            </a:pPr>
-            <a:endParaRPr lang="en-US" sz="2000" b="0" i="0" dirty="0">
-              <a:effectLst/>
-              <a:latin typeface="fkGroteskNeue"/>
-            </a:endParaRPr>
-          </a:p>
-        </p:txBody>
-      </p:sp>
-    </p:spTree>
-    <p:extLst>
-      <p:ext uri="{BB962C8B-B14F-4D97-AF65-F5344CB8AC3E}">
-        <p14:creationId xmlns:p14="http://schemas.microsoft.com/office/powerpoint/2010/main" val="232943963"/>
-      </p:ext>
-    </p:extLst>
-  </p:cSld>
-  <p:clrMapOvr>
-    <a:masterClrMapping/>
-  </p:clrMapOvr>
-</p:sld>
-</file>
-
-<file path=ppt/slides/slide18.xml><?xml version="1.0" encoding="utf-8"?>
-<p:sld xmlns:a="http://schemas.openxmlformats.org/drawingml/2006/main" xmlns:r="http://schemas.openxmlformats.org/officeDocument/2006/relationships" xmlns:p="http://schemas.openxmlformats.org/presentationml/2006/main">
-  <p:cSld>
-    <p:spTree>
-      <p:nvGrpSpPr>
-        <p:cNvPr id="1" name=""/>
-        <p:cNvGrpSpPr/>
-        <p:nvPr/>
-      </p:nvGrpSpPr>
-      <p:grpSpPr>
-        <a:xfrm>
-          <a:off x="0" y="0"/>
-          <a:ext cx="0" cy="0"/>
-          <a:chOff x="0" y="0"/>
-          <a:chExt cx="0" cy="0"/>
-        </a:xfrm>
-      </p:grpSpPr>
-      <p:sp>
-        <p:nvSpPr>
-          <p:cNvPr id="13" name="Номер слайда 12"/>
-          <p:cNvSpPr>
-            <a:spLocks noGrp="1"/>
-          </p:cNvSpPr>
-          <p:nvPr>
-            <p:ph type="sldNum" sz="quarter" idx="12"/>
-          </p:nvPr>
-        </p:nvSpPr>
-        <p:spPr>
-          <a:xfrm>
-            <a:off x="9274478" y="6356350"/>
-            <a:ext cx="2743200" cy="365125"/>
-          </a:xfrm>
-        </p:spPr>
-        <p:txBody>
-          <a:bodyPr/>
-          <a:lstStyle/>
-          <a:p>
-            <a:fld id="{B19B0651-EE4F-4900-A07F-96A6BFA9D0F0}" type="slidenum">
-              <a:rPr lang="ru-RU" smtClean="0">
-                <a:latin typeface="PT Sans" panose="020B0503020203020204" pitchFamily="34" charset="0"/>
-              </a:rPr>
-              <a:pPr/>
-              <a:t>18</a:t>
             </a:fld>
             <a:endParaRPr lang="ru-RU" dirty="0">
               <a:latin typeface="PT Sans" panose="020B0503020203020204" pitchFamily="34" charset="0"/>
@@ -16626,7 +11200,7 @@
 </p:sld>
 </file>
 
-<file path=ppt/slides/slide19.xml><?xml version="1.0" encoding="utf-8"?>
+<file path=ppt/slides/slide18.xml><?xml version="1.0" encoding="utf-8"?>
 <p:sld xmlns:a="http://schemas.openxmlformats.org/drawingml/2006/main" xmlns:r="http://schemas.openxmlformats.org/officeDocument/2006/relationships" xmlns:p="http://schemas.openxmlformats.org/presentationml/2006/main">
   <p:cSld>
     <p:spTree>
@@ -16668,7 +11242,7 @@
                 <a:latin typeface="PT Sans" panose="020B0503020203020204" pitchFamily="34" charset="0"/>
               </a:rPr>
               <a:pPr/>
-              <a:t>19</a:t>
+              <a:t>18</a:t>
             </a:fld>
             <a:endParaRPr lang="ru-RU" dirty="0">
               <a:latin typeface="PT Sans" panose="020B0503020203020204" pitchFamily="34" charset="0"/>
@@ -17265,678 +11839,7 @@
 </p:sld>
 </file>
 
-<file path=ppt/slides/slide2.xml><?xml version="1.0" encoding="utf-8"?>
-<p:sld xmlns:a="http://schemas.openxmlformats.org/drawingml/2006/main" xmlns:r="http://schemas.openxmlformats.org/officeDocument/2006/relationships" xmlns:p="http://schemas.openxmlformats.org/presentationml/2006/main">
-  <p:cSld>
-    <p:spTree>
-      <p:nvGrpSpPr>
-        <p:cNvPr id="1" name=""/>
-        <p:cNvGrpSpPr/>
-        <p:nvPr/>
-      </p:nvGrpSpPr>
-      <p:grpSpPr>
-        <a:xfrm>
-          <a:off x="0" y="0"/>
-          <a:ext cx="0" cy="0"/>
-          <a:chOff x="0" y="0"/>
-          <a:chExt cx="0" cy="0"/>
-        </a:xfrm>
-      </p:grpSpPr>
-      <p:sp>
-        <p:nvSpPr>
-          <p:cNvPr id="13" name="Номер слайда 12"/>
-          <p:cNvSpPr>
-            <a:spLocks noGrp="1"/>
-          </p:cNvSpPr>
-          <p:nvPr>
-            <p:ph type="sldNum" sz="quarter" idx="12"/>
-          </p:nvPr>
-        </p:nvSpPr>
-        <p:spPr/>
-        <p:txBody>
-          <a:bodyPr/>
-          <a:lstStyle/>
-          <a:p>
-            <a:fld id="{B19B0651-EE4F-4900-A07F-96A6BFA9D0F0}" type="slidenum">
-              <a:rPr lang="ru-RU" smtClean="0">
-                <a:latin typeface="PT Sans" panose="020B0503020203020204" pitchFamily="34" charset="0"/>
-              </a:rPr>
-              <a:pPr/>
-              <a:t>2</a:t>
-            </a:fld>
-            <a:endParaRPr lang="ru-RU" dirty="0">
-              <a:latin typeface="PT Sans" panose="020B0503020203020204" pitchFamily="34" charset="0"/>
-            </a:endParaRPr>
-          </a:p>
-        </p:txBody>
-      </p:sp>
-      <p:grpSp>
-        <p:nvGrpSpPr>
-          <p:cNvPr id="24" name="Группа 23">
-            <a:extLst>
-              <a:ext uri="{FF2B5EF4-FFF2-40B4-BE49-F238E27FC236}">
-                <a16:creationId xmlns:a16="http://schemas.microsoft.com/office/drawing/2014/main" id="{98A76A24-00EA-EE42-8A4F-846D0D0A92B0}"/>
-              </a:ext>
-            </a:extLst>
-          </p:cNvPr>
-          <p:cNvGrpSpPr/>
-          <p:nvPr/>
-        </p:nvGrpSpPr>
-        <p:grpSpPr>
-          <a:xfrm>
-            <a:off x="-50" y="0"/>
-            <a:ext cx="827700" cy="6858000"/>
-            <a:chOff x="-50" y="0"/>
-            <a:chExt cx="827700" cy="5143500"/>
-          </a:xfrm>
-        </p:grpSpPr>
-        <p:sp>
-          <p:nvSpPr>
-            <p:cNvPr id="25" name="Google Shape;106;p3">
-              <a:extLst>
-                <a:ext uri="{FF2B5EF4-FFF2-40B4-BE49-F238E27FC236}">
-                  <a16:creationId xmlns:a16="http://schemas.microsoft.com/office/drawing/2014/main" id="{1212ABD6-BB78-564D-90F4-45A9BF52F65A}"/>
-                </a:ext>
-              </a:extLst>
-            </p:cNvPr>
-            <p:cNvSpPr/>
-            <p:nvPr/>
-          </p:nvSpPr>
-          <p:spPr>
-            <a:xfrm>
-              <a:off x="-50" y="0"/>
-              <a:ext cx="827700" cy="5143500"/>
-            </a:xfrm>
-            <a:prstGeom prst="rect">
-              <a:avLst/>
-            </a:prstGeom>
-            <a:gradFill>
-              <a:gsLst>
-                <a:gs pos="0">
-                  <a:srgbClr val="003061"/>
-                </a:gs>
-                <a:gs pos="50000">
-                  <a:srgbClr val="00468D"/>
-                </a:gs>
-                <a:gs pos="100000">
-                  <a:srgbClr val="0054AA"/>
-                </a:gs>
-              </a:gsLst>
-              <a:lin ang="5400000" scaled="0"/>
-            </a:gradFill>
-            <a:ln>
-              <a:noFill/>
-            </a:ln>
-          </p:spPr>
-          <p:txBody>
-            <a:bodyPr spcFirstLastPara="1" wrap="square" lIns="91425" tIns="45700" rIns="91425" bIns="45700" anchor="ctr" anchorCtr="0">
-              <a:noAutofit/>
-            </a:bodyPr>
-            <a:lstStyle/>
-            <a:p>
-              <a:pPr marL="0" marR="0" lvl="0" indent="0" algn="ctr" rtl="0">
-                <a:spcBef>
-                  <a:spcPts val="0"/>
-                </a:spcBef>
-                <a:spcAft>
-                  <a:spcPts val="0"/>
-                </a:spcAft>
-                <a:buNone/>
-              </a:pPr>
-              <a:endParaRPr sz="1800">
-                <a:solidFill>
-                  <a:schemeClr val="lt1"/>
-                </a:solidFill>
-                <a:latin typeface="PT Sans" panose="020B0503020203020204" pitchFamily="34" charset="0"/>
-                <a:ea typeface="Calibri"/>
-                <a:cs typeface="Calibri"/>
-                <a:sym typeface="Calibri"/>
-              </a:endParaRPr>
-            </a:p>
-          </p:txBody>
-        </p:sp>
-        <p:pic>
-          <p:nvPicPr>
-            <p:cNvPr id="28" name="Google Shape;107;p3" descr="C:\Users\MSShafigullin\Desktop\2020\Презентация КФУ\kfu_logo_circle_rus.png">
-              <a:extLst>
-                <a:ext uri="{FF2B5EF4-FFF2-40B4-BE49-F238E27FC236}">
-                  <a16:creationId xmlns:a16="http://schemas.microsoft.com/office/drawing/2014/main" id="{C968D678-6F52-2F45-8BE7-5E2313AF23D6}"/>
-                </a:ext>
-              </a:extLst>
-            </p:cNvPr>
-            <p:cNvPicPr preferRelativeResize="0"/>
-            <p:nvPr/>
-          </p:nvPicPr>
-          <p:blipFill rotWithShape="1">
-            <a:blip r:embed="rId3">
-              <a:alphaModFix/>
-            </a:blip>
-            <a:srcRect/>
-            <a:stretch/>
-          </p:blipFill>
-          <p:spPr>
-            <a:xfrm>
-              <a:off x="137267" y="87534"/>
-              <a:ext cx="553050" cy="432728"/>
-            </a:xfrm>
-            <a:prstGeom prst="rect">
-              <a:avLst/>
-            </a:prstGeom>
-            <a:noFill/>
-            <a:ln>
-              <a:noFill/>
-            </a:ln>
-          </p:spPr>
-        </p:pic>
-        <p:pic>
-          <p:nvPicPr>
-            <p:cNvPr id="30" name="Google Shape;109;p3" descr="C:\Users\MSShafigullin\Desktop\Проекты\Презентация по ДК\qs.jpg">
-              <a:extLst>
-                <a:ext uri="{FF2B5EF4-FFF2-40B4-BE49-F238E27FC236}">
-                  <a16:creationId xmlns:a16="http://schemas.microsoft.com/office/drawing/2014/main" id="{1F22E8DB-9008-9D4B-9E64-C397CC33A9DA}"/>
-                </a:ext>
-              </a:extLst>
-            </p:cNvPr>
-            <p:cNvPicPr preferRelativeResize="0"/>
-            <p:nvPr/>
-          </p:nvPicPr>
-          <p:blipFill rotWithShape="1">
-            <a:blip r:embed="rId4">
-              <a:alphaModFix/>
-            </a:blip>
-            <a:srcRect/>
-            <a:stretch/>
-          </p:blipFill>
-          <p:spPr>
-            <a:xfrm>
-              <a:off x="237087" y="4422472"/>
-              <a:ext cx="353386" cy="353386"/>
-            </a:xfrm>
-            <a:prstGeom prst="rect">
-              <a:avLst/>
-            </a:prstGeom>
-            <a:noFill/>
-            <a:ln>
-              <a:noFill/>
-            </a:ln>
-          </p:spPr>
-        </p:pic>
-        <p:pic>
-          <p:nvPicPr>
-            <p:cNvPr id="31" name="Google Shape;110;p3" descr="C:\Users\MSShafigullin\Desktop\2020\Презентация КФУ\THE.png">
-              <a:extLst>
-                <a:ext uri="{FF2B5EF4-FFF2-40B4-BE49-F238E27FC236}">
-                  <a16:creationId xmlns:a16="http://schemas.microsoft.com/office/drawing/2014/main" id="{5E9D660B-F40F-CB41-B4B6-62BD62C97A47}"/>
-                </a:ext>
-              </a:extLst>
-            </p:cNvPr>
-            <p:cNvPicPr preferRelativeResize="0"/>
-            <p:nvPr/>
-          </p:nvPicPr>
-          <p:blipFill rotWithShape="1">
-            <a:blip r:embed="rId5">
-              <a:alphaModFix/>
-            </a:blip>
-            <a:srcRect/>
-            <a:stretch/>
-          </p:blipFill>
-          <p:spPr>
-            <a:xfrm>
-              <a:off x="287779" y="3741120"/>
-              <a:ext cx="252000" cy="252000"/>
-            </a:xfrm>
-            <a:prstGeom prst="rect">
-              <a:avLst/>
-            </a:prstGeom>
-            <a:noFill/>
-            <a:ln>
-              <a:noFill/>
-            </a:ln>
-          </p:spPr>
-        </p:pic>
-        <p:sp>
-          <p:nvSpPr>
-            <p:cNvPr id="33" name="Google Shape;111;p3">
-              <a:extLst>
-                <a:ext uri="{FF2B5EF4-FFF2-40B4-BE49-F238E27FC236}">
-                  <a16:creationId xmlns:a16="http://schemas.microsoft.com/office/drawing/2014/main" id="{23A12878-4A5D-E648-A640-94DEA9532F72}"/>
-                </a:ext>
-              </a:extLst>
-            </p:cNvPr>
-            <p:cNvSpPr txBox="1"/>
-            <p:nvPr/>
-          </p:nvSpPr>
-          <p:spPr>
-            <a:xfrm>
-              <a:off x="84051" y="4728776"/>
-              <a:ext cx="659482" cy="253886"/>
-            </a:xfrm>
-            <a:prstGeom prst="rect">
-              <a:avLst/>
-            </a:prstGeom>
-            <a:noFill/>
-            <a:ln>
-              <a:noFill/>
-            </a:ln>
-          </p:spPr>
-          <p:txBody>
-            <a:bodyPr spcFirstLastPara="1" wrap="square" lIns="91425" tIns="45700" rIns="91425" bIns="45700" anchor="t" anchorCtr="0">
-              <a:spAutoFit/>
-            </a:bodyPr>
-            <a:lstStyle/>
-            <a:p>
-              <a:pPr marL="0" marR="0" lvl="0" indent="0" algn="ctr" rtl="0">
-                <a:lnSpc>
-                  <a:spcPct val="100000"/>
-                </a:lnSpc>
-                <a:spcBef>
-                  <a:spcPts val="0"/>
-                </a:spcBef>
-                <a:spcAft>
-                  <a:spcPts val="0"/>
-                </a:spcAft>
-                <a:buClr>
-                  <a:schemeClr val="lt1"/>
-                </a:buClr>
-                <a:buSzPts val="800"/>
-                <a:buFont typeface="PT Sans"/>
-                <a:buNone/>
-              </a:pPr>
-              <a:r>
-                <a:rPr lang="ru-RU" sz="800" b="0">
-                  <a:solidFill>
-                    <a:schemeClr val="lt1"/>
-                  </a:solidFill>
-                  <a:latin typeface="PT Sans" panose="020B0503020203020204" pitchFamily="34" charset="0"/>
-                  <a:ea typeface="PT Sans"/>
-                  <a:cs typeface="PT Sans"/>
-                  <a:sym typeface="PT Sans"/>
-                </a:rPr>
-                <a:t>370</a:t>
-              </a:r>
-              <a:endParaRPr>
-                <a:latin typeface="PT Sans" panose="020B0503020203020204" pitchFamily="34" charset="0"/>
-              </a:endParaRPr>
-            </a:p>
-            <a:p>
-              <a:pPr marL="0" marR="0" lvl="0" indent="0" algn="ctr" rtl="0">
-                <a:lnSpc>
-                  <a:spcPct val="100000"/>
-                </a:lnSpc>
-                <a:spcBef>
-                  <a:spcPts val="0"/>
-                </a:spcBef>
-                <a:spcAft>
-                  <a:spcPts val="0"/>
-                </a:spcAft>
-                <a:buClr>
-                  <a:schemeClr val="lt1"/>
-                </a:buClr>
-                <a:buSzPts val="800"/>
-                <a:buFont typeface="PT Sans"/>
-                <a:buNone/>
-              </a:pPr>
-              <a:r>
-                <a:rPr lang="ru-RU" sz="800" b="0" u="none" strike="noStrike" cap="none">
-                  <a:solidFill>
-                    <a:schemeClr val="lt1"/>
-                  </a:solidFill>
-                  <a:latin typeface="PT Sans" panose="020B0503020203020204" pitchFamily="34" charset="0"/>
-                  <a:ea typeface="PT Sans"/>
-                  <a:cs typeface="PT Sans"/>
-                  <a:sym typeface="PT Sans"/>
-                </a:rPr>
-                <a:t>13</a:t>
-              </a:r>
-              <a:endParaRPr sz="800" b="0" u="none" strike="noStrike" cap="none">
-                <a:solidFill>
-                  <a:schemeClr val="lt1"/>
-                </a:solidFill>
-                <a:latin typeface="PT Sans" panose="020B0503020203020204" pitchFamily="34" charset="0"/>
-                <a:ea typeface="PT Sans"/>
-                <a:cs typeface="PT Sans"/>
-                <a:sym typeface="PT Sans"/>
-              </a:endParaRPr>
-            </a:p>
-          </p:txBody>
-        </p:sp>
-        <p:sp>
-          <p:nvSpPr>
-            <p:cNvPr id="34" name="Google Shape;112;p3">
-              <a:extLst>
-                <a:ext uri="{FF2B5EF4-FFF2-40B4-BE49-F238E27FC236}">
-                  <a16:creationId xmlns:a16="http://schemas.microsoft.com/office/drawing/2014/main" id="{0525B736-A5F9-A04E-92B8-E50E60AAE2C0}"/>
-                </a:ext>
-              </a:extLst>
-            </p:cNvPr>
-            <p:cNvSpPr txBox="1"/>
-            <p:nvPr/>
-          </p:nvSpPr>
-          <p:spPr>
-            <a:xfrm>
-              <a:off x="84051" y="4083918"/>
-              <a:ext cx="659482" cy="253886"/>
-            </a:xfrm>
-            <a:prstGeom prst="rect">
-              <a:avLst/>
-            </a:prstGeom>
-            <a:noFill/>
-            <a:ln>
-              <a:noFill/>
-            </a:ln>
-          </p:spPr>
-          <p:txBody>
-            <a:bodyPr spcFirstLastPara="1" wrap="square" lIns="91425" tIns="45700" rIns="91425" bIns="45700" anchor="t" anchorCtr="0">
-              <a:spAutoFit/>
-            </a:bodyPr>
-            <a:lstStyle/>
-            <a:p>
-              <a:pPr marL="0" marR="0" lvl="0" indent="0" algn="ctr" rtl="0">
-                <a:lnSpc>
-                  <a:spcPct val="100000"/>
-                </a:lnSpc>
-                <a:spcBef>
-                  <a:spcPts val="0"/>
-                </a:spcBef>
-                <a:spcAft>
-                  <a:spcPts val="0"/>
-                </a:spcAft>
-                <a:buClr>
-                  <a:schemeClr val="lt1"/>
-                </a:buClr>
-                <a:buSzPts val="800"/>
-                <a:buFont typeface="PT Sans"/>
-                <a:buNone/>
-              </a:pPr>
-              <a:r>
-                <a:rPr lang="ru-RU" sz="800" b="0">
-                  <a:solidFill>
-                    <a:schemeClr val="lt1"/>
-                  </a:solidFill>
-                  <a:latin typeface="PT Sans" panose="020B0503020203020204" pitchFamily="34" charset="0"/>
-                  <a:ea typeface="PT Sans"/>
-                  <a:cs typeface="PT Sans"/>
-                  <a:sym typeface="PT Sans"/>
-                </a:rPr>
-                <a:t>601-800</a:t>
-              </a:r>
-              <a:endParaRPr>
-                <a:latin typeface="PT Sans" panose="020B0503020203020204" pitchFamily="34" charset="0"/>
-              </a:endParaRPr>
-            </a:p>
-            <a:p>
-              <a:pPr marL="0" marR="0" lvl="0" indent="0" algn="ctr" rtl="0">
-                <a:lnSpc>
-                  <a:spcPct val="100000"/>
-                </a:lnSpc>
-                <a:spcBef>
-                  <a:spcPts val="0"/>
-                </a:spcBef>
-                <a:spcAft>
-                  <a:spcPts val="0"/>
-                </a:spcAft>
-                <a:buClr>
-                  <a:schemeClr val="lt1"/>
-                </a:buClr>
-                <a:buSzPts val="800"/>
-                <a:buFont typeface="PT Sans"/>
-                <a:buNone/>
-              </a:pPr>
-              <a:r>
-                <a:rPr lang="ru-RU" sz="800" b="0" u="none" strike="noStrike" cap="none">
-                  <a:solidFill>
-                    <a:schemeClr val="lt1"/>
-                  </a:solidFill>
-                  <a:latin typeface="PT Sans" panose="020B0503020203020204" pitchFamily="34" charset="0"/>
-                  <a:ea typeface="PT Sans"/>
-                  <a:cs typeface="PT Sans"/>
-                  <a:sym typeface="PT Sans"/>
-                </a:rPr>
-                <a:t>9</a:t>
-              </a:r>
-              <a:endParaRPr sz="800" b="0" u="none" strike="noStrike" cap="none">
-                <a:solidFill>
-                  <a:schemeClr val="lt1"/>
-                </a:solidFill>
-                <a:latin typeface="PT Sans" panose="020B0503020203020204" pitchFamily="34" charset="0"/>
-                <a:ea typeface="PT Sans"/>
-                <a:cs typeface="PT Sans"/>
-                <a:sym typeface="PT Sans"/>
-              </a:endParaRPr>
-            </a:p>
-          </p:txBody>
-        </p:sp>
-      </p:grpSp>
-      <p:sp>
-        <p:nvSpPr>
-          <p:cNvPr id="37" name="Google Shape;108;p3">
-            <a:extLst>
-              <a:ext uri="{FF2B5EF4-FFF2-40B4-BE49-F238E27FC236}">
-                <a16:creationId xmlns:a16="http://schemas.microsoft.com/office/drawing/2014/main" id="{5493CD04-205D-294C-BD53-0914C34565C1}"/>
-              </a:ext>
-            </a:extLst>
-          </p:cNvPr>
-          <p:cNvSpPr txBox="1"/>
-          <p:nvPr/>
-        </p:nvSpPr>
-        <p:spPr>
-          <a:xfrm>
-            <a:off x="964967" y="220551"/>
-            <a:ext cx="7344816" cy="369291"/>
-          </a:xfrm>
-          <a:prstGeom prst="rect">
-            <a:avLst/>
-          </a:prstGeom>
-          <a:noFill/>
-          <a:ln>
-            <a:noFill/>
-          </a:ln>
-        </p:spPr>
-        <p:txBody>
-          <a:bodyPr spcFirstLastPara="1" wrap="square" lIns="91425" tIns="45700" rIns="91425" bIns="45700" anchor="t" anchorCtr="0">
-            <a:spAutoFit/>
-          </a:bodyPr>
-          <a:lstStyle/>
-          <a:p>
-            <a:pPr marL="0" marR="0" lvl="0" indent="0" algn="l" rtl="0">
-              <a:spcBef>
-                <a:spcPts val="0"/>
-              </a:spcBef>
-              <a:spcAft>
-                <a:spcPts val="0"/>
-              </a:spcAft>
-              <a:buNone/>
-            </a:pPr>
-            <a:r>
-              <a:rPr lang="ru-RU" dirty="0">
-                <a:solidFill>
-                  <a:srgbClr val="00549F"/>
-                </a:solidFill>
-                <a:latin typeface="PT Sans"/>
-                <a:ea typeface="PT Sans"/>
-                <a:cs typeface="PT Sans"/>
-                <a:sym typeface="PT Sans"/>
-              </a:rPr>
-              <a:t>Введение</a:t>
-            </a:r>
-            <a:endParaRPr lang="en-US" dirty="0">
-              <a:solidFill>
-                <a:srgbClr val="00549F"/>
-              </a:solidFill>
-              <a:latin typeface="PT Sans"/>
-              <a:ea typeface="PT Sans"/>
-              <a:cs typeface="PT Sans"/>
-              <a:sym typeface="PT Sans"/>
-            </a:endParaRPr>
-          </a:p>
-        </p:txBody>
-      </p:sp>
-      <p:sp>
-        <p:nvSpPr>
-          <p:cNvPr id="12" name="Объект 2"/>
-          <p:cNvSpPr>
-            <a:spLocks noGrp="1"/>
-          </p:cNvSpPr>
-          <p:nvPr>
-            <p:ph idx="1"/>
-          </p:nvPr>
-        </p:nvSpPr>
-        <p:spPr>
-          <a:xfrm>
-            <a:off x="1043608" y="926349"/>
-            <a:ext cx="10562698" cy="5677647"/>
-          </a:xfrm>
-        </p:spPr>
-        <p:txBody>
-          <a:bodyPr>
-            <a:normAutofit/>
-          </a:bodyPr>
-          <a:lstStyle/>
-          <a:p>
-            <a:pPr marL="0" indent="0" algn="just">
-              <a:buNone/>
-            </a:pPr>
-            <a:r>
-              <a:rPr lang="ru-RU" b="0" i="0" dirty="0">
-                <a:effectLst/>
-                <a:latin typeface="fkGroteskNeue"/>
-              </a:rPr>
-              <a:t>Где мы были и где мы теперь:</a:t>
-            </a:r>
-          </a:p>
-          <a:p>
-            <a:pPr marL="0" indent="0" algn="l">
-              <a:buNone/>
-            </a:pPr>
-            <a:r>
-              <a:rPr lang="ru-RU" b="0" i="0" dirty="0">
-                <a:effectLst/>
-                <a:latin typeface="fkGroteskNeue"/>
-              </a:rPr>
-              <a:t>Лекция 1:</a:t>
-            </a:r>
-          </a:p>
-          <a:p>
-            <a:pPr algn="l">
-              <a:buFont typeface="Arial" panose="020B0604020202020204" pitchFamily="34" charset="0"/>
-              <a:buChar char="•"/>
-            </a:pPr>
-            <a:r>
-              <a:rPr lang="ru-RU" b="0" i="0" dirty="0">
-                <a:effectLst/>
-                <a:latin typeface="fkGroteskNeue"/>
-              </a:rPr>
-              <a:t>Базовые алгоритмы</a:t>
-            </a:r>
-          </a:p>
-          <a:p>
-            <a:pPr algn="l">
-              <a:buFont typeface="Arial" panose="020B0604020202020204" pitchFamily="34" charset="0"/>
-              <a:buChar char="•"/>
-            </a:pPr>
-            <a:r>
-              <a:rPr lang="ru-RU" b="0" i="0" dirty="0">
-                <a:effectLst/>
-                <a:latin typeface="fkGroteskNeue"/>
-              </a:rPr>
-              <a:t>Простые метрики</a:t>
-            </a:r>
-          </a:p>
-          <a:p>
-            <a:pPr algn="l">
-              <a:buFont typeface="Arial" panose="020B0604020202020204" pitchFamily="34" charset="0"/>
-              <a:buChar char="•"/>
-            </a:pPr>
-            <a:r>
-              <a:rPr lang="ru-RU" b="0" i="0" dirty="0">
-                <a:effectLst/>
-                <a:latin typeface="fkGroteskNeue"/>
-              </a:rPr>
-              <a:t>Идеальные данные (хорошо сбалансированные)</a:t>
-            </a:r>
-          </a:p>
-          <a:p>
-            <a:pPr marL="0" indent="0" algn="l">
-              <a:buNone/>
-            </a:pPr>
-            <a:r>
-              <a:rPr lang="ru-RU" b="0" i="0" dirty="0">
-                <a:effectLst/>
-                <a:latin typeface="fkGroteskNeue"/>
-              </a:rPr>
-              <a:t>Реальный мир:</a:t>
-            </a:r>
-          </a:p>
-          <a:p>
-            <a:pPr algn="l">
-              <a:buFont typeface="Arial" panose="020B0604020202020204" pitchFamily="34" charset="0"/>
-              <a:buChar char="•"/>
-            </a:pPr>
-            <a:r>
-              <a:rPr lang="ru-RU" b="0" i="0" dirty="0">
-                <a:effectLst/>
-                <a:latin typeface="fkGroteskNeue"/>
-              </a:rPr>
-              <a:t>Модель говорит "хорошо", но что это значит?</a:t>
-            </a:r>
-          </a:p>
-          <a:p>
-            <a:pPr algn="l">
-              <a:buFont typeface="Arial" panose="020B0604020202020204" pitchFamily="34" charset="0"/>
-              <a:buChar char="•"/>
-            </a:pPr>
-            <a:r>
-              <a:rPr lang="ru-RU" b="0" i="0" dirty="0">
-                <a:effectLst/>
-                <a:latin typeface="fkGroteskNeue"/>
-              </a:rPr>
-              <a:t>Несбалансированные классы (99% здоровых)</a:t>
-            </a:r>
-          </a:p>
-          <a:p>
-            <a:pPr algn="l">
-              <a:buFont typeface="Arial" panose="020B0604020202020204" pitchFamily="34" charset="0"/>
-              <a:buChar char="•"/>
-            </a:pPr>
-            <a:r>
-              <a:rPr lang="ru-RU" b="0" i="0" dirty="0">
-                <a:effectLst/>
-                <a:latin typeface="fkGroteskNeue"/>
-              </a:rPr>
-              <a:t>Нужна интерпретация: почему именно этот прогноз?</a:t>
-            </a:r>
-          </a:p>
-          <a:p>
-            <a:pPr marL="0" indent="0" algn="just">
-              <a:buNone/>
-            </a:pPr>
-            <a:endParaRPr lang="ru-RU" b="0" i="0" dirty="0">
-              <a:effectLst/>
-              <a:latin typeface="fkGroteskNeue"/>
-            </a:endParaRPr>
-          </a:p>
-          <a:p>
-            <a:pPr marL="0" indent="0" algn="just">
-              <a:buNone/>
-            </a:pPr>
-            <a:endParaRPr lang="ru-RU" sz="4000" dirty="0"/>
-          </a:p>
-        </p:txBody>
-      </p:sp>
-    </p:spTree>
-    <p:extLst>
-      <p:ext uri="{BB962C8B-B14F-4D97-AF65-F5344CB8AC3E}">
-        <p14:creationId xmlns:p14="http://schemas.microsoft.com/office/powerpoint/2010/main" val="2824079103"/>
-      </p:ext>
-    </p:extLst>
-  </p:cSld>
-  <p:clrMapOvr>
-    <a:masterClrMapping/>
-  </p:clrMapOvr>
-</p:sld>
-</file>
-
-<file path=ppt/slides/slide20.xml><?xml version="1.0" encoding="utf-8"?>
+<file path=ppt/slides/slide19.xml><?xml version="1.0" encoding="utf-8"?>
 <p:sld xmlns:a="http://schemas.openxmlformats.org/drawingml/2006/main" xmlns:r="http://schemas.openxmlformats.org/officeDocument/2006/relationships" xmlns:p="http://schemas.openxmlformats.org/presentationml/2006/main">
   <p:cSld>
     <p:spTree>
@@ -17978,7 +11881,7 @@
                 <a:latin typeface="PT Sans" panose="020B0503020203020204" pitchFamily="34" charset="0"/>
               </a:rPr>
               <a:pPr/>
-              <a:t>20</a:t>
+              <a:t>19</a:t>
             </a:fld>
             <a:endParaRPr lang="ru-RU" dirty="0">
               <a:latin typeface="PT Sans" panose="020B0503020203020204" pitchFamily="34" charset="0"/>
@@ -18545,7 +12448,678 @@
 </p:sld>
 </file>
 
-<file path=ppt/slides/slide21.xml><?xml version="1.0" encoding="utf-8"?>
+<file path=ppt/slides/slide2.xml><?xml version="1.0" encoding="utf-8"?>
+<p:sld xmlns:a="http://schemas.openxmlformats.org/drawingml/2006/main" xmlns:r="http://schemas.openxmlformats.org/officeDocument/2006/relationships" xmlns:p="http://schemas.openxmlformats.org/presentationml/2006/main">
+  <p:cSld>
+    <p:spTree>
+      <p:nvGrpSpPr>
+        <p:cNvPr id="1" name=""/>
+        <p:cNvGrpSpPr/>
+        <p:nvPr/>
+      </p:nvGrpSpPr>
+      <p:grpSpPr>
+        <a:xfrm>
+          <a:off x="0" y="0"/>
+          <a:ext cx="0" cy="0"/>
+          <a:chOff x="0" y="0"/>
+          <a:chExt cx="0" cy="0"/>
+        </a:xfrm>
+      </p:grpSpPr>
+      <p:sp>
+        <p:nvSpPr>
+          <p:cNvPr id="13" name="Номер слайда 12"/>
+          <p:cNvSpPr>
+            <a:spLocks noGrp="1"/>
+          </p:cNvSpPr>
+          <p:nvPr>
+            <p:ph type="sldNum" sz="quarter" idx="12"/>
+          </p:nvPr>
+        </p:nvSpPr>
+        <p:spPr/>
+        <p:txBody>
+          <a:bodyPr/>
+          <a:lstStyle/>
+          <a:p>
+            <a:fld id="{B19B0651-EE4F-4900-A07F-96A6BFA9D0F0}" type="slidenum">
+              <a:rPr lang="ru-RU" smtClean="0">
+                <a:latin typeface="PT Sans" panose="020B0503020203020204" pitchFamily="34" charset="0"/>
+              </a:rPr>
+              <a:pPr/>
+              <a:t>2</a:t>
+            </a:fld>
+            <a:endParaRPr lang="ru-RU" dirty="0">
+              <a:latin typeface="PT Sans" panose="020B0503020203020204" pitchFamily="34" charset="0"/>
+            </a:endParaRPr>
+          </a:p>
+        </p:txBody>
+      </p:sp>
+      <p:grpSp>
+        <p:nvGrpSpPr>
+          <p:cNvPr id="24" name="Группа 23">
+            <a:extLst>
+              <a:ext uri="{FF2B5EF4-FFF2-40B4-BE49-F238E27FC236}">
+                <a16:creationId xmlns:a16="http://schemas.microsoft.com/office/drawing/2014/main" id="{98A76A24-00EA-EE42-8A4F-846D0D0A92B0}"/>
+              </a:ext>
+            </a:extLst>
+          </p:cNvPr>
+          <p:cNvGrpSpPr/>
+          <p:nvPr/>
+        </p:nvGrpSpPr>
+        <p:grpSpPr>
+          <a:xfrm>
+            <a:off x="-50" y="0"/>
+            <a:ext cx="827700" cy="6858000"/>
+            <a:chOff x="-50" y="0"/>
+            <a:chExt cx="827700" cy="5143500"/>
+          </a:xfrm>
+        </p:grpSpPr>
+        <p:sp>
+          <p:nvSpPr>
+            <p:cNvPr id="25" name="Google Shape;106;p3">
+              <a:extLst>
+                <a:ext uri="{FF2B5EF4-FFF2-40B4-BE49-F238E27FC236}">
+                  <a16:creationId xmlns:a16="http://schemas.microsoft.com/office/drawing/2014/main" id="{1212ABD6-BB78-564D-90F4-45A9BF52F65A}"/>
+                </a:ext>
+              </a:extLst>
+            </p:cNvPr>
+            <p:cNvSpPr/>
+            <p:nvPr/>
+          </p:nvSpPr>
+          <p:spPr>
+            <a:xfrm>
+              <a:off x="-50" y="0"/>
+              <a:ext cx="827700" cy="5143500"/>
+            </a:xfrm>
+            <a:prstGeom prst="rect">
+              <a:avLst/>
+            </a:prstGeom>
+            <a:gradFill>
+              <a:gsLst>
+                <a:gs pos="0">
+                  <a:srgbClr val="003061"/>
+                </a:gs>
+                <a:gs pos="50000">
+                  <a:srgbClr val="00468D"/>
+                </a:gs>
+                <a:gs pos="100000">
+                  <a:srgbClr val="0054AA"/>
+                </a:gs>
+              </a:gsLst>
+              <a:lin ang="5400000" scaled="0"/>
+            </a:gradFill>
+            <a:ln>
+              <a:noFill/>
+            </a:ln>
+          </p:spPr>
+          <p:txBody>
+            <a:bodyPr spcFirstLastPara="1" wrap="square" lIns="91425" tIns="45700" rIns="91425" bIns="45700" anchor="ctr" anchorCtr="0">
+              <a:noAutofit/>
+            </a:bodyPr>
+            <a:lstStyle/>
+            <a:p>
+              <a:pPr marL="0" marR="0" lvl="0" indent="0" algn="ctr" rtl="0">
+                <a:spcBef>
+                  <a:spcPts val="0"/>
+                </a:spcBef>
+                <a:spcAft>
+                  <a:spcPts val="0"/>
+                </a:spcAft>
+                <a:buNone/>
+              </a:pPr>
+              <a:endParaRPr sz="1800">
+                <a:solidFill>
+                  <a:schemeClr val="lt1"/>
+                </a:solidFill>
+                <a:latin typeface="PT Sans" panose="020B0503020203020204" pitchFamily="34" charset="0"/>
+                <a:ea typeface="Calibri"/>
+                <a:cs typeface="Calibri"/>
+                <a:sym typeface="Calibri"/>
+              </a:endParaRPr>
+            </a:p>
+          </p:txBody>
+        </p:sp>
+        <p:pic>
+          <p:nvPicPr>
+            <p:cNvPr id="28" name="Google Shape;107;p3" descr="C:\Users\MSShafigullin\Desktop\2020\Презентация КФУ\kfu_logo_circle_rus.png">
+              <a:extLst>
+                <a:ext uri="{FF2B5EF4-FFF2-40B4-BE49-F238E27FC236}">
+                  <a16:creationId xmlns:a16="http://schemas.microsoft.com/office/drawing/2014/main" id="{C968D678-6F52-2F45-8BE7-5E2313AF23D6}"/>
+                </a:ext>
+              </a:extLst>
+            </p:cNvPr>
+            <p:cNvPicPr preferRelativeResize="0"/>
+            <p:nvPr/>
+          </p:nvPicPr>
+          <p:blipFill rotWithShape="1">
+            <a:blip r:embed="rId3">
+              <a:alphaModFix/>
+            </a:blip>
+            <a:srcRect/>
+            <a:stretch/>
+          </p:blipFill>
+          <p:spPr>
+            <a:xfrm>
+              <a:off x="137267" y="87534"/>
+              <a:ext cx="553050" cy="432728"/>
+            </a:xfrm>
+            <a:prstGeom prst="rect">
+              <a:avLst/>
+            </a:prstGeom>
+            <a:noFill/>
+            <a:ln>
+              <a:noFill/>
+            </a:ln>
+          </p:spPr>
+        </p:pic>
+        <p:pic>
+          <p:nvPicPr>
+            <p:cNvPr id="30" name="Google Shape;109;p3" descr="C:\Users\MSShafigullin\Desktop\Проекты\Презентация по ДК\qs.jpg">
+              <a:extLst>
+                <a:ext uri="{FF2B5EF4-FFF2-40B4-BE49-F238E27FC236}">
+                  <a16:creationId xmlns:a16="http://schemas.microsoft.com/office/drawing/2014/main" id="{1F22E8DB-9008-9D4B-9E64-C397CC33A9DA}"/>
+                </a:ext>
+              </a:extLst>
+            </p:cNvPr>
+            <p:cNvPicPr preferRelativeResize="0"/>
+            <p:nvPr/>
+          </p:nvPicPr>
+          <p:blipFill rotWithShape="1">
+            <a:blip r:embed="rId4">
+              <a:alphaModFix/>
+            </a:blip>
+            <a:srcRect/>
+            <a:stretch/>
+          </p:blipFill>
+          <p:spPr>
+            <a:xfrm>
+              <a:off x="237087" y="4422472"/>
+              <a:ext cx="353386" cy="353386"/>
+            </a:xfrm>
+            <a:prstGeom prst="rect">
+              <a:avLst/>
+            </a:prstGeom>
+            <a:noFill/>
+            <a:ln>
+              <a:noFill/>
+            </a:ln>
+          </p:spPr>
+        </p:pic>
+        <p:pic>
+          <p:nvPicPr>
+            <p:cNvPr id="31" name="Google Shape;110;p3" descr="C:\Users\MSShafigullin\Desktop\2020\Презентация КФУ\THE.png">
+              <a:extLst>
+                <a:ext uri="{FF2B5EF4-FFF2-40B4-BE49-F238E27FC236}">
+                  <a16:creationId xmlns:a16="http://schemas.microsoft.com/office/drawing/2014/main" id="{5E9D660B-F40F-CB41-B4B6-62BD62C97A47}"/>
+                </a:ext>
+              </a:extLst>
+            </p:cNvPr>
+            <p:cNvPicPr preferRelativeResize="0"/>
+            <p:nvPr/>
+          </p:nvPicPr>
+          <p:blipFill rotWithShape="1">
+            <a:blip r:embed="rId5">
+              <a:alphaModFix/>
+            </a:blip>
+            <a:srcRect/>
+            <a:stretch/>
+          </p:blipFill>
+          <p:spPr>
+            <a:xfrm>
+              <a:off x="287779" y="3741120"/>
+              <a:ext cx="252000" cy="252000"/>
+            </a:xfrm>
+            <a:prstGeom prst="rect">
+              <a:avLst/>
+            </a:prstGeom>
+            <a:noFill/>
+            <a:ln>
+              <a:noFill/>
+            </a:ln>
+          </p:spPr>
+        </p:pic>
+        <p:sp>
+          <p:nvSpPr>
+            <p:cNvPr id="33" name="Google Shape;111;p3">
+              <a:extLst>
+                <a:ext uri="{FF2B5EF4-FFF2-40B4-BE49-F238E27FC236}">
+                  <a16:creationId xmlns:a16="http://schemas.microsoft.com/office/drawing/2014/main" id="{23A12878-4A5D-E648-A640-94DEA9532F72}"/>
+                </a:ext>
+              </a:extLst>
+            </p:cNvPr>
+            <p:cNvSpPr txBox="1"/>
+            <p:nvPr/>
+          </p:nvSpPr>
+          <p:spPr>
+            <a:xfrm>
+              <a:off x="84051" y="4728776"/>
+              <a:ext cx="659482" cy="253886"/>
+            </a:xfrm>
+            <a:prstGeom prst="rect">
+              <a:avLst/>
+            </a:prstGeom>
+            <a:noFill/>
+            <a:ln>
+              <a:noFill/>
+            </a:ln>
+          </p:spPr>
+          <p:txBody>
+            <a:bodyPr spcFirstLastPara="1" wrap="square" lIns="91425" tIns="45700" rIns="91425" bIns="45700" anchor="t" anchorCtr="0">
+              <a:spAutoFit/>
+            </a:bodyPr>
+            <a:lstStyle/>
+            <a:p>
+              <a:pPr marL="0" marR="0" lvl="0" indent="0" algn="ctr" rtl="0">
+                <a:lnSpc>
+                  <a:spcPct val="100000"/>
+                </a:lnSpc>
+                <a:spcBef>
+                  <a:spcPts val="0"/>
+                </a:spcBef>
+                <a:spcAft>
+                  <a:spcPts val="0"/>
+                </a:spcAft>
+                <a:buClr>
+                  <a:schemeClr val="lt1"/>
+                </a:buClr>
+                <a:buSzPts val="800"/>
+                <a:buFont typeface="PT Sans"/>
+                <a:buNone/>
+              </a:pPr>
+              <a:r>
+                <a:rPr lang="ru-RU" sz="800" b="0">
+                  <a:solidFill>
+                    <a:schemeClr val="lt1"/>
+                  </a:solidFill>
+                  <a:latin typeface="PT Sans" panose="020B0503020203020204" pitchFamily="34" charset="0"/>
+                  <a:ea typeface="PT Sans"/>
+                  <a:cs typeface="PT Sans"/>
+                  <a:sym typeface="PT Sans"/>
+                </a:rPr>
+                <a:t>370</a:t>
+              </a:r>
+              <a:endParaRPr>
+                <a:latin typeface="PT Sans" panose="020B0503020203020204" pitchFamily="34" charset="0"/>
+              </a:endParaRPr>
+            </a:p>
+            <a:p>
+              <a:pPr marL="0" marR="0" lvl="0" indent="0" algn="ctr" rtl="0">
+                <a:lnSpc>
+                  <a:spcPct val="100000"/>
+                </a:lnSpc>
+                <a:spcBef>
+                  <a:spcPts val="0"/>
+                </a:spcBef>
+                <a:spcAft>
+                  <a:spcPts val="0"/>
+                </a:spcAft>
+                <a:buClr>
+                  <a:schemeClr val="lt1"/>
+                </a:buClr>
+                <a:buSzPts val="800"/>
+                <a:buFont typeface="PT Sans"/>
+                <a:buNone/>
+              </a:pPr>
+              <a:r>
+                <a:rPr lang="ru-RU" sz="800" b="0" u="none" strike="noStrike" cap="none">
+                  <a:solidFill>
+                    <a:schemeClr val="lt1"/>
+                  </a:solidFill>
+                  <a:latin typeface="PT Sans" panose="020B0503020203020204" pitchFamily="34" charset="0"/>
+                  <a:ea typeface="PT Sans"/>
+                  <a:cs typeface="PT Sans"/>
+                  <a:sym typeface="PT Sans"/>
+                </a:rPr>
+                <a:t>13</a:t>
+              </a:r>
+              <a:endParaRPr sz="800" b="0" u="none" strike="noStrike" cap="none">
+                <a:solidFill>
+                  <a:schemeClr val="lt1"/>
+                </a:solidFill>
+                <a:latin typeface="PT Sans" panose="020B0503020203020204" pitchFamily="34" charset="0"/>
+                <a:ea typeface="PT Sans"/>
+                <a:cs typeface="PT Sans"/>
+                <a:sym typeface="PT Sans"/>
+              </a:endParaRPr>
+            </a:p>
+          </p:txBody>
+        </p:sp>
+        <p:sp>
+          <p:nvSpPr>
+            <p:cNvPr id="34" name="Google Shape;112;p3">
+              <a:extLst>
+                <a:ext uri="{FF2B5EF4-FFF2-40B4-BE49-F238E27FC236}">
+                  <a16:creationId xmlns:a16="http://schemas.microsoft.com/office/drawing/2014/main" id="{0525B736-A5F9-A04E-92B8-E50E60AAE2C0}"/>
+                </a:ext>
+              </a:extLst>
+            </p:cNvPr>
+            <p:cNvSpPr txBox="1"/>
+            <p:nvPr/>
+          </p:nvSpPr>
+          <p:spPr>
+            <a:xfrm>
+              <a:off x="84051" y="4083918"/>
+              <a:ext cx="659482" cy="253886"/>
+            </a:xfrm>
+            <a:prstGeom prst="rect">
+              <a:avLst/>
+            </a:prstGeom>
+            <a:noFill/>
+            <a:ln>
+              <a:noFill/>
+            </a:ln>
+          </p:spPr>
+          <p:txBody>
+            <a:bodyPr spcFirstLastPara="1" wrap="square" lIns="91425" tIns="45700" rIns="91425" bIns="45700" anchor="t" anchorCtr="0">
+              <a:spAutoFit/>
+            </a:bodyPr>
+            <a:lstStyle/>
+            <a:p>
+              <a:pPr marL="0" marR="0" lvl="0" indent="0" algn="ctr" rtl="0">
+                <a:lnSpc>
+                  <a:spcPct val="100000"/>
+                </a:lnSpc>
+                <a:spcBef>
+                  <a:spcPts val="0"/>
+                </a:spcBef>
+                <a:spcAft>
+                  <a:spcPts val="0"/>
+                </a:spcAft>
+                <a:buClr>
+                  <a:schemeClr val="lt1"/>
+                </a:buClr>
+                <a:buSzPts val="800"/>
+                <a:buFont typeface="PT Sans"/>
+                <a:buNone/>
+              </a:pPr>
+              <a:r>
+                <a:rPr lang="ru-RU" sz="800" b="0">
+                  <a:solidFill>
+                    <a:schemeClr val="lt1"/>
+                  </a:solidFill>
+                  <a:latin typeface="PT Sans" panose="020B0503020203020204" pitchFamily="34" charset="0"/>
+                  <a:ea typeface="PT Sans"/>
+                  <a:cs typeface="PT Sans"/>
+                  <a:sym typeface="PT Sans"/>
+                </a:rPr>
+                <a:t>601-800</a:t>
+              </a:r>
+              <a:endParaRPr>
+                <a:latin typeface="PT Sans" panose="020B0503020203020204" pitchFamily="34" charset="0"/>
+              </a:endParaRPr>
+            </a:p>
+            <a:p>
+              <a:pPr marL="0" marR="0" lvl="0" indent="0" algn="ctr" rtl="0">
+                <a:lnSpc>
+                  <a:spcPct val="100000"/>
+                </a:lnSpc>
+                <a:spcBef>
+                  <a:spcPts val="0"/>
+                </a:spcBef>
+                <a:spcAft>
+                  <a:spcPts val="0"/>
+                </a:spcAft>
+                <a:buClr>
+                  <a:schemeClr val="lt1"/>
+                </a:buClr>
+                <a:buSzPts val="800"/>
+                <a:buFont typeface="PT Sans"/>
+                <a:buNone/>
+              </a:pPr>
+              <a:r>
+                <a:rPr lang="ru-RU" sz="800" b="0" u="none" strike="noStrike" cap="none">
+                  <a:solidFill>
+                    <a:schemeClr val="lt1"/>
+                  </a:solidFill>
+                  <a:latin typeface="PT Sans" panose="020B0503020203020204" pitchFamily="34" charset="0"/>
+                  <a:ea typeface="PT Sans"/>
+                  <a:cs typeface="PT Sans"/>
+                  <a:sym typeface="PT Sans"/>
+                </a:rPr>
+                <a:t>9</a:t>
+              </a:r>
+              <a:endParaRPr sz="800" b="0" u="none" strike="noStrike" cap="none">
+                <a:solidFill>
+                  <a:schemeClr val="lt1"/>
+                </a:solidFill>
+                <a:latin typeface="PT Sans" panose="020B0503020203020204" pitchFamily="34" charset="0"/>
+                <a:ea typeface="PT Sans"/>
+                <a:cs typeface="PT Sans"/>
+                <a:sym typeface="PT Sans"/>
+              </a:endParaRPr>
+            </a:p>
+          </p:txBody>
+        </p:sp>
+      </p:grpSp>
+      <p:sp>
+        <p:nvSpPr>
+          <p:cNvPr id="37" name="Google Shape;108;p3">
+            <a:extLst>
+              <a:ext uri="{FF2B5EF4-FFF2-40B4-BE49-F238E27FC236}">
+                <a16:creationId xmlns:a16="http://schemas.microsoft.com/office/drawing/2014/main" id="{5493CD04-205D-294C-BD53-0914C34565C1}"/>
+              </a:ext>
+            </a:extLst>
+          </p:cNvPr>
+          <p:cNvSpPr txBox="1"/>
+          <p:nvPr/>
+        </p:nvSpPr>
+        <p:spPr>
+          <a:xfrm>
+            <a:off x="964967" y="220551"/>
+            <a:ext cx="7344816" cy="369291"/>
+          </a:xfrm>
+          <a:prstGeom prst="rect">
+            <a:avLst/>
+          </a:prstGeom>
+          <a:noFill/>
+          <a:ln>
+            <a:noFill/>
+          </a:ln>
+        </p:spPr>
+        <p:txBody>
+          <a:bodyPr spcFirstLastPara="1" wrap="square" lIns="91425" tIns="45700" rIns="91425" bIns="45700" anchor="t" anchorCtr="0">
+            <a:spAutoFit/>
+          </a:bodyPr>
+          <a:lstStyle/>
+          <a:p>
+            <a:pPr marL="0" marR="0" lvl="0" indent="0" algn="l" rtl="0">
+              <a:spcBef>
+                <a:spcPts val="0"/>
+              </a:spcBef>
+              <a:spcAft>
+                <a:spcPts val="0"/>
+              </a:spcAft>
+              <a:buNone/>
+            </a:pPr>
+            <a:r>
+              <a:rPr lang="ru-RU" dirty="0">
+                <a:solidFill>
+                  <a:srgbClr val="00549F"/>
+                </a:solidFill>
+                <a:latin typeface="PT Sans"/>
+                <a:ea typeface="PT Sans"/>
+                <a:cs typeface="PT Sans"/>
+                <a:sym typeface="PT Sans"/>
+              </a:rPr>
+              <a:t>Введение</a:t>
+            </a:r>
+            <a:endParaRPr lang="en-US" dirty="0">
+              <a:solidFill>
+                <a:srgbClr val="00549F"/>
+              </a:solidFill>
+              <a:latin typeface="PT Sans"/>
+              <a:ea typeface="PT Sans"/>
+              <a:cs typeface="PT Sans"/>
+              <a:sym typeface="PT Sans"/>
+            </a:endParaRPr>
+          </a:p>
+        </p:txBody>
+      </p:sp>
+      <p:sp>
+        <p:nvSpPr>
+          <p:cNvPr id="12" name="Объект 2"/>
+          <p:cNvSpPr>
+            <a:spLocks noGrp="1"/>
+          </p:cNvSpPr>
+          <p:nvPr>
+            <p:ph idx="1"/>
+          </p:nvPr>
+        </p:nvSpPr>
+        <p:spPr>
+          <a:xfrm>
+            <a:off x="1043608" y="926349"/>
+            <a:ext cx="10562698" cy="5677647"/>
+          </a:xfrm>
+        </p:spPr>
+        <p:txBody>
+          <a:bodyPr>
+            <a:normAutofit/>
+          </a:bodyPr>
+          <a:lstStyle/>
+          <a:p>
+            <a:pPr marL="0" indent="0" algn="just">
+              <a:buNone/>
+            </a:pPr>
+            <a:r>
+              <a:rPr lang="ru-RU" b="0" i="0" dirty="0">
+                <a:effectLst/>
+                <a:latin typeface="fkGroteskNeue"/>
+              </a:rPr>
+              <a:t>Где мы были и где мы теперь:</a:t>
+            </a:r>
+          </a:p>
+          <a:p>
+            <a:pPr marL="0" indent="0" algn="l">
+              <a:buNone/>
+            </a:pPr>
+            <a:r>
+              <a:rPr lang="ru-RU" b="0" i="0" dirty="0">
+                <a:effectLst/>
+                <a:latin typeface="fkGroteskNeue"/>
+              </a:rPr>
+              <a:t>Лекция 1:</a:t>
+            </a:r>
+          </a:p>
+          <a:p>
+            <a:pPr algn="l">
+              <a:buFont typeface="Arial" panose="020B0604020202020204" pitchFamily="34" charset="0"/>
+              <a:buChar char="•"/>
+            </a:pPr>
+            <a:r>
+              <a:rPr lang="ru-RU" b="0" i="0" dirty="0">
+                <a:effectLst/>
+                <a:latin typeface="fkGroteskNeue"/>
+              </a:rPr>
+              <a:t>Базовые алгоритмы</a:t>
+            </a:r>
+          </a:p>
+          <a:p>
+            <a:pPr algn="l">
+              <a:buFont typeface="Arial" panose="020B0604020202020204" pitchFamily="34" charset="0"/>
+              <a:buChar char="•"/>
+            </a:pPr>
+            <a:r>
+              <a:rPr lang="ru-RU" b="0" i="0" dirty="0">
+                <a:effectLst/>
+                <a:latin typeface="fkGroteskNeue"/>
+              </a:rPr>
+              <a:t>Простые метрики</a:t>
+            </a:r>
+          </a:p>
+          <a:p>
+            <a:pPr algn="l">
+              <a:buFont typeface="Arial" panose="020B0604020202020204" pitchFamily="34" charset="0"/>
+              <a:buChar char="•"/>
+            </a:pPr>
+            <a:r>
+              <a:rPr lang="ru-RU" b="0" i="0" dirty="0">
+                <a:effectLst/>
+                <a:latin typeface="fkGroteskNeue"/>
+              </a:rPr>
+              <a:t>Идеальные данные (хорошо сбалансированные)</a:t>
+            </a:r>
+          </a:p>
+          <a:p>
+            <a:pPr marL="0" indent="0" algn="l">
+              <a:buNone/>
+            </a:pPr>
+            <a:r>
+              <a:rPr lang="ru-RU" b="0" i="0" dirty="0">
+                <a:effectLst/>
+                <a:latin typeface="fkGroteskNeue"/>
+              </a:rPr>
+              <a:t>Реальный мир:</a:t>
+            </a:r>
+          </a:p>
+          <a:p>
+            <a:pPr algn="l">
+              <a:buFont typeface="Arial" panose="020B0604020202020204" pitchFamily="34" charset="0"/>
+              <a:buChar char="•"/>
+            </a:pPr>
+            <a:r>
+              <a:rPr lang="ru-RU" b="0" i="0" dirty="0">
+                <a:effectLst/>
+                <a:latin typeface="fkGroteskNeue"/>
+              </a:rPr>
+              <a:t>Модель говорит "хорошо", но что это значит?</a:t>
+            </a:r>
+          </a:p>
+          <a:p>
+            <a:pPr algn="l">
+              <a:buFont typeface="Arial" panose="020B0604020202020204" pitchFamily="34" charset="0"/>
+              <a:buChar char="•"/>
+            </a:pPr>
+            <a:r>
+              <a:rPr lang="ru-RU" b="0" i="0" dirty="0">
+                <a:effectLst/>
+                <a:latin typeface="fkGroteskNeue"/>
+              </a:rPr>
+              <a:t>Несбалансированные классы (99% здоровых)</a:t>
+            </a:r>
+          </a:p>
+          <a:p>
+            <a:pPr algn="l">
+              <a:buFont typeface="Arial" panose="020B0604020202020204" pitchFamily="34" charset="0"/>
+              <a:buChar char="•"/>
+            </a:pPr>
+            <a:r>
+              <a:rPr lang="ru-RU" b="0" i="0" dirty="0">
+                <a:effectLst/>
+                <a:latin typeface="fkGroteskNeue"/>
+              </a:rPr>
+              <a:t>Нужна интерпретация: почему именно этот прогноз?</a:t>
+            </a:r>
+          </a:p>
+          <a:p>
+            <a:pPr marL="0" indent="0" algn="just">
+              <a:buNone/>
+            </a:pPr>
+            <a:endParaRPr lang="ru-RU" b="0" i="0" dirty="0">
+              <a:effectLst/>
+              <a:latin typeface="fkGroteskNeue"/>
+            </a:endParaRPr>
+          </a:p>
+          <a:p>
+            <a:pPr marL="0" indent="0" algn="just">
+              <a:buNone/>
+            </a:pPr>
+            <a:endParaRPr lang="ru-RU" sz="4000" dirty="0"/>
+          </a:p>
+        </p:txBody>
+      </p:sp>
+    </p:spTree>
+    <p:extLst>
+      <p:ext uri="{BB962C8B-B14F-4D97-AF65-F5344CB8AC3E}">
+        <p14:creationId xmlns:p14="http://schemas.microsoft.com/office/powerpoint/2010/main" val="2824079103"/>
+      </p:ext>
+    </p:extLst>
+  </p:cSld>
+  <p:clrMapOvr>
+    <a:masterClrMapping/>
+  </p:clrMapOvr>
+</p:sld>
+</file>
+
+<file path=ppt/slides/slide20.xml><?xml version="1.0" encoding="utf-8"?>
 <p:sld xmlns:a="http://schemas.openxmlformats.org/drawingml/2006/main" xmlns:r="http://schemas.openxmlformats.org/officeDocument/2006/relationships" xmlns:p="http://schemas.openxmlformats.org/presentationml/2006/main">
   <p:cSld>
     <p:spTree>
